--- a/examples/greenland/greenland.pptx
+++ b/examples/greenland/greenland.pptx
@@ -122,7 +122,7 @@
     <c:plotArea>
       <c:layout/>
       <c:barChart>
-        <c:barDir val="bar"/>
+        <c:barDir val="col"/>
         <c:grouping val="clustered"/>
         <c:varyColors val="0"/>
         <c:ser>
@@ -134,28 +134,28 @@
               <c:strCache>
                 <c:ptCount val="1"/>
                 <c:pt idx="0">
-                  <c:v>面积（百万平方公里）</c:v>
+                  <c:v>面积</c:v>
                 </c:pt>
               </c:strCache>
             </c:strRef>
           </c:tx>
           <c:spPr>
             <a:solidFill>
-              <a:srgbClr val="176C70"/>
+              <a:srgbClr val="B11F4B"/>
             </a:solidFill>
             <a:effectLst/>
           </c:spPr>
           <c:invertIfNegative val="0"/>
           <c:dLbls>
-            <c:numFmt formatCode="0.##" sourceLinked="0"/>
+            <c:numFmt formatCode="0.00" sourceLinked="0"/>
             <c:txPr>
               <a:bodyPr/>
               <a:lstStyle/>
               <a:p>
                 <a:pPr>
-                  <a:defRPr b="0" i="0" strike="noStrike" sz="1800" u="none">
+                  <a:defRPr b="0" i="0" strike="noStrike" sz="1200" u="none">
                     <a:solidFill>
-                      <a:srgbClr val="183D43"/>
+                      <a:srgbClr val="000000"/>
                     </a:solidFill>
                     <a:latin typeface="Arial"/>
                   </a:defRPr>
@@ -193,25 +193,25 @@
                 <c:formatCode>General</c:formatCode>
                 <c:ptCount val="2"/>
                 <c:pt idx="0">
-                  <c:v>2.17</c:v>
+                  <c:v>2.166086</c:v>
                 </c:pt>
                 <c:pt idx="1">
-                  <c:v>30.4</c:v>
+                  <c:v>30.365</c:v>
                 </c:pt>
               </c:numCache>
             </c:numRef>
           </c:val>
         </c:ser>
         <c:dLbls>
-          <c:numFmt formatCode="0.##" sourceLinked="0"/>
+          <c:numFmt formatCode="0.00" sourceLinked="0"/>
           <c:txPr>
             <a:bodyPr/>
             <a:lstStyle/>
             <a:p>
               <a:pPr>
-                <a:defRPr b="0" i="0" strike="noStrike" sz="1800" u="none">
+                <a:defRPr b="0" i="0" strike="noStrike" sz="1200" u="none">
                   <a:solidFill>
-                    <a:srgbClr val="183D43"/>
+                    <a:srgbClr val="000000"/>
                   </a:solidFill>
                   <a:latin typeface="Arial"/>
                 </a:defRPr>
@@ -238,15 +238,15 @@
           <c:orientation val="minMax"/>
         </c:scaling>
         <c:delete val="0"/>
-        <c:axPos val="l"/>
+        <c:axPos val="b"/>
         <c:numFmt formatCode="General" sourceLinked="1"/>
         <c:majorTickMark val="out"/>
         <c:minorTickMark val="none"/>
-        <c:tickLblPos val="nextTo"/>
+        <c:tickLblPos val="low"/>
         <c:spPr>
           <a:ln w="12700" cap="flat">
             <a:solidFill>
-              <a:srgbClr val="92A7A2"/>
+              <a:srgbClr val="888888"/>
             </a:solidFill>
             <a:prstDash val="solid"/>
             <a:round/>
@@ -259,7 +259,7 @@
             <a:pPr>
               <a:defRPr sz="1800" b="0" i="0" u="none" strike="noStrike">
                 <a:solidFill>
-                  <a:srgbClr val="183D43"/>
+                  <a:srgbClr val="000000"/>
                 </a:solidFill>
                 <a:latin typeface="Microsoft YaHei"/>
               </a:defRPr>
@@ -281,12 +281,12 @@
           <c:min val="0"/>
         </c:scaling>
         <c:delete val="0"/>
-        <c:axPos val="b"/>
+        <c:axPos val="l"/>
         <c:majorGridlines>
           <c:spPr>
             <a:ln w="12700" cap="flat">
               <a:solidFill>
-                <a:srgbClr val="D5DEDA"/>
+                <a:srgbClr val="888888"/>
               </a:solidFill>
               <a:prstDash val="solid"/>
               <a:round/>
@@ -296,11 +296,11 @@
         <c:numFmt formatCode="General" sourceLinked="0"/>
         <c:majorTickMark val="out"/>
         <c:minorTickMark val="none"/>
-        <c:tickLblPos val="low"/>
+        <c:tickLblPos val="nextTo"/>
         <c:spPr>
           <a:ln w="12700" cap="flat">
             <a:solidFill>
-              <a:srgbClr val="92A7A2"/>
+              <a:srgbClr val="888888"/>
             </a:solidFill>
             <a:prstDash val="solid"/>
             <a:round/>
@@ -311,11 +311,11 @@
           <a:lstStyle/>
           <a:p>
             <a:pPr>
-              <a:defRPr sz="1300" b="0" i="0" u="none" strike="noStrike">
-                <a:solidFill>
-                  <a:srgbClr val="52696B"/>
-                </a:solidFill>
-                <a:latin typeface="Microsoft YaHei"/>
+              <a:defRPr sz="1400" b="0" i="0" u="none" strike="noStrike">
+                <a:solidFill>
+                  <a:srgbClr val="000000"/>
+                </a:solidFill>
+                <a:latin typeface="Arial"/>
               </a:defRPr>
             </a:pPr>
             <a:endParaRPr lang="en-US"/>
@@ -324,7 +324,244 @@
         <c:crossAx val="2094734554"/>
         <c:crosses val="autoZero"/>
         <c:crossBetween val="between"/>
-        <c:majorUnit val="5"/>
+        <c:majorUnit val="10"/>
+      </c:valAx>
+      <c:spPr>
+        <a:noFill/>
+        <a:ln>
+          <a:noFill/>
+        </a:ln>
+        <a:effectLst/>
+      </c:spPr>
+    </c:plotArea>
+    <c:plotVisOnly val="1"/>
+    <c:dispBlanksAs val="span"/>
+  </c:chart>
+  <c:spPr>
+    <a:noFill/>
+    <a:ln>
+      <a:noFill/>
+    </a:ln>
+    <a:effectLst/>
+  </c:spPr>
+  <c:externalData r:id="rId1">
+    <c:autoUpdate val="0"/>
+  </c:externalData>
+</c:chartSpace>
+</file>
+
+<file path=ppt/charts/chart2.xml><?xml version="1.0" encoding="utf-8"?>
+<c:chartSpace xmlns:c="http://schemas.openxmlformats.org/drawingml/2006/chart" xmlns:a="http://schemas.openxmlformats.org/drawingml/2006/main" xmlns:r="http://schemas.openxmlformats.org/officeDocument/2006/relationships">
+  <c:date1904 val="0"/>
+  <c:roundedCorners val="1"/>
+  <c:chart>
+    <c:autoTitleDeleted val="1"/>
+    <c:plotArea>
+      <c:layout/>
+      <c:barChart>
+        <c:barDir val="col"/>
+        <c:grouping val="clustered"/>
+        <c:varyColors val="0"/>
+        <c:ser>
+          <c:idx val="0"/>
+          <c:order val="0"/>
+          <c:tx>
+            <c:strRef>
+              <c:f>Sheet1!$B$1</c:f>
+              <c:strCache>
+                <c:ptCount val="1"/>
+                <c:pt idx="0">
+                  <c:v>面积</c:v>
+                </c:pt>
+              </c:strCache>
+            </c:strRef>
+          </c:tx>
+          <c:spPr>
+            <a:solidFill>
+              <a:srgbClr val="B11F4B"/>
+            </a:solidFill>
+            <a:effectLst/>
+          </c:spPr>
+          <c:invertIfNegative val="0"/>
+          <c:dLbls>
+            <c:numFmt formatCode="0.00" sourceLinked="0"/>
+            <c:txPr>
+              <a:bodyPr/>
+              <a:lstStyle/>
+              <a:p>
+                <a:pPr>
+                  <a:defRPr b="0" i="0" strike="noStrike" sz="1200" u="none">
+                    <a:solidFill>
+                      <a:srgbClr val="000000"/>
+                    </a:solidFill>
+                    <a:latin typeface="Arial"/>
+                  </a:defRPr>
+                </a:pPr>
+              </a:p>
+            </c:txPr>
+            <c:showLegendKey val="0"/>
+            <c:showVal val="1"/>
+            <c:showCatName val="0"/>
+            <c:showSerName val="0"/>
+            <c:showPercent val="0"/>
+            <c:showBubbleSize val="0"/>
+            <c:showLeaderLines val="0"/>
+          </c:dLbls>
+          <c:cat>
+            <c:multiLvlStrRef>
+              <c:f>Sheet1!$A$2:$A$3</c:f>
+              <c:multiLvlStrCache>
+                <c:ptCount val="2"/>
+                <c:lvl>
+                  <c:pt idx="0">
+                    <c:v>格陵兰</c:v>
+                  </c:pt>
+                  <c:pt idx="1">
+                    <c:v>非洲</c:v>
+                  </c:pt>
+                </c:lvl>
+              </c:multiLvlStrCache>
+            </c:multiLvlStrRef>
+          </c:cat>
+          <c:val>
+            <c:numRef>
+              <c:f>Sheet1!$B$2:$B$3</c:f>
+              <c:numCache>
+                <c:formatCode>General</c:formatCode>
+                <c:ptCount val="2"/>
+                <c:pt idx="0">
+                  <c:v>2.166086</c:v>
+                </c:pt>
+                <c:pt idx="1">
+                  <c:v>30.365</c:v>
+                </c:pt>
+              </c:numCache>
+            </c:numRef>
+          </c:val>
+        </c:ser>
+        <c:dLbls>
+          <c:numFmt formatCode="0.00" sourceLinked="0"/>
+          <c:txPr>
+            <a:bodyPr/>
+            <a:lstStyle/>
+            <a:p>
+              <a:pPr>
+                <a:defRPr b="0" i="0" strike="noStrike" sz="1200" u="none">
+                  <a:solidFill>
+                    <a:srgbClr val="000000"/>
+                  </a:solidFill>
+                  <a:latin typeface="Arial"/>
+                </a:defRPr>
+              </a:pPr>
+            </a:p>
+          </c:txPr>
+          <c:showLegendKey val="0"/>
+          <c:showVal val="1"/>
+          <c:showCatName val="0"/>
+          <c:showSerName val="0"/>
+          <c:showPercent val="0"/>
+          <c:showBubbleSize val="0"/>
+          <c:showLeaderLines val="0"/>
+        </c:dLbls>
+        <c:gapWidth val="150"/>
+        <c:overlap val="0"/>
+        <c:axId val="2094734554"/>
+        <c:axId val="2094734552"/>
+        <c:axId val="2094734556"/>
+      </c:barChart>
+      <c:catAx>
+        <c:axId val="2094734554"/>
+        <c:scaling>
+          <c:orientation val="minMax"/>
+        </c:scaling>
+        <c:delete val="0"/>
+        <c:axPos val="b"/>
+        <c:numFmt formatCode="General" sourceLinked="1"/>
+        <c:majorTickMark val="out"/>
+        <c:minorTickMark val="none"/>
+        <c:tickLblPos val="low"/>
+        <c:spPr>
+          <a:ln w="12700" cap="flat">
+            <a:solidFill>
+              <a:srgbClr val="888888"/>
+            </a:solidFill>
+            <a:prstDash val="solid"/>
+            <a:round/>
+          </a:ln>
+        </c:spPr>
+        <c:txPr>
+          <a:bodyPr/>
+          <a:lstStyle/>
+          <a:p>
+            <a:pPr>
+              <a:defRPr sz="1800" b="0" i="0" u="none" strike="noStrike">
+                <a:solidFill>
+                  <a:srgbClr val="000000"/>
+                </a:solidFill>
+                <a:latin typeface="Microsoft YaHei"/>
+              </a:defRPr>
+            </a:pPr>
+            <a:endParaRPr lang="en-US"/>
+          </a:p>
+        </c:txPr>
+        <c:crossAx val="2094734552"/>
+        <c:crosses val="autoZero"/>
+        <c:auto val="1"/>
+        <c:lblAlgn val="ctr"/>
+        <c:noMultiLvlLbl val="1"/>
+      </c:catAx>
+      <c:valAx>
+        <c:axId val="2094734552"/>
+        <c:scaling>
+          <c:orientation val="minMax"/>
+          <c:max val="35"/>
+          <c:min val="0"/>
+        </c:scaling>
+        <c:delete val="0"/>
+        <c:axPos val="l"/>
+        <c:majorGridlines>
+          <c:spPr>
+            <a:ln w="12700" cap="flat">
+              <a:solidFill>
+                <a:srgbClr val="888888"/>
+              </a:solidFill>
+              <a:prstDash val="solid"/>
+              <a:round/>
+            </a:ln>
+          </c:spPr>
+        </c:majorGridlines>
+        <c:numFmt formatCode="General" sourceLinked="0"/>
+        <c:majorTickMark val="out"/>
+        <c:minorTickMark val="none"/>
+        <c:tickLblPos val="nextTo"/>
+        <c:spPr>
+          <a:ln w="12700" cap="flat">
+            <a:solidFill>
+              <a:srgbClr val="888888"/>
+            </a:solidFill>
+            <a:prstDash val="solid"/>
+            <a:round/>
+          </a:ln>
+        </c:spPr>
+        <c:txPr>
+          <a:bodyPr/>
+          <a:lstStyle/>
+          <a:p>
+            <a:pPr>
+              <a:defRPr sz="1400" b="0" i="0" u="none" strike="noStrike">
+                <a:solidFill>
+                  <a:srgbClr val="000000"/>
+                </a:solidFill>
+                <a:latin typeface="Arial"/>
+              </a:defRPr>
+            </a:pPr>
+            <a:endParaRPr lang="en-US"/>
+          </a:p>
+        </c:txPr>
+        <c:crossAx val="2094734554"/>
+        <c:crosses val="autoZero"/>
+        <c:crossBetween val="between"/>
+        <c:majorUnit val="10"/>
       </c:valAx>
       <c:spPr>
         <a:noFill/>
@@ -745,14 +982,8 @@
           <a:p>
             <a:r>
               <a:rPr lang="en-US" dirty="0"/>
-              <a:t>先问听众：图上占据的面积，是否就是地球上的真实面积？直接回答不是。本作品针对普通墨卡托的高纬放大，不把现象推广到所有世界地图。下一页用共同坐标轴比较公布面积。不要把“14倍”解释成14个轮廓可以无重叠装进非洲。
-来源（研究材料所列）：
-Esri ArcGIS Pro 3.6: Mercator
-https://pro.arcgis.com/en/pro-app/3.6/help/mapping/properties/mercator.htm
-IndexMundi: Greenland Area
-https://www.indexmundi.com/greenland/area.html
-Britannica: Africa
-https://www.britannica.com/place/Africa</a:t>
+              <a:t>按引用的面积统计，非洲约为格陵兰的 14 倍。墨卡托地图越靠近两极放大越严重，因此看轮廓容易误判面积比例。
+讲解重点：先区分对象与表示，再沿图中的关系解释变化。研究日期与版本沿用封存档案。</a:t>
             </a:r>
             <a:endParaRPr lang="en-US" dirty="0"/>
           </a:p>
@@ -840,12 +1071,14 @@
           <a:p>
             <a:r>
               <a:rPr lang="en-US" dirty="0"/>
-              <a:t>先指共同的零点，再比较两条柱的长度；不能用图上轮廓的大小代替真实面积。图中约数为2.17与30.4百万平方公里。冻结材料原值分别为2,166,086和约30,365,000平方公里，比值约14.018，因此只讲约14倍。两者均在同一条从零开始的线性坐标轴上比较。材料中的官方格陵兰2026 PDF正文提取失败，不能声称官方正文已核验；详见第7页。
-来源（研究材料所列）：
-IndexMundi: Greenland Area
-https://www.indexmundi.com/greenland/area.html
-Britannica: Africa
-https://www.britannica.com/place/Africa</a:t>
+              <a:t>引用资料给出格陵兰 2,166,086 km²、非洲约 30,365,000 km²。它们支持约 14 倍的比较，而非轮廓装箱；本次研究未核验格陵兰官方 PDF 的正文。
+材料支持：c-area
+PROJ · spherical Mercator equations: https://raw.githubusercontent.com/OSGeo/PROJ/9.9/docs/source/operations/projections/merc.rst
+Britannica · Africa: https://www.britannica.com/place/Africa
+IndexMundi · Greenland area (2021 source page): https://www.indexmundi.com/greenland/area.html
+Esri · Mercator properties: https://pro.arcgis.com/en/pro-app/3.6/help/mapping/properties/mercator.htm
+Natural Earth · public-domain boundaries: https://www.naturalearthdata.com/about/terms-of-use/
+Esri · Equal Earth: https://doc.esri.com/en/arcgis-pro/latest/help/mapping/properties/equal-earth.html</a:t>
             </a:r>
             <a:endParaRPr lang="en-US" dirty="0"/>
           </a:p>
@@ -933,12 +1166,14 @@
           <a:p>
             <a:r>
               <a:rPr lang="en-US" dirty="0"/>
-              <a:t>从左侧球面讲起：经线向极点汇聚，因此相同经度差对应的东西距离变短。右图把经线仍画为等距直线，相对于地球上的距离，高纬的东西方向就放大更多。墨卡托为保持局部角度，南北方向必须匹配这一放大。两幅图均为原生形状的定性关系示意，不是真实地理底图，不可读取纬度数值或测量面积。右图仅示意北半球一段；纬线位置未按实际投影坐标计算。
-来源（研究材料所列）：
-PROJ: Mercator documentation
-https://raw.githubusercontent.com/OSGeo/PROJ/9.9/docs/source/operations/projections/merc.rst
-Esri ArcGIS Pro 3.6: Mercator
-https://pro.arcgis.com/en/pro-app/3.6/help/mapping/properties/mercator.htm</a:t>
+              <a:t>球面上的经线向两极汇聚，墨卡托图上的经线却始终等距，因此高纬地区东西方向被放大。为了保持局部角度，南北方向也要按相同的局部倍率拉伸。
+材料支持：c-bridge, c-cause
+PROJ · spherical Mercator equations: https://raw.githubusercontent.com/OSGeo/PROJ/9.9/docs/source/operations/projections/merc.rst
+Britannica · Africa: https://www.britannica.com/place/Africa
+IndexMundi · Greenland area (2021 source page): https://www.indexmundi.com/greenland/area.html
+Esri · Mercator properties: https://pro.arcgis.com/en/pro-app/3.6/help/mapping/properties/mercator.htm
+Natural Earth · public-domain boundaries: https://www.naturalearthdata.com/about/terms-of-use/
+Esri · Equal Earth: https://doc.esri.com/en/arcgis-pro/latest/help/mapping/properties/equal-earth.html</a:t>
             </a:r>
             <a:endParaRPr lang="en-US" dirty="0"/>
           </a:p>
@@ -1026,10 +1261,14 @@
           <a:p>
             <a:r>
               <a:rPr lang="en-US" dirty="0"/>
-              <a:t>先指赤道基准的1份，再指右侧2乘2的四格。这里比较的是同样大小的微小地表区域投影后的局部尺度。球面墨卡托的局部线性倍率为纬度余弦的倒数，局部面积倍率为其平方；60度的余弦为二分之一。这是从冻结材料中的PROJ公式推导的数学例子，不是实测整个国家的倍率。非洲同样跨越不同纬度，也不能用单个纬度代表整个大陆。
-来源（研究材料所列）：
-PROJ: Mercator documentation
-https://raw.githubusercontent.com/OSGeo/PROJ/9.9/docs/source/operations/projections/merc.rst</a:t>
+              <a:t>以赤道比例为 1 的球面墨卡托为例，微小区域的线性倍率是纬度余弦的倒数，面积倍率是其平方。格陵兰跨越多个纬度，不能把局部四倍当成整国倍率。
+材料支持：c-scale
+PROJ · spherical Mercator equations: https://raw.githubusercontent.com/OSGeo/PROJ/9.9/docs/source/operations/projections/merc.rst
+Britannica · Africa: https://www.britannica.com/place/Africa
+IndexMundi · Greenland area (2021 source page): https://www.indexmundi.com/greenland/area.html
+Esri · Mercator properties: https://pro.arcgis.com/en/pro-app/3.6/help/mapping/properties/mercator.htm
+Natural Earth · public-domain boundaries: https://www.naturalearthdata.com/about/terms-of-use/
+Esri · Equal Earth: https://doc.esri.com/en/arcgis-pro/latest/help/mapping/properties/equal-earth.html</a:t>
             </a:r>
             <a:endParaRPr lang="en-US" dirty="0"/>
           </a:p>
@@ -1117,12 +1356,14 @@
           <a:p>
             <a:r>
               <a:rPr lang="en-US" dirty="0"/>
-              <a:t>不要把投影描述为画错了，而应询问它优先保留了什么。局部保角只针对无穷小范围，并不是整个大陆的形状和面积都不变。恒向线是保持罗盘航向的路线，但通常不是最短路线，本页不是实际航海指导。两极在墨卡托公式中对应无穷远，因此实际有限画面需要裁切；本作品不指定通用的裁切纬度。冻结材料还指出Web Mercator把椭球纬度代入球面公式，严格性质不同于普通椭球墨卡托，不能直接混用其保角结论。
-来源（研究材料所列）：
-Esri ArcGIS Pro 3.6: Mercator
-https://pro.arcgis.com/en/pro-app/3.6/help/mapping/properties/mercator.htm
-PROJ: Mercator documentation
-https://raw.githubusercontent.com/OSGeo/PROJ/9.9/docs/source/operations/projections/merc.rst</a:t>
+              <a:t>对边界的所有顶点施加同一个三维旋转：球面面积保持不变，固定墨卡托图上的轮廓却会改变。Natural Earth 1:1.1 亿边界是公共领域概化数据，不是精密测量。
+材料支持：c-motion, c-resource
+PROJ · spherical Mercator equations: https://raw.githubusercontent.com/OSGeo/PROJ/9.9/docs/source/operations/projections/merc.rst
+Britannica · Africa: https://www.britannica.com/place/Africa
+IndexMundi · Greenland area (2021 source page): https://www.indexmundi.com/greenland/area.html
+Esri · Mercator properties: https://pro.arcgis.com/en/pro-app/3.6/help/mapping/properties/mercator.htm
+Natural Earth · public-domain boundaries: https://www.naturalearthdata.com/about/terms-of-use/
+Esri · Equal Earth: https://doc.esri.com/en/arcgis-pro/latest/help/mapping/properties/equal-earth.html</a:t>
             </a:r>
             <a:endParaRPr lang="en-US" dirty="0"/>
           </a:p>
@@ -1210,14 +1451,14 @@
           <a:p>
             <a:r>
               <a:rPr lang="en-US" dirty="0"/>
-              <a:t>按行讲，不逐格朗读：面积行回答本次问题，角度行解释墨卡托为何仍有用途，最后一行提醒所有平面投影都要取舍。Equal Earth的等面积属性保留面积比例，但不能推导出形状、角度、方向或距离也准确。最后回到格陵兰与非洲：比较谁的真实面积更大，应读面积数据或使用等面积投影，而不是用墨卡托图上的面积判断。
-来源（研究材料所列）：
-Britannica: Map projections
-https://www.britannica.com/science/map/Map-projections
-Esri: Equal Earth
-https://doc.esri.com/en/arcgis-pro/latest/help/mapping/properties/equal-earth.html
-Esri ArcGIS Pro 3.6: Mercator
-https://pro.arcgis.com/en/pro-app/3.6/help/mapping/properties/mercator.htm</a:t>
+              <a:t>墨卡托保留局部角度，把恒定罗盘航向的恒向线画成直线，但它通常不是最短路线；两极在无穷远，有限地图必须裁切。Equal Earth 保面积比例，却不保所有形状、角度和距离。
+材料支持：c-navigation, c-poles, c-equal
+PROJ · spherical Mercator equations: https://raw.githubusercontent.com/OSGeo/PROJ/9.9/docs/source/operations/projections/merc.rst
+Britannica · Africa: https://www.britannica.com/place/Africa
+IndexMundi · Greenland area (2021 source page): https://www.indexmundi.com/greenland/area.html
+Esri · Mercator properties: https://pro.arcgis.com/en/pro-app/3.6/help/mapping/properties/mercator.htm
+Natural Earth · public-domain boundaries: https://www.naturalearthdata.com/about/terms-of-use/
+Esri · Equal Earth: https://doc.esri.com/en/arcgis-pro/latest/help/mapping/properties/equal-earth.html</a:t>
             </a:r>
             <a:endParaRPr lang="en-US" dirty="0"/>
           </a:p>
@@ -1305,20 +1546,13 @@
           <a:p>
             <a:r>
               <a:rPr lang="en-US" dirty="0"/>
-              <a:t>结尾请听众完整说出两个结论：一是格陵兰在普通墨卡托上被高纬放大；二是非洲的真实面积约为格陵兰的14倍。接着用任务选择地图：若关注面积比例，等面积投影比墨卡托合适，但并非全能。官方PDF正文缺口以及来源测量口径差异决定了这里应使用约数。若听众把“14倍”理解为轮廓装箱，回到第2页的同尺度条形图，强调比较的是公布面积之比。
-来源（研究材料所列）：
-IndexMundi: Greenland Area
-https://www.indexmundi.com/greenland/area.html
-Britannica: Africa
-https://www.britannica.com/place/Africa
-PROJ: Mercator documentation
-https://raw.githubusercontent.com/OSGeo/PROJ/9.9/docs/source/operations/projections/merc.rst
-Esri ArcGIS Pro 3.6: Mercator
-https://pro.arcgis.com/en/pro-app/3.6/help/mapping/properties/mercator.htm
-Britannica: Map projections
-https://www.britannica.com/science/map/Map-projections
-Esri: Equal Earth
-https://doc.esri.com/en/arcgis-pro/latest/help/mapping/properties/equal-earth.html</a:t>
+              <a:t>用一个条件不同的新情形检查自己的解释，但本作品没有执行真人理解测试。
+PROJ · spherical Mercator equations: https://raw.githubusercontent.com/OSGeo/PROJ/9.9/docs/source/operations/projections/merc.rst
+Britannica · Africa: https://www.britannica.com/place/Africa
+IndexMundi · Greenland area (2021 source page): https://www.indexmundi.com/greenland/area.html
+Esri · Mercator properties: https://pro.arcgis.com/en/pro-app/3.6/help/mapping/properties/mercator.htm
+Natural Earth · public-domain boundaries: https://www.naturalearthdata.com/about/terms-of-use/
+Esri · Equal Earth: https://doc.esri.com/en/arcgis-pro/latest/help/mapping/properties/equal-earth.html</a:t>
             </a:r>
             <a:endParaRPr lang="en-US" dirty="0"/>
           </a:p>
@@ -1673,7 +1907,7 @@
     <p:bg>
       <p:bgPr>
         <a:solidFill>
-          <a:srgbClr val="F6F4EE"/>
+          <a:srgbClr val="F7F4EF"/>
         </a:solidFill>
       </p:bgPr>
     </p:bg>
@@ -1699,8 +1933,8 @@
         </p:nvSpPr>
         <p:spPr>
           <a:xfrm>
-            <a:off x="594360" y="329184"/>
-            <a:ext cx="10881360" cy="310896"/>
+            <a:off x="594360" y="438912"/>
+            <a:ext cx="10972800" cy="822960"/>
           </a:xfrm>
           <a:prstGeom prst="rect">
             <a:avLst/>
@@ -1716,17 +1950,17 @@
               <a:buNone/>
             </a:pPr>
             <a:r>
-              <a:rPr lang="zh-CN" altLang="en-US" sz="1300" spc="110" kern="0" dirty="0">
-                <a:solidFill>
-                  <a:srgbClr val="52696B"/>
+              <a:rPr lang="en-US" sz="3000" b="1" dirty="0">
+                <a:solidFill>
+                  <a:srgbClr val="242424"/>
                 </a:solidFill>
                 <a:latin typeface="Microsoft YaHei" pitchFamily="34" charset="0"/>
                 <a:ea typeface="Microsoft YaHei" pitchFamily="34" charset="-122"/>
                 <a:cs typeface="Microsoft YaHei" pitchFamily="34" charset="-120"/>
               </a:rPr>
-              <a:t>读懂世界地图 · 先把“看起来”与“实际”分开</a:t>
-            </a:r>
-            <a:endParaRPr lang="zh-CN" sz="1300" dirty="0"/>
+              <a:t>墨卡托地图为什么把格陵兰放大了？</a:t>
+            </a:r>
+            <a:endParaRPr lang="en-US" sz="3000" dirty="0"/>
           </a:p>
         </p:txBody>
       </p:sp>
@@ -1738,8 +1972,8 @@
         </p:nvSpPr>
         <p:spPr>
           <a:xfrm>
-            <a:off x="594360" y="859536"/>
-            <a:ext cx="10972800" cy="868680"/>
+            <a:off x="594360" y="6291072"/>
+            <a:ext cx="10424160" cy="320040"/>
           </a:xfrm>
           <a:prstGeom prst="rect">
             <a:avLst/>
@@ -1748,24 +1982,24 @@
           <a:ln/>
         </p:spPr>
         <p:txBody>
-          <a:bodyPr wrap="square" lIns="0" tIns="0" rIns="0" bIns="0" rtlCol="0" anchor="t"/>
+          <a:bodyPr wrap="square" lIns="0" tIns="0" rIns="0" bIns="0" rtlCol="0" anchor="ctr"/>
           <a:lstStyle/>
           <a:p>
             <a:pPr indent="0" marL="0">
               <a:buNone/>
             </a:pPr>
             <a:r>
-              <a:rPr lang="zh-CN" altLang="en-US" sz="3200" b="1" dirty="0">
-                <a:solidFill>
-                  <a:srgbClr val="183D43"/>
+              <a:rPr lang="en-US" sz="1100" dirty="0">
+                <a:solidFill>
+                  <a:srgbClr val="5C5C5C"/>
                 </a:solidFill>
                 <a:latin typeface="Microsoft YaHei" pitchFamily="34" charset="0"/>
                 <a:ea typeface="Microsoft YaHei" pitchFamily="34" charset="-122"/>
                 <a:cs typeface="Microsoft YaHei" pitchFamily="34" charset="-120"/>
               </a:rPr>
-              <a:t>格陵兰为什么在某些世界地图上显得巨大？</a:t>
-            </a:r>
-            <a:endParaRPr lang="zh-CN" sz="3200" dirty="0"/>
+              <a:t>研究快照：2026-09-16 / 17；本作品不冒充新实测</a:t>
+            </a:r>
+            <a:endParaRPr lang="en-US" sz="1100" dirty="0"/>
           </a:p>
         </p:txBody>
       </p:sp>
@@ -1777,8 +2011,8 @@
         </p:nvSpPr>
         <p:spPr>
           <a:xfrm>
-            <a:off x="594360" y="6345936"/>
-            <a:ext cx="10515600" cy="228600"/>
+            <a:off x="11018520" y="6254496"/>
+            <a:ext cx="502920" cy="365760"/>
           </a:xfrm>
           <a:prstGeom prst="rect">
             <a:avLst/>
@@ -1790,21 +2024,21 @@
           <a:bodyPr wrap="square" lIns="0" tIns="0" rIns="0" bIns="0" rtlCol="0" anchor="ctr"/>
           <a:lstStyle/>
           <a:p>
-            <a:pPr indent="0" marL="0">
+            <a:pPr algn="r" indent="0" marL="0">
               <a:buNone/>
             </a:pPr>
             <a:r>
-              <a:rPr lang="zh-CN" altLang="en-US" sz="1050" dirty="0">
-                <a:solidFill>
-                  <a:srgbClr val="52696B"/>
+              <a:rPr lang="en-US" sz="1300" dirty="0">
+                <a:solidFill>
+                  <a:srgbClr val="5C5C5C"/>
                 </a:solidFill>
                 <a:latin typeface="Microsoft YaHei" pitchFamily="34" charset="0"/>
                 <a:ea typeface="Microsoft YaHei" pitchFamily="34" charset="-122"/>
                 <a:cs typeface="Microsoft YaHei" pitchFamily="34" charset="-120"/>
               </a:rPr>
-              <a:t>PROJ 9.9 墨卡托公式；Esri ArcGIS Pro 3.6《墨卡托》</a:t>
-            </a:r>
-            <a:endParaRPr lang="zh-CN" sz="1050" dirty="0"/>
+              <a:t>01</a:t>
+            </a:r>
+            <a:endParaRPr lang="en-US" sz="1300" dirty="0"/>
           </a:p>
         </p:txBody>
       </p:sp>
@@ -1816,8 +2050,8 @@
         </p:nvSpPr>
         <p:spPr>
           <a:xfrm>
-            <a:off x="10972800" y="6336792"/>
-            <a:ext cx="640080" cy="256032"/>
+            <a:off x="685800" y="1481328"/>
+            <a:ext cx="10789920" cy="1097280"/>
           </a:xfrm>
           <a:prstGeom prst="rect">
             <a:avLst/>
@@ -1829,21 +2063,21 @@
           <a:bodyPr wrap="square" lIns="0" tIns="0" rIns="0" bIns="0" rtlCol="0" anchor="ctr"/>
           <a:lstStyle/>
           <a:p>
-            <a:pPr algn="r" indent="0" marL="0">
+            <a:pPr indent="0" marL="0">
               <a:buNone/>
             </a:pPr>
             <a:r>
-              <a:rPr lang="zh-CN" altLang="en-US" sz="1100" dirty="0">
-                <a:solidFill>
-                  <a:srgbClr val="52696B"/>
+              <a:rPr lang="en-US" sz="2400" dirty="0">
+                <a:solidFill>
+                  <a:srgbClr val="242424"/>
                 </a:solidFill>
                 <a:latin typeface="Microsoft YaHei" pitchFamily="34" charset="0"/>
                 <a:ea typeface="Microsoft YaHei" pitchFamily="34" charset="-122"/>
                 <a:cs typeface="Microsoft YaHei" pitchFamily="34" charset="-120"/>
               </a:rPr>
-              <a:t>1 / 7</a:t>
-            </a:r>
-            <a:endParaRPr lang="zh-CN" sz="1100" dirty="0"/>
+              <a:t>按引用的面积统计，非洲约为格陵兰的 14 倍。墨卡托地图越靠近两极放大越严重，因此看轮廓容易误判面积比例。</a:t>
+            </a:r>
+            <a:endParaRPr lang="en-US" sz="2400" dirty="0"/>
           </a:p>
         </p:txBody>
       </p:sp>
@@ -1855,8 +2089,8 @@
         </p:nvSpPr>
         <p:spPr>
           <a:xfrm>
-            <a:off x="640080" y="2057400"/>
-            <a:ext cx="6629400" cy="1325880"/>
+            <a:off x="868680" y="2606040"/>
+            <a:ext cx="5486400" cy="365760"/>
           </a:xfrm>
           <a:prstGeom prst="rect">
             <a:avLst/>
@@ -1872,47 +2106,85 @@
               <a:buNone/>
             </a:pPr>
             <a:r>
-              <a:rPr lang="zh-CN" altLang="en-US" sz="3100" b="1" dirty="0">
-                <a:solidFill>
-                  <a:srgbClr val="183D43"/>
+              <a:rPr lang="en-US" sz="1800" dirty="0">
+                <a:solidFill>
+                  <a:srgbClr val="5C5C5C"/>
                 </a:solidFill>
                 <a:latin typeface="Microsoft YaHei" pitchFamily="34" charset="0"/>
                 <a:ea typeface="Microsoft YaHei" pitchFamily="34" charset="-122"/>
                 <a:cs typeface="Microsoft YaHei" pitchFamily="34" charset="-120"/>
               </a:rPr>
-              <a:t>因为墨卡托投影越靠近两极，</a:t>
-            </a:r>
-            <a:endParaRPr lang="zh-CN" sz="3100" dirty="0"/>
-          </a:p>
+              <a:t>面积／百万平方千米</a:t>
+            </a:r>
+            <a:endParaRPr lang="en-US" sz="1800" dirty="0"/>
+          </a:p>
+        </p:txBody>
+      </p:sp>
+      <p:graphicFrame>
+        <p:nvGraphicFramePr>
+          <p:cNvPr id="7" name="Chart 0" descr=""/>
+          <p:cNvGraphicFramePr/>
+          <p:nvPr/>
+        </p:nvGraphicFramePr>
+        <p:xfrm>
+          <a:off x="777240" y="2743200"/>
+          <a:ext cx="7315200" cy="2377440"/>
+        </p:xfrm>
+        <a:graphic xmlns:a="http://schemas.openxmlformats.org/drawingml/2006/main">
+          <a:graphicData uri="http://schemas.openxmlformats.org/drawingml/2006/chart">
+            <c:chart xmlns:c="http://schemas.openxmlformats.org/drawingml/2006/chart" r:id="rId1"/>
+          </a:graphicData>
+        </a:graphic>
+      </p:graphicFrame>
+      <p:sp>
+        <p:nvSpPr>
+          <p:cNvPr id="8" name="Text 5"/>
+          <p:cNvSpPr/>
+          <p:nvPr/>
+        </p:nvSpPr>
+        <p:spPr>
+          <a:xfrm>
+            <a:off x="8458200" y="3108960"/>
+            <a:ext cx="2834640" cy="822960"/>
+          </a:xfrm>
+          <a:prstGeom prst="rect">
+            <a:avLst/>
+          </a:prstGeom>
+          <a:noFill/>
+          <a:ln/>
+        </p:spPr>
+        <p:txBody>
+          <a:bodyPr wrap="square" lIns="0" tIns="0" rIns="0" bIns="0" rtlCol="0" anchor="ctr"/>
+          <a:lstStyle/>
           <a:p>
             <a:pPr indent="0" marL="0">
               <a:buNone/>
             </a:pPr>
             <a:r>
-              <a:rPr lang="zh-CN" altLang="en-US" sz="3100" b="1" dirty="0">
-                <a:solidFill>
-                  <a:srgbClr val="183D43"/>
+              <a:rPr lang="en-US" sz="3400" b="1" dirty="0">
+                <a:solidFill>
+                  <a:srgbClr val="B11F4B"/>
                 </a:solidFill>
                 <a:latin typeface="Microsoft YaHei" pitchFamily="34" charset="0"/>
                 <a:ea typeface="Microsoft YaHei" pitchFamily="34" charset="-122"/>
                 <a:cs typeface="Microsoft YaHei" pitchFamily="34" charset="-120"/>
               </a:rPr>
-              <a:t>放大越严重。</a:t>
-            </a:r>
-            <a:endParaRPr lang="zh-CN" sz="3100" dirty="0"/>
-          </a:p>
-        </p:txBody>
-      </p:sp>
-      <p:sp>
-        <p:nvSpPr>
-          <p:cNvPr id="7" name="Text 5"/>
-          <p:cNvSpPr/>
-          <p:nvPr/>
-        </p:nvSpPr>
-        <p:spPr>
-          <a:xfrm>
-            <a:off x="640080" y="3703320"/>
-            <a:ext cx="6675120" cy="1005840"/>
+              <a:t>约 14 倍</a:t>
+            </a:r>
+            <a:endParaRPr lang="en-US" sz="3400" dirty="0"/>
+          </a:p>
+        </p:txBody>
+      </p:sp>
+      <p:sp>
+        <p:nvSpPr>
+          <p:cNvPr id="9" name="Text 6"/>
+          <p:cNvSpPr/>
+          <p:nvPr/>
+        </p:nvSpPr>
+        <p:spPr>
+          <a:xfrm>
+            <a:off x="8458200" y="4069080"/>
+            <a:ext cx="2834640" cy="731520"/>
           </a:xfrm>
           <a:prstGeom prst="rect">
             <a:avLst/>
@@ -1928,72 +2200,47 @@
               <a:buNone/>
             </a:pPr>
             <a:r>
-              <a:rPr lang="zh-CN" altLang="en-US" sz="2200" dirty="0">
-                <a:solidFill>
-                  <a:srgbClr val="183D43"/>
+              <a:rPr lang="en-US" sz="2100" dirty="0">
+                <a:solidFill>
+                  <a:srgbClr val="242424"/>
                 </a:solidFill>
                 <a:latin typeface="Microsoft YaHei" pitchFamily="34" charset="0"/>
                 <a:ea typeface="Microsoft YaHei" pitchFamily="34" charset="-122"/>
                 <a:cs typeface="Microsoft YaHei" pitchFamily="34" charset="-120"/>
               </a:rPr>
-              <a:t>格陵兰位于高纬度，所以纸上的面积</a:t>
-            </a:r>
-            <a:endParaRPr lang="zh-CN" sz="2200" dirty="0"/>
+              <a:t>统计面积比较</a:t>
+            </a:r>
+            <a:endParaRPr lang="en-US" sz="2100" dirty="0"/>
           </a:p>
           <a:p>
             <a:pPr indent="0" marL="0">
               <a:buNone/>
             </a:pPr>
             <a:r>
-              <a:rPr lang="zh-CN" altLang="en-US" sz="2200" dirty="0">
-                <a:solidFill>
-                  <a:srgbClr val="183D43"/>
+              <a:rPr lang="en-US" sz="2100" dirty="0">
+                <a:solidFill>
+                  <a:srgbClr val="242424"/>
                 </a:solidFill>
                 <a:latin typeface="Microsoft YaHei" pitchFamily="34" charset="0"/>
                 <a:ea typeface="Microsoft YaHei" pitchFamily="34" charset="-122"/>
                 <a:cs typeface="Microsoft YaHei" pitchFamily="34" charset="-120"/>
               </a:rPr>
-              <a:t>会显得不成比例；这不是所有地图的共同问题。</a:t>
-            </a:r>
-            <a:endParaRPr lang="zh-CN" sz="2200" dirty="0"/>
-          </a:p>
-        </p:txBody>
-      </p:sp>
-      <p:sp>
-        <p:nvSpPr>
-          <p:cNvPr id="8" name="Shape 6"/>
-          <p:cNvSpPr/>
-          <p:nvPr/>
-        </p:nvSpPr>
-        <p:spPr>
-          <a:xfrm>
-            <a:off x="7909560" y="2011680"/>
-            <a:ext cx="3611880" cy="3429000"/>
-          </a:xfrm>
-          <a:prstGeom prst="rect">
-            <a:avLst/>
-          </a:prstGeom>
-          <a:solidFill>
-            <a:srgbClr val="183D43"/>
-          </a:solidFill>
-          <a:ln w="12700">
-            <a:solidFill>
-              <a:srgbClr val="183D43"/>
-            </a:solidFill>
-            <a:prstDash val="solid"/>
-          </a:ln>
-        </p:spPr>
-      </p:sp>
-      <p:sp>
-        <p:nvSpPr>
-          <p:cNvPr id="9" name="Text 7"/>
-          <p:cNvSpPr/>
-          <p:nvPr/>
-        </p:nvSpPr>
-        <p:spPr>
-          <a:xfrm>
-            <a:off x="8229600" y="2350008"/>
-            <a:ext cx="2971800" cy="457200"/>
+              <a:t>不是轮廓装箱</a:t>
+            </a:r>
+            <a:endParaRPr lang="en-US" sz="2100" dirty="0"/>
+          </a:p>
+        </p:txBody>
+      </p:sp>
+      <p:sp>
+        <p:nvSpPr>
+          <p:cNvPr id="10" name="Text 7"/>
+          <p:cNvSpPr/>
+          <p:nvPr/>
+        </p:nvSpPr>
+        <p:spPr>
+          <a:xfrm>
+            <a:off x="640080" y="5468112"/>
+            <a:ext cx="10881360" cy="566928"/>
           </a:xfrm>
           <a:prstGeom prst="rect">
             <a:avLst/>
@@ -2009,134 +2256,17 @@
               <a:buNone/>
             </a:pPr>
             <a:r>
-              <a:rPr lang="zh-CN" altLang="en-US" sz="2000" dirty="0">
-                <a:solidFill>
-                  <a:srgbClr val="FFFFFF"/>
+              <a:rPr lang="en-US" sz="1700" dirty="0">
+                <a:solidFill>
+                  <a:srgbClr val="5C5C5C"/>
                 </a:solidFill>
                 <a:latin typeface="Microsoft YaHei" pitchFamily="34" charset="0"/>
                 <a:ea typeface="Microsoft YaHei" pitchFamily="34" charset="-122"/>
                 <a:cs typeface="Microsoft YaHei" pitchFamily="34" charset="-120"/>
               </a:rPr>
-              <a:t>真实面积相比</a:t>
-            </a:r>
-            <a:endParaRPr lang="zh-CN" sz="2000" dirty="0"/>
-          </a:p>
-        </p:txBody>
-      </p:sp>
-      <p:sp>
-        <p:nvSpPr>
-          <p:cNvPr id="10" name="Text 8"/>
-          <p:cNvSpPr/>
-          <p:nvPr/>
-        </p:nvSpPr>
-        <p:spPr>
-          <a:xfrm>
-            <a:off x="8229600" y="3026664"/>
-            <a:ext cx="2971800" cy="941832"/>
-          </a:xfrm>
-          <a:prstGeom prst="rect">
-            <a:avLst/>
-          </a:prstGeom>
-          <a:noFill/>
-          <a:ln/>
-        </p:spPr>
-        <p:txBody>
-          <a:bodyPr wrap="square" lIns="0" tIns="0" rIns="0" bIns="0" rtlCol="0" anchor="ctr"/>
-          <a:lstStyle/>
-          <a:p>
-            <a:pPr indent="0" marL="0">
-              <a:buNone/>
-            </a:pPr>
-            <a:r>
-              <a:rPr lang="zh-CN" altLang="en-US" sz="4700" b="1" dirty="0">
-                <a:solidFill>
-                  <a:srgbClr val="FFFFFF"/>
-                </a:solidFill>
-                <a:latin typeface="Microsoft YaHei" pitchFamily="34" charset="0"/>
-                <a:ea typeface="Microsoft YaHei" pitchFamily="34" charset="-122"/>
-                <a:cs typeface="Microsoft YaHei" pitchFamily="34" charset="-120"/>
-              </a:rPr>
-              <a:t>约14倍</a:t>
-            </a:r>
-            <a:endParaRPr lang="zh-CN" sz="4700" dirty="0"/>
-          </a:p>
-        </p:txBody>
-      </p:sp>
-      <p:sp>
-        <p:nvSpPr>
-          <p:cNvPr id="11" name="Text 9"/>
-          <p:cNvSpPr/>
-          <p:nvPr/>
-        </p:nvSpPr>
-        <p:spPr>
-          <a:xfrm>
-            <a:off x="8229600" y="4261104"/>
-            <a:ext cx="2971800" cy="548640"/>
-          </a:xfrm>
-          <a:prstGeom prst="rect">
-            <a:avLst/>
-          </a:prstGeom>
-          <a:noFill/>
-          <a:ln/>
-        </p:spPr>
-        <p:txBody>
-          <a:bodyPr wrap="square" lIns="0" tIns="0" rIns="0" bIns="0" rtlCol="0" anchor="ctr"/>
-          <a:lstStyle/>
-          <a:p>
-            <a:pPr indent="0" marL="0">
-              <a:buNone/>
-            </a:pPr>
-            <a:r>
-              <a:rPr lang="zh-CN" altLang="en-US" sz="2200" dirty="0">
-                <a:solidFill>
-                  <a:srgbClr val="FFFFFF"/>
-                </a:solidFill>
-                <a:latin typeface="Microsoft YaHei" pitchFamily="34" charset="0"/>
-                <a:ea typeface="Microsoft YaHei" pitchFamily="34" charset="-122"/>
-                <a:cs typeface="Microsoft YaHei" pitchFamily="34" charset="-120"/>
-              </a:rPr>
-              <a:t>非洲 ÷ 格陵兰</a:t>
-            </a:r>
-            <a:endParaRPr lang="zh-CN" sz="2200" dirty="0"/>
-          </a:p>
-        </p:txBody>
-      </p:sp>
-      <p:sp>
-        <p:nvSpPr>
-          <p:cNvPr id="12" name="Text 10"/>
-          <p:cNvSpPr/>
-          <p:nvPr/>
-        </p:nvSpPr>
-        <p:spPr>
-          <a:xfrm>
-            <a:off x="640080" y="5513832"/>
-            <a:ext cx="10789920" cy="411480"/>
-          </a:xfrm>
-          <a:prstGeom prst="rect">
-            <a:avLst/>
-          </a:prstGeom>
-          <a:noFill/>
-          <a:ln/>
-        </p:spPr>
-        <p:txBody>
-          <a:bodyPr wrap="square" lIns="0" tIns="0" rIns="0" bIns="0" rtlCol="0" anchor="ctr"/>
-          <a:lstStyle/>
-          <a:p>
-            <a:pPr indent="0" marL="0">
-              <a:buNone/>
-            </a:pPr>
-            <a:r>
-              <a:rPr lang="zh-CN" altLang="en-US" sz="1500" dirty="0">
-                <a:solidFill>
-                  <a:srgbClr val="52696B"/>
-                </a:solidFill>
-                <a:latin typeface="Microsoft YaHei" pitchFamily="34" charset="0"/>
-                <a:ea typeface="Microsoft YaHei" pitchFamily="34" charset="-122"/>
-                <a:cs typeface="Microsoft YaHei" pitchFamily="34" charset="-120"/>
-              </a:rPr>
-              <a:t>面积来源：IndexMundi、Britannica；使用约数。</a:t>
-            </a:r>
-            <a:endParaRPr lang="zh-CN" sz="1500" dirty="0"/>
+              <a:t>球面墨卡托；局部倍率不是整国倍率。概化边界的计算面积不替代统计面积。</a:t>
+            </a:r>
+            <a:endParaRPr lang="en-US" sz="1700" dirty="0"/>
           </a:p>
         </p:txBody>
       </p:sp>
@@ -2154,7 +2284,7 @@
     <p:bg>
       <p:bgPr>
         <a:solidFill>
-          <a:srgbClr val="F6F4EE"/>
+          <a:srgbClr val="F7F4EF"/>
         </a:solidFill>
       </p:bgPr>
     </p:bg>
@@ -2180,8 +2310,8 @@
         </p:nvSpPr>
         <p:spPr>
           <a:xfrm>
-            <a:off x="594360" y="329184"/>
-            <a:ext cx="10881360" cy="310896"/>
+            <a:off x="594360" y="438912"/>
+            <a:ext cx="10972800" cy="822960"/>
           </a:xfrm>
           <a:prstGeom prst="rect">
             <a:avLst/>
@@ -2197,17 +2327,17 @@
               <a:buNone/>
             </a:pPr>
             <a:r>
-              <a:rPr lang="zh-CN" altLang="en-US" sz="1300" spc="110" kern="0" dirty="0">
-                <a:solidFill>
-                  <a:srgbClr val="52696B"/>
+              <a:rPr lang="en-US" sz="3000" b="1" dirty="0">
+                <a:solidFill>
+                  <a:srgbClr val="242424"/>
                 </a:solidFill>
                 <a:latin typeface="Microsoft YaHei" pitchFamily="34" charset="0"/>
                 <a:ea typeface="Microsoft YaHei" pitchFamily="34" charset="-122"/>
                 <a:cs typeface="Microsoft YaHei" pitchFamily="34" charset="-120"/>
               </a:rPr>
-              <a:t>真实面积 · 同一尺度才可比较</a:t>
-            </a:r>
-            <a:endParaRPr lang="zh-CN" sz="1300" dirty="0"/>
+              <a:t>约 14 倍，不是装进 14 个轮廓</a:t>
+            </a:r>
+            <a:endParaRPr lang="en-US" sz="3000" dirty="0"/>
           </a:p>
         </p:txBody>
       </p:sp>
@@ -2219,8 +2349,8 @@
         </p:nvSpPr>
         <p:spPr>
           <a:xfrm>
-            <a:off x="594360" y="859536"/>
-            <a:ext cx="10972800" cy="868680"/>
+            <a:off x="594360" y="6291072"/>
+            <a:ext cx="10424160" cy="320040"/>
           </a:xfrm>
           <a:prstGeom prst="rect">
             <a:avLst/>
@@ -2229,24 +2359,24 @@
           <a:ln/>
         </p:spPr>
         <p:txBody>
-          <a:bodyPr wrap="square" lIns="0" tIns="0" rIns="0" bIns="0" rtlCol="0" anchor="t"/>
+          <a:bodyPr wrap="square" lIns="0" tIns="0" rIns="0" bIns="0" rtlCol="0" anchor="ctr"/>
           <a:lstStyle/>
           <a:p>
             <a:pPr indent="0" marL="0">
               <a:buNone/>
             </a:pPr>
             <a:r>
-              <a:rPr lang="zh-CN" altLang="en-US" sz="3200" b="1" dirty="0">
-                <a:solidFill>
-                  <a:srgbClr val="183D43"/>
+              <a:rPr lang="en-US" sz="1100" dirty="0">
+                <a:solidFill>
+                  <a:srgbClr val="5C5C5C"/>
                 </a:solidFill>
                 <a:latin typeface="Microsoft YaHei" pitchFamily="34" charset="0"/>
                 <a:ea typeface="Microsoft YaHei" pitchFamily="34" charset="-122"/>
                 <a:cs typeface="Microsoft YaHei" pitchFamily="34" charset="-120"/>
               </a:rPr>
-              <a:t>非洲的真实面积约为格陵兰的14倍</a:t>
-            </a:r>
-            <a:endParaRPr lang="zh-CN" sz="3200" dirty="0"/>
+              <a:t>PROJ / Britannica / IndexMundi / Esri / Natural Earth / Esri</a:t>
+            </a:r>
+            <a:endParaRPr lang="en-US" sz="1100" dirty="0"/>
           </a:p>
         </p:txBody>
       </p:sp>
@@ -2258,8 +2388,8 @@
         </p:nvSpPr>
         <p:spPr>
           <a:xfrm>
-            <a:off x="594360" y="6345936"/>
-            <a:ext cx="10515600" cy="228600"/>
+            <a:off x="11018520" y="6254496"/>
+            <a:ext cx="502920" cy="365760"/>
           </a:xfrm>
           <a:prstGeom prst="rect">
             <a:avLst/>
@@ -2271,21 +2401,21 @@
           <a:bodyPr wrap="square" lIns="0" tIns="0" rIns="0" bIns="0" rtlCol="0" anchor="ctr"/>
           <a:lstStyle/>
           <a:p>
-            <a:pPr indent="0" marL="0">
+            <a:pPr algn="r" indent="0" marL="0">
               <a:buNone/>
             </a:pPr>
             <a:r>
-              <a:rPr lang="zh-CN" altLang="en-US" sz="1050" dirty="0">
-                <a:solidFill>
-                  <a:srgbClr val="52696B"/>
+              <a:rPr lang="en-US" sz="1300" dirty="0">
+                <a:solidFill>
+                  <a:srgbClr val="5C5C5C"/>
                 </a:solidFill>
                 <a:latin typeface="Microsoft YaHei" pitchFamily="34" charset="0"/>
                 <a:ea typeface="Microsoft YaHei" pitchFamily="34" charset="-122"/>
                 <a:cs typeface="Microsoft YaHei" pitchFamily="34" charset="-120"/>
               </a:rPr>
-              <a:t>IndexMundi《格陵兰面积》（页面更新于2021年）；Britannica《非洲》</a:t>
-            </a:r>
-            <a:endParaRPr lang="zh-CN" sz="1050" dirty="0"/>
+              <a:t>02</a:t>
+            </a:r>
+            <a:endParaRPr lang="en-US" sz="1300" dirty="0"/>
           </a:p>
         </p:txBody>
       </p:sp>
@@ -2297,8 +2427,8 @@
         </p:nvSpPr>
         <p:spPr>
           <a:xfrm>
-            <a:off x="10972800" y="6336792"/>
-            <a:ext cx="640080" cy="256032"/>
+            <a:off x="685800" y="1463040"/>
+            <a:ext cx="10789920" cy="1152144"/>
           </a:xfrm>
           <a:prstGeom prst="rect">
             <a:avLst/>
@@ -2310,21 +2440,21 @@
           <a:bodyPr wrap="square" lIns="0" tIns="0" rIns="0" bIns="0" rtlCol="0" anchor="ctr"/>
           <a:lstStyle/>
           <a:p>
-            <a:pPr algn="r" indent="0" marL="0">
+            <a:pPr indent="0" marL="0">
               <a:buNone/>
             </a:pPr>
             <a:r>
-              <a:rPr lang="zh-CN" altLang="en-US" sz="1100" dirty="0">
-                <a:solidFill>
-                  <a:srgbClr val="52696B"/>
+              <a:rPr lang="en-US" sz="2200" dirty="0">
+                <a:solidFill>
+                  <a:srgbClr val="242424"/>
                 </a:solidFill>
                 <a:latin typeface="Microsoft YaHei" pitchFamily="34" charset="0"/>
                 <a:ea typeface="Microsoft YaHei" pitchFamily="34" charset="-122"/>
                 <a:cs typeface="Microsoft YaHei" pitchFamily="34" charset="-120"/>
               </a:rPr>
-              <a:t>2 / 7</a:t>
-            </a:r>
-            <a:endParaRPr lang="zh-CN" sz="1100" dirty="0"/>
+              <a:t>引用资料给出格陵兰 2,166,086 km²、非洲约 30,365,000 km²。它们支持约 14 倍的比较，而非轮廓装箱；本次研究未核验格陵兰官方 PDF 的正文。</a:t>
+            </a:r>
+            <a:endParaRPr lang="en-US" sz="2200" dirty="0"/>
           </a:p>
         </p:txBody>
       </p:sp>
@@ -2336,8 +2466,8 @@
         </p:nvSpPr>
         <p:spPr>
           <a:xfrm>
-            <a:off x="640080" y="1856232"/>
-            <a:ext cx="7132320" cy="393192"/>
+            <a:off x="868680" y="2606040"/>
+            <a:ext cx="5486400" cy="365760"/>
           </a:xfrm>
           <a:prstGeom prst="rect">
             <a:avLst/>
@@ -2353,17 +2483,17 @@
               <a:buNone/>
             </a:pPr>
             <a:r>
-              <a:rPr lang="zh-CN" altLang="en-US" sz="1800" dirty="0">
-                <a:solidFill>
-                  <a:srgbClr val="52696B"/>
+              <a:rPr lang="en-US" sz="1800" dirty="0">
+                <a:solidFill>
+                  <a:srgbClr val="5C5C5C"/>
                 </a:solidFill>
                 <a:latin typeface="Microsoft YaHei" pitchFamily="34" charset="0"/>
                 <a:ea typeface="Microsoft YaHei" pitchFamily="34" charset="-122"/>
                 <a:cs typeface="Microsoft YaHei" pitchFamily="34" charset="-120"/>
               </a:rPr>
-              <a:t>面积（百万平方公里，约数）</a:t>
-            </a:r>
-            <a:endParaRPr lang="zh-CN" sz="1800" dirty="0"/>
+              <a:t>面积／百万平方千米</a:t>
+            </a:r>
+            <a:endParaRPr lang="en-US" sz="1800" dirty="0"/>
           </a:p>
         </p:txBody>
       </p:sp>
@@ -2374,8 +2504,8 @@
           <p:nvPr/>
         </p:nvGraphicFramePr>
         <p:xfrm>
-          <a:off x="640080" y="2450592"/>
-          <a:ext cx="7360920" cy="3246120"/>
+          <a:off x="777240" y="2743200"/>
+          <a:ext cx="7315200" cy="2377440"/>
         </p:xfrm>
         <a:graphic xmlns:a="http://schemas.openxmlformats.org/drawingml/2006/main">
           <a:graphicData uri="http://schemas.openxmlformats.org/drawingml/2006/chart">
@@ -2385,39 +2515,14 @@
       </p:graphicFrame>
       <p:sp>
         <p:nvSpPr>
-          <p:cNvPr id="8" name="Shape 5"/>
-          <p:cNvSpPr/>
-          <p:nvPr/>
-        </p:nvSpPr>
-        <p:spPr>
-          <a:xfrm>
-            <a:off x="8339328" y="2249424"/>
-            <a:ext cx="3200400" cy="3584448"/>
-          </a:xfrm>
-          <a:prstGeom prst="rect">
-            <a:avLst/>
-          </a:prstGeom>
-          <a:solidFill>
-            <a:srgbClr val="F0E0D0"/>
-          </a:solidFill>
-          <a:ln w="12700">
-            <a:solidFill>
-              <a:srgbClr val="F0E0D0"/>
-            </a:solidFill>
-            <a:prstDash val="solid"/>
-          </a:ln>
-        </p:spPr>
-      </p:sp>
-      <p:sp>
-        <p:nvSpPr>
-          <p:cNvPr id="9" name="Text 6"/>
-          <p:cNvSpPr/>
-          <p:nvPr/>
-        </p:nvSpPr>
-        <p:spPr>
-          <a:xfrm>
-            <a:off x="8613648" y="2560320"/>
-            <a:ext cx="2651760" cy="438912"/>
+          <p:cNvPr id="8" name="Text 5"/>
+          <p:cNvSpPr/>
+          <p:nvPr/>
+        </p:nvSpPr>
+        <p:spPr>
+          <a:xfrm>
+            <a:off x="8458200" y="3108960"/>
+            <a:ext cx="2834640" cy="822960"/>
           </a:xfrm>
           <a:prstGeom prst="rect">
             <a:avLst/>
@@ -2433,30 +2538,30 @@
               <a:buNone/>
             </a:pPr>
             <a:r>
-              <a:rPr lang="zh-CN" altLang="en-US" sz="2300" b="1" dirty="0">
-                <a:solidFill>
-                  <a:srgbClr val="A04C2B"/>
+              <a:rPr lang="en-US" sz="3400" b="1" dirty="0">
+                <a:solidFill>
+                  <a:srgbClr val="B11F4B"/>
                 </a:solidFill>
                 <a:latin typeface="Microsoft YaHei" pitchFamily="34" charset="0"/>
                 <a:ea typeface="Microsoft YaHei" pitchFamily="34" charset="-122"/>
                 <a:cs typeface="Microsoft YaHei" pitchFamily="34" charset="-120"/>
               </a:rPr>
-              <a:t>读数的边界</a:t>
-            </a:r>
-            <a:endParaRPr lang="zh-CN" sz="2300" dirty="0"/>
-          </a:p>
-        </p:txBody>
-      </p:sp>
-      <p:sp>
-        <p:nvSpPr>
-          <p:cNvPr id="10" name="Text 7"/>
-          <p:cNvSpPr/>
-          <p:nvPr/>
-        </p:nvSpPr>
-        <p:spPr>
-          <a:xfrm>
-            <a:off x="8613648" y="3227832"/>
-            <a:ext cx="2651760" cy="1746504"/>
+              <a:t>约 14 倍</a:t>
+            </a:r>
+            <a:endParaRPr lang="en-US" sz="3400" dirty="0"/>
+          </a:p>
+        </p:txBody>
+      </p:sp>
+      <p:sp>
+        <p:nvSpPr>
+          <p:cNvPr id="9" name="Text 6"/>
+          <p:cNvSpPr/>
+          <p:nvPr/>
+        </p:nvSpPr>
+        <p:spPr>
+          <a:xfrm>
+            <a:off x="8458200" y="4069080"/>
+            <a:ext cx="2834640" cy="731520"/>
           </a:xfrm>
           <a:prstGeom prst="rect">
             <a:avLst/>
@@ -2472,130 +2577,73 @@
               <a:buNone/>
             </a:pPr>
             <a:r>
-              <a:rPr lang="zh-CN" altLang="en-US" sz="1900" dirty="0">
-                <a:solidFill>
-                  <a:srgbClr val="183D43"/>
+              <a:rPr lang="en-US" sz="2100" dirty="0">
+                <a:solidFill>
+                  <a:srgbClr val="242424"/>
                 </a:solidFill>
                 <a:latin typeface="Microsoft YaHei" pitchFamily="34" charset="0"/>
                 <a:ea typeface="Microsoft YaHei" pitchFamily="34" charset="-122"/>
                 <a:cs typeface="Microsoft YaHei" pitchFamily="34" charset="-120"/>
               </a:rPr>
-              <a:t>格陵兰总面积包括冰盖，</a:t>
-            </a:r>
-            <a:endParaRPr lang="zh-CN" sz="1900" dirty="0"/>
+              <a:t>统计面积比较</a:t>
+            </a:r>
+            <a:endParaRPr lang="en-US" sz="2100" dirty="0"/>
           </a:p>
           <a:p>
             <a:pPr indent="0" marL="0">
               <a:buNone/>
             </a:pPr>
             <a:r>
-              <a:rPr lang="zh-CN" altLang="en-US" sz="1900" dirty="0">
-                <a:solidFill>
-                  <a:srgbClr val="183D43"/>
+              <a:rPr lang="en-US" sz="2100" dirty="0">
+                <a:solidFill>
+                  <a:srgbClr val="242424"/>
                 </a:solidFill>
                 <a:latin typeface="Microsoft YaHei" pitchFamily="34" charset="0"/>
                 <a:ea typeface="Microsoft YaHei" pitchFamily="34" charset="-122"/>
                 <a:cs typeface="Microsoft YaHei" pitchFamily="34" charset="-120"/>
               </a:rPr>
-              <a:t>不是只算无冰区。</a:t>
-            </a:r>
-            <a:endParaRPr lang="zh-CN" sz="1900" dirty="0"/>
-          </a:p>
+              <a:t>不是轮廓装箱</a:t>
+            </a:r>
+            <a:endParaRPr lang="en-US" sz="2100" dirty="0"/>
+          </a:p>
+        </p:txBody>
+      </p:sp>
+      <p:sp>
+        <p:nvSpPr>
+          <p:cNvPr id="10" name="Text 7"/>
+          <p:cNvSpPr/>
+          <p:nvPr/>
+        </p:nvSpPr>
+        <p:spPr>
+          <a:xfrm>
+            <a:off x="640080" y="5468112"/>
+            <a:ext cx="10881360" cy="566928"/>
+          </a:xfrm>
+          <a:prstGeom prst="rect">
+            <a:avLst/>
+          </a:prstGeom>
+          <a:noFill/>
+          <a:ln/>
+        </p:spPr>
+        <p:txBody>
+          <a:bodyPr wrap="square" lIns="0" tIns="0" rIns="0" bIns="0" rtlCol="0" anchor="ctr"/>
+          <a:lstStyle/>
           <a:p>
             <a:pPr indent="0" marL="0">
               <a:buNone/>
             </a:pPr>
-            <a:endParaRPr lang="zh-CN" sz="1900" dirty="0"/>
-          </a:p>
-          <a:p>
-            <a:pPr indent="0" marL="0">
-              <a:buNone/>
-            </a:pPr>
-            <a:r>
-              <a:rPr lang="zh-CN" altLang="en-US" sz="1900" dirty="0">
-                <a:solidFill>
-                  <a:srgbClr val="183D43"/>
+            <a:r>
+              <a:rPr lang="en-US" sz="1700" dirty="0">
+                <a:solidFill>
+                  <a:srgbClr val="5C5C5C"/>
                 </a:solidFill>
                 <a:latin typeface="Microsoft YaHei" pitchFamily="34" charset="0"/>
                 <a:ea typeface="Microsoft YaHei" pitchFamily="34" charset="-122"/>
                 <a:cs typeface="Microsoft YaHei" pitchFamily="34" charset="-120"/>
               </a:rPr>
-              <a:t>两地数字并非出自</a:t>
-            </a:r>
-            <a:endParaRPr lang="zh-CN" sz="1900" dirty="0"/>
-          </a:p>
-          <a:p>
-            <a:pPr indent="0" marL="0">
-              <a:buNone/>
-            </a:pPr>
-            <a:r>
-              <a:rPr lang="zh-CN" altLang="en-US" sz="1900" dirty="0">
-                <a:solidFill>
-                  <a:srgbClr val="183D43"/>
-                </a:solidFill>
-                <a:latin typeface="Microsoft YaHei" pitchFamily="34" charset="0"/>
-                <a:ea typeface="Microsoft YaHei" pitchFamily="34" charset="-122"/>
-                <a:cs typeface="Microsoft YaHei" pitchFamily="34" charset="-120"/>
-              </a:rPr>
-              <a:t>统一的测量流程。</a:t>
-            </a:r>
-            <a:endParaRPr lang="zh-CN" sz="1900" dirty="0"/>
-          </a:p>
-        </p:txBody>
-      </p:sp>
-      <p:sp>
-        <p:nvSpPr>
-          <p:cNvPr id="11" name="Text 8"/>
-          <p:cNvSpPr/>
-          <p:nvPr/>
-        </p:nvSpPr>
-        <p:spPr>
-          <a:xfrm>
-            <a:off x="8613648" y="5084064"/>
-            <a:ext cx="2651760" cy="557784"/>
-          </a:xfrm>
-          <a:prstGeom prst="rect">
-            <a:avLst/>
-          </a:prstGeom>
-          <a:noFill/>
-          <a:ln/>
-        </p:spPr>
-        <p:txBody>
-          <a:bodyPr wrap="square" lIns="0" tIns="0" rIns="0" bIns="0" rtlCol="0" anchor="ctr"/>
-          <a:lstStyle/>
-          <a:p>
-            <a:pPr indent="0" marL="0">
-              <a:buNone/>
-            </a:pPr>
-            <a:r>
-              <a:rPr lang="zh-CN" altLang="en-US" sz="1700" b="1" dirty="0">
-                <a:solidFill>
-                  <a:srgbClr val="A04C2B"/>
-                </a:solidFill>
-                <a:latin typeface="Microsoft YaHei" pitchFamily="34" charset="0"/>
-                <a:ea typeface="Microsoft YaHei" pitchFamily="34" charset="-122"/>
-                <a:cs typeface="Microsoft YaHei" pitchFamily="34" charset="-120"/>
-              </a:rPr>
-              <a:t>“约14倍”是面积比，</a:t>
-            </a:r>
-            <a:endParaRPr lang="zh-CN" sz="1700" dirty="0"/>
-          </a:p>
-          <a:p>
-            <a:pPr indent="0" marL="0">
-              <a:buNone/>
-            </a:pPr>
-            <a:r>
-              <a:rPr lang="zh-CN" altLang="en-US" sz="1700" b="1" dirty="0">
-                <a:solidFill>
-                  <a:srgbClr val="A04C2B"/>
-                </a:solidFill>
-                <a:latin typeface="Microsoft YaHei" pitchFamily="34" charset="0"/>
-                <a:ea typeface="Microsoft YaHei" pitchFamily="34" charset="-122"/>
-                <a:cs typeface="Microsoft YaHei" pitchFamily="34" charset="-120"/>
-              </a:rPr>
-              <a:t>不是轮廓装箱结论。</a:t>
-            </a:r>
-            <a:endParaRPr lang="zh-CN" sz="1700" dirty="0"/>
+              <a:t>球面墨卡托；局部倍率不是整国倍率。概化边界的计算面积不替代统计面积。</a:t>
+            </a:r>
+            <a:endParaRPr lang="en-US" sz="1700" dirty="0"/>
           </a:p>
         </p:txBody>
       </p:sp>
@@ -2613,7 +2661,7 @@
     <p:bg>
       <p:bgPr>
         <a:solidFill>
-          <a:srgbClr val="F6F4EE"/>
+          <a:srgbClr val="F7F4EF"/>
         </a:solidFill>
       </p:bgPr>
     </p:bg>
@@ -2639,8 +2687,8 @@
         </p:nvSpPr>
         <p:spPr>
           <a:xfrm>
-            <a:off x="594360" y="329184"/>
-            <a:ext cx="10881360" cy="310896"/>
+            <a:off x="594360" y="438912"/>
+            <a:ext cx="10972800" cy="822960"/>
           </a:xfrm>
           <a:prstGeom prst="rect">
             <a:avLst/>
@@ -2656,17 +2704,17 @@
               <a:buNone/>
             </a:pPr>
             <a:r>
-              <a:rPr lang="zh-CN" altLang="en-US" sz="1300" spc="110" kern="0" dirty="0">
-                <a:solidFill>
-                  <a:srgbClr val="52696B"/>
+              <a:rPr lang="en-US" sz="3000" b="1" dirty="0">
+                <a:solidFill>
+                  <a:srgbClr val="242424"/>
                 </a:solidFill>
                 <a:latin typeface="Microsoft YaHei" pitchFamily="34" charset="0"/>
                 <a:ea typeface="Microsoft YaHei" pitchFamily="34" charset="-122"/>
                 <a:cs typeface="Microsoft YaHei" pitchFamily="34" charset="-120"/>
               </a:rPr>
-              <a:t>投影机制 · 从球面到平面</a:t>
-            </a:r>
-            <a:endParaRPr lang="zh-CN" sz="1300" dirty="0"/>
+              <a:t>同样的经度间隔，不是同样的地面距离</a:t>
+            </a:r>
+            <a:endParaRPr lang="en-US" sz="3000" dirty="0"/>
           </a:p>
         </p:txBody>
       </p:sp>
@@ -2678,8 +2726,8 @@
         </p:nvSpPr>
         <p:spPr>
           <a:xfrm>
-            <a:off x="594360" y="859536"/>
-            <a:ext cx="10972800" cy="868680"/>
+            <a:off x="594360" y="6291072"/>
+            <a:ext cx="10424160" cy="320040"/>
           </a:xfrm>
           <a:prstGeom prst="rect">
             <a:avLst/>
@@ -2688,24 +2736,24 @@
           <a:ln/>
         </p:spPr>
         <p:txBody>
-          <a:bodyPr wrap="square" lIns="0" tIns="0" rIns="0" bIns="0" rtlCol="0" anchor="t"/>
+          <a:bodyPr wrap="square" lIns="0" tIns="0" rIns="0" bIns="0" rtlCol="0" anchor="ctr"/>
           <a:lstStyle/>
           <a:p>
             <a:pPr indent="0" marL="0">
               <a:buNone/>
             </a:pPr>
             <a:r>
-              <a:rPr lang="zh-CN" altLang="en-US" sz="3200" b="1" dirty="0">
-                <a:solidFill>
-                  <a:srgbClr val="183D43"/>
+              <a:rPr lang="en-US" sz="1100" dirty="0">
+                <a:solidFill>
+                  <a:srgbClr val="5C5C5C"/>
                 </a:solidFill>
                 <a:latin typeface="Microsoft YaHei" pitchFamily="34" charset="0"/>
                 <a:ea typeface="Microsoft YaHei" pitchFamily="34" charset="-122"/>
                 <a:cs typeface="Microsoft YaHei" pitchFamily="34" charset="-120"/>
               </a:rPr>
-              <a:t>经线在球面汇聚，在墨卡托图上却保持等距</a:t>
-            </a:r>
-            <a:endParaRPr lang="zh-CN" sz="3200" dirty="0"/>
+              <a:t>PROJ / Britannica / IndexMundi / Esri / Natural Earth / Esri</a:t>
+            </a:r>
+            <a:endParaRPr lang="en-US" sz="1100" dirty="0"/>
           </a:p>
         </p:txBody>
       </p:sp>
@@ -2717,8 +2765,8 @@
         </p:nvSpPr>
         <p:spPr>
           <a:xfrm>
-            <a:off x="594360" y="6345936"/>
-            <a:ext cx="10515600" cy="228600"/>
+            <a:off x="11018520" y="6254496"/>
+            <a:ext cx="502920" cy="365760"/>
           </a:xfrm>
           <a:prstGeom prst="rect">
             <a:avLst/>
@@ -2730,21 +2778,21 @@
           <a:bodyPr wrap="square" lIns="0" tIns="0" rIns="0" bIns="0" rtlCol="0" anchor="ctr"/>
           <a:lstStyle/>
           <a:p>
-            <a:pPr indent="0" marL="0">
+            <a:pPr algn="r" indent="0" marL="0">
               <a:buNone/>
             </a:pPr>
             <a:r>
-              <a:rPr lang="zh-CN" altLang="en-US" sz="1050" dirty="0">
-                <a:solidFill>
-                  <a:srgbClr val="52696B"/>
+              <a:rPr lang="en-US" sz="1300" dirty="0">
+                <a:solidFill>
+                  <a:srgbClr val="5C5C5C"/>
                 </a:solidFill>
                 <a:latin typeface="Microsoft YaHei" pitchFamily="34" charset="0"/>
                 <a:ea typeface="Microsoft YaHei" pitchFamily="34" charset="-122"/>
                 <a:cs typeface="Microsoft YaHei" pitchFamily="34" charset="-120"/>
               </a:rPr>
-              <a:t>PROJ 9.9 墨卡托公式；Esri ArcGIS Pro 3.6《墨卡托》</a:t>
-            </a:r>
-            <a:endParaRPr lang="zh-CN" sz="1050" dirty="0"/>
+              <a:t>03</a:t>
+            </a:r>
+            <a:endParaRPr lang="en-US" sz="1300" dirty="0"/>
           </a:p>
         </p:txBody>
       </p:sp>
@@ -2756,8 +2804,8 @@
         </p:nvSpPr>
         <p:spPr>
           <a:xfrm>
-            <a:off x="10972800" y="6336792"/>
-            <a:ext cx="640080" cy="256032"/>
+            <a:off x="685800" y="1463040"/>
+            <a:ext cx="10789920" cy="1152144"/>
           </a:xfrm>
           <a:prstGeom prst="rect">
             <a:avLst/>
@@ -2769,34 +2817,59 @@
           <a:bodyPr wrap="square" lIns="0" tIns="0" rIns="0" bIns="0" rtlCol="0" anchor="ctr"/>
           <a:lstStyle/>
           <a:p>
-            <a:pPr algn="r" indent="0" marL="0">
+            <a:pPr indent="0" marL="0">
               <a:buNone/>
             </a:pPr>
             <a:r>
-              <a:rPr lang="zh-CN" altLang="en-US" sz="1100" dirty="0">
-                <a:solidFill>
-                  <a:srgbClr val="52696B"/>
+              <a:rPr lang="en-US" sz="2200" dirty="0">
+                <a:solidFill>
+                  <a:srgbClr val="242424"/>
                 </a:solidFill>
                 <a:latin typeface="Microsoft YaHei" pitchFamily="34" charset="0"/>
                 <a:ea typeface="Microsoft YaHei" pitchFamily="34" charset="-122"/>
                 <a:cs typeface="Microsoft YaHei" pitchFamily="34" charset="-120"/>
               </a:rPr>
-              <a:t>3 / 7</a:t>
-            </a:r>
-            <a:endParaRPr lang="zh-CN" sz="1100" dirty="0"/>
-          </a:p>
-        </p:txBody>
-      </p:sp>
-      <p:sp>
-        <p:nvSpPr>
-          <p:cNvPr id="6" name="Text 4"/>
-          <p:cNvSpPr/>
-          <p:nvPr/>
-        </p:nvSpPr>
-        <p:spPr>
-          <a:xfrm>
-            <a:off x="640080" y="1892808"/>
-            <a:ext cx="5166360" cy="457200"/>
+              <a:t>球面上的经线向两极汇聚，墨卡托图上的经线却始终等距，因此高纬地区东西方向被放大。为了保持局部角度，南北方向也要按相同的局部倍率拉伸。</a:t>
+            </a:r>
+            <a:endParaRPr lang="en-US" sz="2200" dirty="0"/>
+          </a:p>
+        </p:txBody>
+      </p:sp>
+      <p:sp>
+        <p:nvSpPr>
+          <p:cNvPr id="6" name="Shape 4"/>
+          <p:cNvSpPr/>
+          <p:nvPr/>
+        </p:nvSpPr>
+        <p:spPr>
+          <a:xfrm>
+            <a:off x="822960" y="2926080"/>
+            <a:ext cx="4389120" cy="777240"/>
+          </a:xfrm>
+          <a:prstGeom prst="rect">
+            <a:avLst/>
+          </a:prstGeom>
+          <a:solidFill>
+            <a:srgbClr val="FFFFFF"/>
+          </a:solidFill>
+          <a:ln w="12700">
+            <a:solidFill>
+              <a:srgbClr val="919191"/>
+            </a:solidFill>
+            <a:prstDash val="solid"/>
+          </a:ln>
+        </p:spPr>
+      </p:sp>
+      <p:sp>
+        <p:nvSpPr>
+          <p:cNvPr id="7" name="Text 5"/>
+          <p:cNvSpPr/>
+          <p:nvPr/>
+        </p:nvSpPr>
+        <p:spPr>
+          <a:xfrm>
+            <a:off x="969264" y="2999232"/>
+            <a:ext cx="4096512" cy="630936"/>
           </a:xfrm>
           <a:prstGeom prst="rect">
             <a:avLst/>
@@ -2808,34 +2881,59 @@
           <a:bodyPr wrap="square" lIns="0" tIns="0" rIns="0" bIns="0" rtlCol="0" anchor="ctr"/>
           <a:lstStyle/>
           <a:p>
-            <a:pPr indent="0" marL="0">
+            <a:pPr algn="ctr" indent="0" marL="0">
               <a:buNone/>
             </a:pPr>
             <a:r>
-              <a:rPr lang="zh-CN" altLang="en-US" sz="2100" b="1" dirty="0">
-                <a:solidFill>
-                  <a:srgbClr val="183D43"/>
+              <a:rPr lang="en-US" sz="2100" dirty="0">
+                <a:solidFill>
+                  <a:srgbClr val="242424"/>
                 </a:solidFill>
                 <a:latin typeface="Microsoft YaHei" pitchFamily="34" charset="0"/>
                 <a:ea typeface="Microsoft YaHei" pitchFamily="34" charset="-122"/>
                 <a:cs typeface="Microsoft YaHei" pitchFamily="34" charset="-120"/>
               </a:rPr>
-              <a:t>球面：同一经度差，越往高纬越窄</a:t>
-            </a:r>
-            <a:endParaRPr lang="zh-CN" sz="2100" dirty="0"/>
-          </a:p>
-        </p:txBody>
-      </p:sp>
-      <p:sp>
-        <p:nvSpPr>
-          <p:cNvPr id="7" name="Text 5"/>
-          <p:cNvSpPr/>
-          <p:nvPr/>
-        </p:nvSpPr>
-        <p:spPr>
-          <a:xfrm>
-            <a:off x="6492240" y="1892808"/>
-            <a:ext cx="5074920" cy="457200"/>
+              <a:t>球面：经线汇聚</a:t>
+            </a:r>
+            <a:endParaRPr lang="en-US" sz="2100" dirty="0"/>
+          </a:p>
+        </p:txBody>
+      </p:sp>
+      <p:sp>
+        <p:nvSpPr>
+          <p:cNvPr id="8" name="Shape 6"/>
+          <p:cNvSpPr/>
+          <p:nvPr/>
+        </p:nvSpPr>
+        <p:spPr>
+          <a:xfrm>
+            <a:off x="6492240" y="2926080"/>
+            <a:ext cx="4663440" cy="777240"/>
+          </a:xfrm>
+          <a:prstGeom prst="rect">
+            <a:avLst/>
+          </a:prstGeom>
+          <a:solidFill>
+            <a:srgbClr val="F4E3E8"/>
+          </a:solidFill>
+          <a:ln w="12700">
+            <a:solidFill>
+              <a:srgbClr val="919191"/>
+            </a:solidFill>
+            <a:prstDash val="solid"/>
+          </a:ln>
+        </p:spPr>
+      </p:sp>
+      <p:sp>
+        <p:nvSpPr>
+          <p:cNvPr id="9" name="Text 7"/>
+          <p:cNvSpPr/>
+          <p:nvPr/>
+        </p:nvSpPr>
+        <p:spPr>
+          <a:xfrm>
+            <a:off x="6638544" y="2999232"/>
+            <a:ext cx="4370832" cy="630936"/>
           </a:xfrm>
           <a:prstGeom prst="rect">
             <a:avLst/>
@@ -2847,155 +2945,58 @@
           <a:bodyPr wrap="square" lIns="0" tIns="0" rIns="0" bIns="0" rtlCol="0" anchor="ctr"/>
           <a:lstStyle/>
           <a:p>
-            <a:pPr indent="0" marL="0">
+            <a:pPr algn="ctr" indent="0" marL="0">
               <a:buNone/>
             </a:pPr>
             <a:r>
-              <a:rPr lang="zh-CN" altLang="en-US" sz="2100" b="1" dirty="0">
-                <a:solidFill>
-                  <a:srgbClr val="183D43"/>
+              <a:rPr lang="en-US" sz="2100" b="1" dirty="0">
+                <a:solidFill>
+                  <a:srgbClr val="242424"/>
                 </a:solidFill>
                 <a:latin typeface="Microsoft YaHei" pitchFamily="34" charset="0"/>
                 <a:ea typeface="Microsoft YaHei" pitchFamily="34" charset="-122"/>
                 <a:cs typeface="Microsoft YaHei" pitchFamily="34" charset="-120"/>
               </a:rPr>
-              <a:t>图上：经线等距，高纬就被拉宽</a:t>
-            </a:r>
-            <a:endParaRPr lang="zh-CN" sz="2100" dirty="0"/>
-          </a:p>
-        </p:txBody>
-      </p:sp>
-      <p:sp>
-        <p:nvSpPr>
-          <p:cNvPr id="8" name="Shape 6"/>
-          <p:cNvSpPr/>
-          <p:nvPr/>
-        </p:nvSpPr>
-        <p:spPr>
-          <a:xfrm>
-            <a:off x="1124712" y="2642616"/>
-            <a:ext cx="3108960" cy="2743200"/>
-          </a:xfrm>
-          <a:prstGeom prst="ellipse">
-            <a:avLst/>
-          </a:prstGeom>
-          <a:solidFill>
-            <a:srgbClr val="DCECE6"/>
-          </a:solidFill>
-          <a:ln w="25400">
+              <a:t>墨卡托：经线等距</a:t>
+            </a:r>
+            <a:endParaRPr lang="en-US" sz="2100" dirty="0"/>
+          </a:p>
+        </p:txBody>
+      </p:sp>
+      <p:sp>
+        <p:nvSpPr>
+          <p:cNvPr id="10" name="Shape 8"/>
+          <p:cNvSpPr/>
+          <p:nvPr/>
+        </p:nvSpPr>
+        <p:spPr>
+          <a:xfrm>
+            <a:off x="5394960" y="3310128"/>
+            <a:ext cx="868680" cy="0"/>
+          </a:xfrm>
+          <a:prstGeom prst="line">
+            <a:avLst/>
+          </a:prstGeom>
+          <a:noFill/>
+          <a:ln w="31750">
             <a:solidFill>
-              <a:srgbClr val="176C70"/>
+              <a:srgbClr val="B11F4B"/>
             </a:solidFill>
             <a:prstDash val="solid"/>
+            <a:tailEnd type="triangle"/>
           </a:ln>
         </p:spPr>
       </p:sp>
       <p:sp>
         <p:nvSpPr>
-          <p:cNvPr id="9" name="Shape 7"/>
-          <p:cNvSpPr/>
-          <p:nvPr/>
-        </p:nvSpPr>
-        <p:spPr>
-          <a:xfrm>
-            <a:off x="1865376" y="2642616"/>
-            <a:ext cx="1627632" cy="2743200"/>
-          </a:xfrm>
-          <a:prstGeom prst="ellipse">
-            <a:avLst/>
-          </a:prstGeom>
-          <a:solidFill>
-            <a:srgbClr val="DCECE6">
-              <a:alpha val="0"/>
-            </a:srgbClr>
-          </a:solidFill>
-          <a:ln w="25400">
-            <a:solidFill>
-              <a:srgbClr val="176C70"/>
-            </a:solidFill>
-            <a:prstDash val="solid"/>
-          </a:ln>
-        </p:spPr>
-      </p:sp>
-      <p:sp>
-        <p:nvSpPr>
-          <p:cNvPr id="10" name="Shape 8"/>
-          <p:cNvSpPr/>
-          <p:nvPr/>
-        </p:nvSpPr>
-        <p:spPr>
-          <a:xfrm>
-            <a:off x="2679192" y="2642616"/>
-            <a:ext cx="0" cy="2743200"/>
-          </a:xfrm>
-          <a:prstGeom prst="line">
-            <a:avLst/>
-          </a:prstGeom>
-          <a:noFill/>
-          <a:ln w="25400">
-            <a:solidFill>
-              <a:srgbClr val="176C70"/>
-            </a:solidFill>
-            <a:prstDash val="solid"/>
-          </a:ln>
-        </p:spPr>
-      </p:sp>
-      <p:sp>
-        <p:nvSpPr>
-          <p:cNvPr id="11" name="Shape 9"/>
-          <p:cNvSpPr/>
-          <p:nvPr/>
-        </p:nvSpPr>
-        <p:spPr>
-          <a:xfrm>
-            <a:off x="1444752" y="3191256"/>
-            <a:ext cx="2468880" cy="0"/>
-          </a:xfrm>
-          <a:prstGeom prst="line">
-            <a:avLst/>
-          </a:prstGeom>
-          <a:noFill/>
-          <a:ln w="38100">
-            <a:solidFill>
-              <a:srgbClr val="A04C2B"/>
-            </a:solidFill>
-            <a:prstDash val="solid"/>
-          </a:ln>
-        </p:spPr>
-      </p:sp>
-      <p:sp>
-        <p:nvSpPr>
-          <p:cNvPr id="12" name="Shape 10"/>
-          <p:cNvSpPr/>
-          <p:nvPr/>
-        </p:nvSpPr>
-        <p:spPr>
-          <a:xfrm>
-            <a:off x="1124712" y="4014216"/>
-            <a:ext cx="3108960" cy="0"/>
-          </a:xfrm>
-          <a:prstGeom prst="line">
-            <a:avLst/>
-          </a:prstGeom>
-          <a:noFill/>
-          <a:ln w="38100">
-            <a:solidFill>
-              <a:srgbClr val="A04C2B"/>
-            </a:solidFill>
-            <a:prstDash val="solid"/>
-          </a:ln>
-        </p:spPr>
-      </p:sp>
-      <p:sp>
-        <p:nvSpPr>
-          <p:cNvPr id="13" name="Text 11"/>
-          <p:cNvSpPr/>
-          <p:nvPr/>
-        </p:nvSpPr>
-        <p:spPr>
-          <a:xfrm>
-            <a:off x="4325112" y="2962656"/>
-            <a:ext cx="1005840" cy="438912"/>
+          <p:cNvPr id="11" name="Text 9"/>
+          <p:cNvSpPr/>
+          <p:nvPr/>
+        </p:nvSpPr>
+        <p:spPr>
+          <a:xfrm>
+            <a:off x="1005840" y="4023360"/>
+            <a:ext cx="4114800" cy="914400"/>
           </a:xfrm>
           <a:prstGeom prst="rect">
             <a:avLst/>
@@ -3011,303 +3012,47 @@
               <a:buNone/>
             </a:pPr>
             <a:r>
-              <a:rPr lang="zh-CN" altLang="en-US" sz="1700" dirty="0">
-                <a:solidFill>
-                  <a:srgbClr val="A04C2B"/>
+              <a:rPr lang="en-US" sz="2300" dirty="0">
+                <a:solidFill>
+                  <a:srgbClr val="242424"/>
                 </a:solidFill>
                 <a:latin typeface="Microsoft YaHei" pitchFamily="34" charset="0"/>
                 <a:ea typeface="Microsoft YaHei" pitchFamily="34" charset="-122"/>
                 <a:cs typeface="Microsoft YaHei" pitchFamily="34" charset="-120"/>
               </a:rPr>
-              <a:t>高纬</a:t>
-            </a:r>
-            <a:endParaRPr lang="zh-CN" sz="1700" dirty="0"/>
-          </a:p>
-        </p:txBody>
-      </p:sp>
-      <p:sp>
-        <p:nvSpPr>
-          <p:cNvPr id="14" name="Text 12"/>
-          <p:cNvSpPr/>
-          <p:nvPr/>
-        </p:nvSpPr>
-        <p:spPr>
-          <a:xfrm>
-            <a:off x="4325112" y="3794760"/>
-            <a:ext cx="1005840" cy="438912"/>
-          </a:xfrm>
-          <a:prstGeom prst="rect">
-            <a:avLst/>
-          </a:prstGeom>
-          <a:noFill/>
-          <a:ln/>
-        </p:spPr>
-        <p:txBody>
-          <a:bodyPr wrap="square" lIns="0" tIns="0" rIns="0" bIns="0" rtlCol="0" anchor="ctr"/>
-          <a:lstStyle/>
+              <a:t>同样经度差</a:t>
+            </a:r>
+            <a:endParaRPr lang="en-US" sz="2300" dirty="0"/>
+          </a:p>
           <a:p>
             <a:pPr indent="0" marL="0">
               <a:buNone/>
             </a:pPr>
             <a:r>
-              <a:rPr lang="zh-CN" altLang="en-US" sz="1700" dirty="0">
-                <a:solidFill>
-                  <a:srgbClr val="A04C2B"/>
+              <a:rPr lang="en-US" sz="2300" dirty="0">
+                <a:solidFill>
+                  <a:srgbClr val="242424"/>
                 </a:solidFill>
                 <a:latin typeface="Microsoft YaHei" pitchFamily="34" charset="0"/>
                 <a:ea typeface="Microsoft YaHei" pitchFamily="34" charset="-122"/>
                 <a:cs typeface="Microsoft YaHei" pitchFamily="34" charset="-120"/>
               </a:rPr>
-              <a:t>赤道</a:t>
-            </a:r>
-            <a:endParaRPr lang="zh-CN" sz="1700" dirty="0"/>
-          </a:p>
-        </p:txBody>
-      </p:sp>
-      <p:sp>
-        <p:nvSpPr>
-          <p:cNvPr id="15" name="Shape 13"/>
-          <p:cNvSpPr/>
-          <p:nvPr/>
-        </p:nvSpPr>
-        <p:spPr>
-          <a:xfrm>
-            <a:off x="5504688" y="3456432"/>
-            <a:ext cx="530352" cy="630936"/>
-          </a:xfrm>
-          <a:prstGeom prst="chevron">
-            <a:avLst/>
-          </a:prstGeom>
-          <a:solidFill>
-            <a:srgbClr val="176C70"/>
-          </a:solidFill>
-          <a:ln w="12700">
-            <a:solidFill>
-              <a:srgbClr val="176C70"/>
-            </a:solidFill>
-            <a:prstDash val="solid"/>
-          </a:ln>
-        </p:spPr>
-      </p:sp>
-      <p:sp>
-        <p:nvSpPr>
-          <p:cNvPr id="16" name="Shape 14"/>
-          <p:cNvSpPr/>
-          <p:nvPr/>
-        </p:nvSpPr>
-        <p:spPr>
-          <a:xfrm>
-            <a:off x="6949440" y="2651760"/>
-            <a:ext cx="3017520" cy="2734056"/>
-          </a:xfrm>
-          <a:prstGeom prst="rect">
-            <a:avLst/>
-          </a:prstGeom>
-          <a:solidFill>
-            <a:srgbClr val="DCECE6"/>
-          </a:solidFill>
-          <a:ln w="12700">
-            <a:solidFill>
-              <a:srgbClr val="176C70"/>
-            </a:solidFill>
-            <a:prstDash val="solid"/>
-          </a:ln>
-        </p:spPr>
-      </p:sp>
-      <p:sp>
-        <p:nvSpPr>
-          <p:cNvPr id="17" name="Shape 15"/>
-          <p:cNvSpPr/>
-          <p:nvPr/>
-        </p:nvSpPr>
-        <p:spPr>
-          <a:xfrm>
-            <a:off x="6949440" y="2651760"/>
-            <a:ext cx="0" cy="2734056"/>
-          </a:xfrm>
-          <a:prstGeom prst="line">
-            <a:avLst/>
-          </a:prstGeom>
-          <a:noFill/>
-          <a:ln w="25400">
-            <a:solidFill>
-              <a:srgbClr val="176C70"/>
-            </a:solidFill>
-            <a:prstDash val="solid"/>
-          </a:ln>
-        </p:spPr>
-      </p:sp>
-      <p:sp>
-        <p:nvSpPr>
-          <p:cNvPr id="18" name="Shape 16"/>
-          <p:cNvSpPr/>
-          <p:nvPr/>
-        </p:nvSpPr>
-        <p:spPr>
-          <a:xfrm>
-            <a:off x="7955280" y="2651760"/>
-            <a:ext cx="0" cy="2734056"/>
-          </a:xfrm>
-          <a:prstGeom prst="line">
-            <a:avLst/>
-          </a:prstGeom>
-          <a:noFill/>
-          <a:ln w="25400">
-            <a:solidFill>
-              <a:srgbClr val="176C70"/>
-            </a:solidFill>
-            <a:prstDash val="solid"/>
-          </a:ln>
-        </p:spPr>
-      </p:sp>
-      <p:sp>
-        <p:nvSpPr>
-          <p:cNvPr id="19" name="Shape 17"/>
-          <p:cNvSpPr/>
-          <p:nvPr/>
-        </p:nvSpPr>
-        <p:spPr>
-          <a:xfrm>
-            <a:off x="8961120" y="2651760"/>
-            <a:ext cx="0" cy="2734056"/>
-          </a:xfrm>
-          <a:prstGeom prst="line">
-            <a:avLst/>
-          </a:prstGeom>
-          <a:noFill/>
-          <a:ln w="25400">
-            <a:solidFill>
-              <a:srgbClr val="176C70"/>
-            </a:solidFill>
-            <a:prstDash val="solid"/>
-          </a:ln>
-        </p:spPr>
-      </p:sp>
-      <p:sp>
-        <p:nvSpPr>
-          <p:cNvPr id="20" name="Shape 18"/>
-          <p:cNvSpPr/>
-          <p:nvPr/>
-        </p:nvSpPr>
-        <p:spPr>
-          <a:xfrm>
-            <a:off x="9966960" y="2651760"/>
-            <a:ext cx="0" cy="2734056"/>
-          </a:xfrm>
-          <a:prstGeom prst="line">
-            <a:avLst/>
-          </a:prstGeom>
-          <a:noFill/>
-          <a:ln w="25400">
-            <a:solidFill>
-              <a:srgbClr val="176C70"/>
-            </a:solidFill>
-            <a:prstDash val="solid"/>
-          </a:ln>
-        </p:spPr>
-      </p:sp>
-      <p:sp>
-        <p:nvSpPr>
-          <p:cNvPr id="21" name="Shape 19"/>
-          <p:cNvSpPr/>
-          <p:nvPr/>
-        </p:nvSpPr>
-        <p:spPr>
-          <a:xfrm>
-            <a:off x="6949440" y="3017520"/>
-            <a:ext cx="3017520" cy="0"/>
-          </a:xfrm>
-          <a:prstGeom prst="line">
-            <a:avLst/>
-          </a:prstGeom>
-          <a:noFill/>
-          <a:ln w="25400">
-            <a:solidFill>
-              <a:srgbClr val="A04C2B"/>
-            </a:solidFill>
-            <a:prstDash val="solid"/>
-          </a:ln>
-        </p:spPr>
-      </p:sp>
-      <p:sp>
-        <p:nvSpPr>
-          <p:cNvPr id="22" name="Shape 20"/>
-          <p:cNvSpPr/>
-          <p:nvPr/>
-        </p:nvSpPr>
-        <p:spPr>
-          <a:xfrm>
-            <a:off x="6949440" y="4078224"/>
-            <a:ext cx="3017520" cy="0"/>
-          </a:xfrm>
-          <a:prstGeom prst="line">
-            <a:avLst/>
-          </a:prstGeom>
-          <a:noFill/>
-          <a:ln w="25400">
-            <a:solidFill>
-              <a:srgbClr val="A04C2B"/>
-            </a:solidFill>
-            <a:prstDash val="solid"/>
-          </a:ln>
-        </p:spPr>
-      </p:sp>
-      <p:sp>
-        <p:nvSpPr>
-          <p:cNvPr id="23" name="Shape 21"/>
-          <p:cNvSpPr/>
-          <p:nvPr/>
-        </p:nvSpPr>
-        <p:spPr>
-          <a:xfrm>
-            <a:off x="6949440" y="4626864"/>
-            <a:ext cx="3017520" cy="0"/>
-          </a:xfrm>
-          <a:prstGeom prst="line">
-            <a:avLst/>
-          </a:prstGeom>
-          <a:noFill/>
-          <a:ln w="25400">
-            <a:solidFill>
-              <a:srgbClr val="A04C2B"/>
-            </a:solidFill>
-            <a:prstDash val="solid"/>
-          </a:ln>
-        </p:spPr>
-      </p:sp>
-      <p:sp>
-        <p:nvSpPr>
-          <p:cNvPr id="24" name="Shape 22"/>
-          <p:cNvSpPr/>
-          <p:nvPr/>
-        </p:nvSpPr>
-        <p:spPr>
-          <a:xfrm>
-            <a:off x="6949440" y="5093208"/>
-            <a:ext cx="3017520" cy="0"/>
-          </a:xfrm>
-          <a:prstGeom prst="line">
-            <a:avLst/>
-          </a:prstGeom>
-          <a:noFill/>
-          <a:ln w="25400">
-            <a:solidFill>
-              <a:srgbClr val="A04C2B"/>
-            </a:solidFill>
-            <a:prstDash val="solid"/>
-          </a:ln>
-        </p:spPr>
-      </p:sp>
-      <p:sp>
-        <p:nvSpPr>
-          <p:cNvPr id="25" name="Text 23"/>
-          <p:cNvSpPr/>
-          <p:nvPr/>
-        </p:nvSpPr>
-        <p:spPr>
-          <a:xfrm>
-            <a:off x="10177272" y="2816352"/>
-            <a:ext cx="1097280" cy="420624"/>
+              <a:t>高纬地面距离更短</a:t>
+            </a:r>
+            <a:endParaRPr lang="en-US" sz="2300" dirty="0"/>
+          </a:p>
+        </p:txBody>
+      </p:sp>
+      <p:sp>
+        <p:nvSpPr>
+          <p:cNvPr id="12" name="Text 10"/>
+          <p:cNvSpPr/>
+          <p:nvPr/>
+        </p:nvSpPr>
+        <p:spPr>
+          <a:xfrm>
+            <a:off x="6675120" y="4023360"/>
+            <a:ext cx="4389120" cy="914400"/>
           </a:xfrm>
           <a:prstGeom prst="rect">
             <a:avLst/>
@@ -3323,69 +3068,47 @@
               <a:buNone/>
             </a:pPr>
             <a:r>
-              <a:rPr lang="zh-CN" altLang="en-US" sz="1700" dirty="0">
-                <a:solidFill>
-                  <a:srgbClr val="A04C2B"/>
+              <a:rPr lang="en-US" sz="2300" dirty="0">
+                <a:solidFill>
+                  <a:srgbClr val="242424"/>
                 </a:solidFill>
                 <a:latin typeface="Microsoft YaHei" pitchFamily="34" charset="0"/>
                 <a:ea typeface="Microsoft YaHei" pitchFamily="34" charset="-122"/>
                 <a:cs typeface="Microsoft YaHei" pitchFamily="34" charset="-120"/>
               </a:rPr>
-              <a:t>高纬</a:t>
-            </a:r>
-            <a:endParaRPr lang="zh-CN" sz="1700" dirty="0"/>
-          </a:p>
-        </p:txBody>
-      </p:sp>
-      <p:sp>
-        <p:nvSpPr>
-          <p:cNvPr id="26" name="Text 24"/>
-          <p:cNvSpPr/>
-          <p:nvPr/>
-        </p:nvSpPr>
-        <p:spPr>
-          <a:xfrm>
-            <a:off x="10177272" y="4882896"/>
-            <a:ext cx="1097280" cy="420624"/>
-          </a:xfrm>
-          <a:prstGeom prst="rect">
-            <a:avLst/>
-          </a:prstGeom>
-          <a:noFill/>
-          <a:ln/>
-        </p:spPr>
-        <p:txBody>
-          <a:bodyPr wrap="square" lIns="0" tIns="0" rIns="0" bIns="0" rtlCol="0" anchor="ctr"/>
-          <a:lstStyle/>
+              <a:t>东西拉伸更多</a:t>
+            </a:r>
+            <a:endParaRPr lang="en-US" sz="2300" dirty="0"/>
+          </a:p>
           <a:p>
             <a:pPr indent="0" marL="0">
               <a:buNone/>
             </a:pPr>
             <a:r>
-              <a:rPr lang="zh-CN" altLang="en-US" sz="1700" dirty="0">
-                <a:solidFill>
-                  <a:srgbClr val="A04C2B"/>
+              <a:rPr lang="en-US" sz="2300" dirty="0">
+                <a:solidFill>
+                  <a:srgbClr val="242424"/>
                 </a:solidFill>
                 <a:latin typeface="Microsoft YaHei" pitchFamily="34" charset="0"/>
                 <a:ea typeface="Microsoft YaHei" pitchFamily="34" charset="-122"/>
                 <a:cs typeface="Microsoft YaHei" pitchFamily="34" charset="-120"/>
               </a:rPr>
-              <a:t>赤道</a:t>
-            </a:r>
-            <a:endParaRPr lang="zh-CN" sz="1700" dirty="0"/>
-          </a:p>
-        </p:txBody>
-      </p:sp>
-      <p:sp>
-        <p:nvSpPr>
-          <p:cNvPr id="27" name="Text 25"/>
-          <p:cNvSpPr/>
-          <p:nvPr/>
-        </p:nvSpPr>
-        <p:spPr>
-          <a:xfrm>
-            <a:off x="640080" y="5568696"/>
-            <a:ext cx="10881360" cy="438912"/>
+              <a:t>南北同倍率以保局部角度</a:t>
+            </a:r>
+            <a:endParaRPr lang="en-US" sz="2300" dirty="0"/>
+          </a:p>
+        </p:txBody>
+      </p:sp>
+      <p:sp>
+        <p:nvSpPr>
+          <p:cNvPr id="13" name="Text 11"/>
+          <p:cNvSpPr/>
+          <p:nvPr/>
+        </p:nvSpPr>
+        <p:spPr>
+          <a:xfrm>
+            <a:off x="640080" y="5468112"/>
+            <a:ext cx="10881360" cy="566928"/>
           </a:xfrm>
           <a:prstGeom prst="rect">
             <a:avLst/>
@@ -3401,56 +3124,17 @@
               <a:buNone/>
             </a:pPr>
             <a:r>
-              <a:rPr lang="zh-CN" altLang="en-US" sz="1900" b="1" dirty="0">
-                <a:solidFill>
-                  <a:srgbClr val="183D43"/>
+              <a:rPr lang="en-US" sz="1700" dirty="0">
+                <a:solidFill>
+                  <a:srgbClr val="5C5C5C"/>
                 </a:solidFill>
                 <a:latin typeface="Microsoft YaHei" pitchFamily="34" charset="0"/>
                 <a:ea typeface="Microsoft YaHei" pitchFamily="34" charset="-122"/>
                 <a:cs typeface="Microsoft YaHei" pitchFamily="34" charset="-120"/>
               </a:rPr>
-              <a:t>为保留局部角度，南北方向也要同步拉伸；高纬的纬线间距因此增大。</a:t>
-            </a:r>
-            <a:endParaRPr lang="zh-CN" sz="1900" dirty="0"/>
-          </a:p>
-        </p:txBody>
-      </p:sp>
-      <p:sp>
-        <p:nvSpPr>
-          <p:cNvPr id="29" name="Text 26"/>
-          <p:cNvSpPr/>
-          <p:nvPr/>
-        </p:nvSpPr>
-        <p:spPr>
-          <a:xfrm>
-            <a:off x="640080" y="6071616"/>
-            <a:ext cx="10789920" cy="219456"/>
-          </a:xfrm>
-          <a:prstGeom prst="rect">
-            <a:avLst/>
-          </a:prstGeom>
-          <a:noFill/>
-          <a:ln/>
-        </p:spPr>
-        <p:txBody>
-          <a:bodyPr wrap="square" lIns="0" tIns="0" rIns="0" bIns="0" rtlCol="0" anchor="ctr"/>
-          <a:lstStyle/>
-          <a:p>
-            <a:pPr indent="0" marL="0">
-              <a:buNone/>
-            </a:pPr>
-            <a:r>
-              <a:rPr lang="zh-CN" altLang="en-US" sz="1100" dirty="0">
-                <a:solidFill>
-                  <a:srgbClr val="52696B"/>
-                </a:solidFill>
-                <a:latin typeface="Microsoft YaHei" pitchFamily="34" charset="0"/>
-                <a:ea typeface="Microsoft YaHei" pitchFamily="34" charset="-122"/>
-                <a:cs typeface="Microsoft YaHei" pitchFamily="34" charset="-120"/>
-              </a:rPr>
-              <a:t>关系示意，非真实地图；右图仅示意北半球一段，线条位置不可用于测量。</a:t>
-            </a:r>
-            <a:endParaRPr lang="zh-CN" sz="1100" dirty="0"/>
+              <a:t>球面墨卡托；局部倍率不是整国倍率。概化边界的计算面积不替代统计面积。</a:t>
+            </a:r>
+            <a:endParaRPr lang="en-US" sz="1700" dirty="0"/>
           </a:p>
         </p:txBody>
       </p:sp>
@@ -3468,7 +3152,7 @@
     <p:bg>
       <p:bgPr>
         <a:solidFill>
-          <a:srgbClr val="F6F4EE"/>
+          <a:srgbClr val="F7F4EF"/>
         </a:solidFill>
       </p:bgPr>
     </p:bg>
@@ -3494,8 +3178,8 @@
         </p:nvSpPr>
         <p:spPr>
           <a:xfrm>
-            <a:off x="594360" y="329184"/>
-            <a:ext cx="10881360" cy="310896"/>
+            <a:off x="594360" y="438912"/>
+            <a:ext cx="10972800" cy="822960"/>
           </a:xfrm>
           <a:prstGeom prst="rect">
             <a:avLst/>
@@ -3511,17 +3195,17 @@
               <a:buNone/>
             </a:pPr>
             <a:r>
-              <a:rPr lang="zh-CN" altLang="en-US" sz="1300" spc="110" kern="0" dirty="0">
-                <a:solidFill>
-                  <a:srgbClr val="52696B"/>
+              <a:rPr lang="en-US" sz="3000" b="1" dirty="0">
+                <a:solidFill>
+                  <a:srgbClr val="242424"/>
                 </a:solidFill>
                 <a:latin typeface="Microsoft YaHei" pitchFamily="34" charset="0"/>
                 <a:ea typeface="Microsoft YaHei" pitchFamily="34" charset="-122"/>
                 <a:cs typeface="Microsoft YaHei" pitchFamily="34" charset="-120"/>
               </a:rPr>
-              <a:t>局部例子 · 球面墨卡托，赤道比例设为1</a:t>
-            </a:r>
-            <a:endParaRPr lang="zh-CN" sz="1300" dirty="0"/>
+              <a:t>60° 附近：两方向各两倍，面积四倍</a:t>
+            </a:r>
+            <a:endParaRPr lang="en-US" sz="3000" dirty="0"/>
           </a:p>
         </p:txBody>
       </p:sp>
@@ -3533,8 +3217,8 @@
         </p:nvSpPr>
         <p:spPr>
           <a:xfrm>
-            <a:off x="594360" y="859536"/>
-            <a:ext cx="10972800" cy="868680"/>
+            <a:off x="594360" y="6291072"/>
+            <a:ext cx="10424160" cy="320040"/>
           </a:xfrm>
           <a:prstGeom prst="rect">
             <a:avLst/>
@@ -3543,24 +3227,24 @@
           <a:ln/>
         </p:spPr>
         <p:txBody>
-          <a:bodyPr wrap="square" lIns="0" tIns="0" rIns="0" bIns="0" rtlCol="0" anchor="t"/>
+          <a:bodyPr wrap="square" lIns="0" tIns="0" rIns="0" bIns="0" rtlCol="0" anchor="ctr"/>
           <a:lstStyle/>
           <a:p>
             <a:pPr indent="0" marL="0">
               <a:buNone/>
             </a:pPr>
             <a:r>
-              <a:rPr lang="zh-CN" altLang="en-US" sz="3200" b="1" dirty="0">
-                <a:solidFill>
-                  <a:srgbClr val="183D43"/>
+              <a:rPr lang="en-US" sz="1100" dirty="0">
+                <a:solidFill>
+                  <a:srgbClr val="5C5C5C"/>
                 </a:solidFill>
                 <a:latin typeface="Microsoft YaHei" pitchFamily="34" charset="0"/>
                 <a:ea typeface="Microsoft YaHei" pitchFamily="34" charset="-122"/>
                 <a:cs typeface="Microsoft YaHei" pitchFamily="34" charset="-120"/>
               </a:rPr>
-              <a:t>纬度60°附近：宽约2倍，高约2倍，面积约4倍</a:t>
-            </a:r>
-            <a:endParaRPr lang="zh-CN" sz="3200" dirty="0"/>
+              <a:t>PROJ / Britannica / IndexMundi / Esri / Natural Earth / Esri</a:t>
+            </a:r>
+            <a:endParaRPr lang="en-US" sz="1100" dirty="0"/>
           </a:p>
         </p:txBody>
       </p:sp>
@@ -3572,8 +3256,8 @@
         </p:nvSpPr>
         <p:spPr>
           <a:xfrm>
-            <a:off x="594360" y="6345936"/>
-            <a:ext cx="10515600" cy="228600"/>
+            <a:off x="11018520" y="6254496"/>
+            <a:ext cx="502920" cy="365760"/>
           </a:xfrm>
           <a:prstGeom prst="rect">
             <a:avLst/>
@@ -3585,21 +3269,21 @@
           <a:bodyPr wrap="square" lIns="0" tIns="0" rIns="0" bIns="0" rtlCol="0" anchor="ctr"/>
           <a:lstStyle/>
           <a:p>
-            <a:pPr indent="0" marL="0">
+            <a:pPr algn="r" indent="0" marL="0">
               <a:buNone/>
             </a:pPr>
             <a:r>
-              <a:rPr lang="zh-CN" altLang="en-US" sz="1050" dirty="0">
-                <a:solidFill>
-                  <a:srgbClr val="52696B"/>
+              <a:rPr lang="en-US" sz="1300" dirty="0">
+                <a:solidFill>
+                  <a:srgbClr val="5C5C5C"/>
                 </a:solidFill>
                 <a:latin typeface="Microsoft YaHei" pitchFamily="34" charset="0"/>
                 <a:ea typeface="Microsoft YaHei" pitchFamily="34" charset="-122"/>
                 <a:cs typeface="Microsoft YaHei" pitchFamily="34" charset="-120"/>
               </a:rPr>
-              <a:t>PROJ 9.9 墨卡托公式；Esri ArcGIS Pro 3.6《墨卡托》</a:t>
-            </a:r>
-            <a:endParaRPr lang="zh-CN" sz="1050" dirty="0"/>
+              <a:t>04</a:t>
+            </a:r>
+            <a:endParaRPr lang="en-US" sz="1300" dirty="0"/>
           </a:p>
         </p:txBody>
       </p:sp>
@@ -3611,8 +3295,8 @@
         </p:nvSpPr>
         <p:spPr>
           <a:xfrm>
-            <a:off x="10972800" y="6336792"/>
-            <a:ext cx="640080" cy="256032"/>
+            <a:off x="685800" y="1463040"/>
+            <a:ext cx="10789920" cy="1152144"/>
           </a:xfrm>
           <a:prstGeom prst="rect">
             <a:avLst/>
@@ -3624,34 +3308,59 @@
           <a:bodyPr wrap="square" lIns="0" tIns="0" rIns="0" bIns="0" rtlCol="0" anchor="ctr"/>
           <a:lstStyle/>
           <a:p>
-            <a:pPr algn="r" indent="0" marL="0">
+            <a:pPr indent="0" marL="0">
               <a:buNone/>
             </a:pPr>
             <a:r>
-              <a:rPr lang="zh-CN" altLang="en-US" sz="1100" dirty="0">
-                <a:solidFill>
-                  <a:srgbClr val="52696B"/>
+              <a:rPr lang="en-US" sz="2200" dirty="0">
+                <a:solidFill>
+                  <a:srgbClr val="242424"/>
                 </a:solidFill>
                 <a:latin typeface="Microsoft YaHei" pitchFamily="34" charset="0"/>
                 <a:ea typeface="Microsoft YaHei" pitchFamily="34" charset="-122"/>
                 <a:cs typeface="Microsoft YaHei" pitchFamily="34" charset="-120"/>
               </a:rPr>
-              <a:t>4 / 7</a:t>
-            </a:r>
-            <a:endParaRPr lang="zh-CN" sz="1100" dirty="0"/>
-          </a:p>
-        </p:txBody>
-      </p:sp>
-      <p:sp>
-        <p:nvSpPr>
-          <p:cNvPr id="6" name="Text 4"/>
-          <p:cNvSpPr/>
-          <p:nvPr/>
-        </p:nvSpPr>
-        <p:spPr>
-          <a:xfrm>
-            <a:off x="640080" y="1911096"/>
-            <a:ext cx="9966960" cy="420624"/>
+              <a:t>以赤道比例为 1 的球面墨卡托为例，微小区域的线性倍率是纬度余弦的倒数，面积倍率是其平方。格陵兰跨越多个纬度，不能把局部四倍当成整国倍率。</a:t>
+            </a:r>
+            <a:endParaRPr lang="en-US" sz="2200" dirty="0"/>
+          </a:p>
+        </p:txBody>
+      </p:sp>
+      <p:sp>
+        <p:nvSpPr>
+          <p:cNvPr id="6" name="Shape 4"/>
+          <p:cNvSpPr/>
+          <p:nvPr/>
+        </p:nvSpPr>
+        <p:spPr>
+          <a:xfrm>
+            <a:off x="1280160" y="3337560"/>
+            <a:ext cx="960120" cy="960120"/>
+          </a:xfrm>
+          <a:prstGeom prst="rect">
+            <a:avLst/>
+          </a:prstGeom>
+          <a:solidFill>
+            <a:srgbClr val="F4E3E8"/>
+          </a:solidFill>
+          <a:ln w="12700">
+            <a:solidFill>
+              <a:srgbClr val="919191"/>
+            </a:solidFill>
+            <a:prstDash val="solid"/>
+          </a:ln>
+        </p:spPr>
+      </p:sp>
+      <p:sp>
+        <p:nvSpPr>
+          <p:cNvPr id="7" name="Text 5"/>
+          <p:cNvSpPr/>
+          <p:nvPr/>
+        </p:nvSpPr>
+        <p:spPr>
+          <a:xfrm>
+            <a:off x="822960" y="4526280"/>
+            <a:ext cx="2743200" cy="502920"/>
           </a:xfrm>
           <a:prstGeom prst="rect">
             <a:avLst/>
@@ -3667,40 +3376,64 @@
               <a:buNone/>
             </a:pPr>
             <a:r>
-              <a:rPr lang="zh-CN" altLang="en-US" sz="2000" dirty="0">
-                <a:solidFill>
-                  <a:srgbClr val="52696B"/>
+              <a:rPr lang="en-US" sz="2200" dirty="0">
+                <a:solidFill>
+                  <a:srgbClr val="242424"/>
                 </a:solidFill>
                 <a:latin typeface="Microsoft YaHei" pitchFamily="34" charset="0"/>
                 <a:ea typeface="Microsoft YaHei" pitchFamily="34" charset="-122"/>
                 <a:cs typeface="Microsoft YaHei" pitchFamily="34" charset="-120"/>
               </a:rPr>
-              <a:t>相对于赤道的局部尺度</a:t>
-            </a:r>
-            <a:endParaRPr lang="zh-CN" sz="2000" dirty="0"/>
-          </a:p>
-        </p:txBody>
-      </p:sp>
-      <p:sp>
-        <p:nvSpPr>
-          <p:cNvPr id="7" name="Shape 5"/>
-          <p:cNvSpPr/>
-          <p:nvPr/>
-        </p:nvSpPr>
-        <p:spPr>
-          <a:xfrm>
-            <a:off x="1088136" y="2935224"/>
-            <a:ext cx="1124712" cy="1124712"/>
+              <a:t>赤道：1 × 1</a:t>
+            </a:r>
+            <a:endParaRPr lang="en-US" sz="2200" dirty="0"/>
+          </a:p>
+        </p:txBody>
+      </p:sp>
+      <p:sp>
+        <p:nvSpPr>
+          <p:cNvPr id="8" name="Shape 6"/>
+          <p:cNvSpPr/>
+          <p:nvPr/>
+        </p:nvSpPr>
+        <p:spPr>
+          <a:xfrm>
+            <a:off x="3383280" y="3822192"/>
+            <a:ext cx="1188720" cy="0"/>
+          </a:xfrm>
+          <a:prstGeom prst="line">
+            <a:avLst/>
+          </a:prstGeom>
+          <a:noFill/>
+          <a:ln w="31750">
+            <a:solidFill>
+              <a:srgbClr val="B11F4B"/>
+            </a:solidFill>
+            <a:prstDash val="solid"/>
+            <a:tailEnd type="triangle"/>
+          </a:ln>
+        </p:spPr>
+      </p:sp>
+      <p:sp>
+        <p:nvSpPr>
+          <p:cNvPr id="9" name="Shape 7"/>
+          <p:cNvSpPr/>
+          <p:nvPr/>
+        </p:nvSpPr>
+        <p:spPr>
+          <a:xfrm>
+            <a:off x="5486400" y="2834640"/>
+            <a:ext cx="1920240" cy="1920240"/>
           </a:xfrm>
           <a:prstGeom prst="rect">
             <a:avLst/>
           </a:prstGeom>
           <a:solidFill>
-            <a:srgbClr val="DCECE6"/>
+            <a:srgbClr val="F4E3E8"/>
           </a:solidFill>
           <a:ln w="12700">
             <a:solidFill>
-              <a:srgbClr val="176C70"/>
+              <a:srgbClr val="919191"/>
             </a:solidFill>
             <a:prstDash val="solid"/>
           </a:ln>
@@ -3708,14 +3441,14 @@
       </p:sp>
       <p:sp>
         <p:nvSpPr>
-          <p:cNvPr id="8" name="Text 6"/>
-          <p:cNvSpPr/>
-          <p:nvPr/>
-        </p:nvSpPr>
-        <p:spPr>
-          <a:xfrm>
-            <a:off x="1088136" y="3282696"/>
-            <a:ext cx="1124712" cy="402336"/>
+          <p:cNvPr id="10" name="Text 8"/>
+          <p:cNvSpPr/>
+          <p:nvPr/>
+        </p:nvSpPr>
+        <p:spPr>
+          <a:xfrm>
+            <a:off x="5212080" y="4892040"/>
+            <a:ext cx="2834640" cy="457200"/>
           </a:xfrm>
           <a:prstGeom prst="rect">
             <a:avLst/>
@@ -3727,34 +3460,34 @@
           <a:bodyPr wrap="square" lIns="0" tIns="0" rIns="0" bIns="0" rtlCol="0" anchor="ctr"/>
           <a:lstStyle/>
           <a:p>
-            <a:pPr algn="ctr" indent="0" marL="0">
+            <a:pPr indent="0" marL="0">
               <a:buNone/>
             </a:pPr>
             <a:r>
-              <a:rPr lang="zh-CN" altLang="en-US" sz="2100" b="1" dirty="0">
-                <a:solidFill>
-                  <a:srgbClr val="183D43"/>
+              <a:rPr lang="en-US" sz="2200" dirty="0">
+                <a:solidFill>
+                  <a:srgbClr val="242424"/>
                 </a:solidFill>
                 <a:latin typeface="Microsoft YaHei" pitchFamily="34" charset="0"/>
                 <a:ea typeface="Microsoft YaHei" pitchFamily="34" charset="-122"/>
                 <a:cs typeface="Microsoft YaHei" pitchFamily="34" charset="-120"/>
               </a:rPr>
-              <a:t>1份</a:t>
-            </a:r>
-            <a:endParaRPr lang="zh-CN" sz="2100" dirty="0"/>
-          </a:p>
-        </p:txBody>
-      </p:sp>
-      <p:sp>
-        <p:nvSpPr>
-          <p:cNvPr id="9" name="Text 7"/>
-          <p:cNvSpPr/>
-          <p:nvPr/>
-        </p:nvSpPr>
-        <p:spPr>
-          <a:xfrm>
-            <a:off x="822960" y="4407408"/>
-            <a:ext cx="1691640" cy="438912"/>
+              <a:t>60°：2 × 2</a:t>
+            </a:r>
+            <a:endParaRPr lang="en-US" sz="2200" dirty="0"/>
+          </a:p>
+        </p:txBody>
+      </p:sp>
+      <p:sp>
+        <p:nvSpPr>
+          <p:cNvPr id="11" name="Text 9"/>
+          <p:cNvSpPr/>
+          <p:nvPr/>
+        </p:nvSpPr>
+        <p:spPr>
+          <a:xfrm>
+            <a:off x="8229600" y="3383280"/>
+            <a:ext cx="3200400" cy="914400"/>
           </a:xfrm>
           <a:prstGeom prst="rect">
             <a:avLst/>
@@ -3766,130 +3499,34 @@
           <a:bodyPr wrap="square" lIns="0" tIns="0" rIns="0" bIns="0" rtlCol="0" anchor="ctr"/>
           <a:lstStyle/>
           <a:p>
-            <a:pPr algn="ctr" indent="0" marL="0">
+            <a:pPr indent="0" marL="0">
               <a:buNone/>
             </a:pPr>
             <a:r>
-              <a:rPr lang="zh-CN" altLang="en-US" sz="1900" dirty="0">
-                <a:solidFill>
-                  <a:srgbClr val="183D43"/>
+              <a:rPr lang="en-US" sz="3000" b="1" dirty="0">
+                <a:solidFill>
+                  <a:srgbClr val="B11F4B"/>
                 </a:solidFill>
                 <a:latin typeface="Microsoft YaHei" pitchFamily="34" charset="0"/>
                 <a:ea typeface="Microsoft YaHei" pitchFamily="34" charset="-122"/>
                 <a:cs typeface="Microsoft YaHei" pitchFamily="34" charset="-120"/>
               </a:rPr>
-              <a:t>赤道基准</a:t>
-            </a:r>
-            <a:endParaRPr lang="zh-CN" sz="1900" dirty="0"/>
-          </a:p>
-        </p:txBody>
-      </p:sp>
-      <p:sp>
-        <p:nvSpPr>
-          <p:cNvPr id="10" name="Shape 8"/>
-          <p:cNvSpPr/>
-          <p:nvPr/>
-        </p:nvSpPr>
-        <p:spPr>
-          <a:xfrm>
-            <a:off x="2852928" y="3218688"/>
-            <a:ext cx="594360" cy="731520"/>
-          </a:xfrm>
-          <a:prstGeom prst="chevron">
-            <a:avLst/>
-          </a:prstGeom>
-          <a:solidFill>
-            <a:srgbClr val="176C70"/>
-          </a:solidFill>
-          <a:ln w="12700">
-            <a:solidFill>
-              <a:srgbClr val="176C70"/>
-            </a:solidFill>
-            <a:prstDash val="solid"/>
-          </a:ln>
-        </p:spPr>
-      </p:sp>
-      <p:sp>
-        <p:nvSpPr>
-          <p:cNvPr id="11" name="Shape 9"/>
-          <p:cNvSpPr/>
-          <p:nvPr/>
-        </p:nvSpPr>
-        <p:spPr>
-          <a:xfrm>
-            <a:off x="4050792" y="2688336"/>
-            <a:ext cx="2249424" cy="2249424"/>
-          </a:xfrm>
-          <a:prstGeom prst="rect">
-            <a:avLst/>
-          </a:prstGeom>
-          <a:solidFill>
-            <a:srgbClr val="DCECE6"/>
-          </a:solidFill>
-          <a:ln w="12700">
-            <a:solidFill>
-              <a:srgbClr val="176C70"/>
-            </a:solidFill>
-            <a:prstDash val="solid"/>
-          </a:ln>
-        </p:spPr>
-      </p:sp>
-      <p:sp>
-        <p:nvSpPr>
-          <p:cNvPr id="12" name="Shape 10"/>
-          <p:cNvSpPr/>
-          <p:nvPr/>
-        </p:nvSpPr>
-        <p:spPr>
-          <a:xfrm>
-            <a:off x="5175504" y="2688336"/>
-            <a:ext cx="0" cy="2249424"/>
-          </a:xfrm>
-          <a:prstGeom prst="line">
-            <a:avLst/>
-          </a:prstGeom>
-          <a:noFill/>
-          <a:ln w="16510">
-            <a:solidFill>
-              <a:srgbClr val="176C70"/>
-            </a:solidFill>
-            <a:prstDash val="solid"/>
-          </a:ln>
-        </p:spPr>
-      </p:sp>
-      <p:sp>
-        <p:nvSpPr>
-          <p:cNvPr id="13" name="Shape 11"/>
-          <p:cNvSpPr/>
-          <p:nvPr/>
-        </p:nvSpPr>
-        <p:spPr>
-          <a:xfrm>
-            <a:off x="4050792" y="3813048"/>
-            <a:ext cx="2249424" cy="0"/>
-          </a:xfrm>
-          <a:prstGeom prst="line">
-            <a:avLst/>
-          </a:prstGeom>
-          <a:noFill/>
-          <a:ln w="16510">
-            <a:solidFill>
-              <a:srgbClr val="176C70"/>
-            </a:solidFill>
-            <a:prstDash val="solid"/>
-          </a:ln>
-        </p:spPr>
-      </p:sp>
-      <p:sp>
-        <p:nvSpPr>
-          <p:cNvPr id="14" name="Text 12"/>
-          <p:cNvSpPr/>
-          <p:nvPr/>
-        </p:nvSpPr>
-        <p:spPr>
-          <a:xfrm>
-            <a:off x="4050792" y="5138928"/>
-            <a:ext cx="2249424" cy="374904"/>
+              <a:t>局部面积 4 倍</a:t>
+            </a:r>
+            <a:endParaRPr lang="en-US" sz="3000" dirty="0"/>
+          </a:p>
+        </p:txBody>
+      </p:sp>
+      <p:sp>
+        <p:nvSpPr>
+          <p:cNvPr id="12" name="Text 10"/>
+          <p:cNvSpPr/>
+          <p:nvPr/>
+        </p:nvSpPr>
+        <p:spPr>
+          <a:xfrm>
+            <a:off x="640080" y="5468112"/>
+            <a:ext cx="10881360" cy="566928"/>
           </a:xfrm>
           <a:prstGeom prst="rect">
             <a:avLst/>
@@ -3901,253 +3538,21 @@
           <a:bodyPr wrap="square" lIns="0" tIns="0" rIns="0" bIns="0" rtlCol="0" anchor="ctr"/>
           <a:lstStyle/>
           <a:p>
-            <a:pPr algn="ctr" indent="0" marL="0">
+            <a:pPr indent="0" marL="0">
               <a:buNone/>
             </a:pPr>
             <a:r>
-              <a:rPr lang="zh-CN" altLang="en-US" sz="1800" dirty="0">
-                <a:solidFill>
-                  <a:srgbClr val="183D43"/>
+              <a:rPr lang="en-US" sz="1700" dirty="0">
+                <a:solidFill>
+                  <a:srgbClr val="5C5C5C"/>
                 </a:solidFill>
                 <a:latin typeface="Microsoft YaHei" pitchFamily="34" charset="0"/>
                 <a:ea typeface="Microsoft YaHei" pitchFamily="34" charset="-122"/>
                 <a:cs typeface="Microsoft YaHei" pitchFamily="34" charset="-120"/>
               </a:rPr>
-              <a:t>宽约2倍</a:t>
-            </a:r>
-            <a:endParaRPr lang="zh-CN" sz="1800" dirty="0"/>
-          </a:p>
-        </p:txBody>
-      </p:sp>
-      <p:sp>
-        <p:nvSpPr>
-          <p:cNvPr id="15" name="Text 13"/>
-          <p:cNvSpPr/>
-          <p:nvPr/>
-        </p:nvSpPr>
-        <p:spPr>
-          <a:xfrm>
-            <a:off x="6464808" y="3264408"/>
-            <a:ext cx="731520" cy="1005840"/>
-          </a:xfrm>
-          <a:prstGeom prst="rect">
-            <a:avLst/>
-          </a:prstGeom>
-          <a:noFill/>
-          <a:ln/>
-        </p:spPr>
-        <p:txBody>
-          <a:bodyPr wrap="square" lIns="0" tIns="0" rIns="0" bIns="0" rtlCol="0" anchor="ctr"/>
-          <a:lstStyle/>
-          <a:p>
-            <a:pPr indent="0" marL="0">
-              <a:buNone/>
-            </a:pPr>
-            <a:r>
-              <a:rPr lang="zh-CN" altLang="en-US" sz="1800" dirty="0">
-                <a:solidFill>
-                  <a:srgbClr val="183D43"/>
-                </a:solidFill>
-                <a:latin typeface="Microsoft YaHei" pitchFamily="34" charset="0"/>
-                <a:ea typeface="Microsoft YaHei" pitchFamily="34" charset="-122"/>
-                <a:cs typeface="Microsoft YaHei" pitchFamily="34" charset="-120"/>
-              </a:rPr>
-              <a:t>高约</a:t>
-            </a:r>
-            <a:endParaRPr lang="zh-CN" sz="1800" dirty="0"/>
-          </a:p>
-          <a:p>
-            <a:pPr indent="0" marL="0">
-              <a:buNone/>
-            </a:pPr>
-            <a:r>
-              <a:rPr lang="zh-CN" altLang="en-US" sz="1800" dirty="0">
-                <a:solidFill>
-                  <a:srgbClr val="183D43"/>
-                </a:solidFill>
-                <a:latin typeface="Microsoft YaHei" pitchFamily="34" charset="0"/>
-                <a:ea typeface="Microsoft YaHei" pitchFamily="34" charset="-122"/>
-                <a:cs typeface="Microsoft YaHei" pitchFamily="34" charset="-120"/>
-              </a:rPr>
-              <a:t>2倍</a:t>
-            </a:r>
-            <a:endParaRPr lang="zh-CN" sz="1800" dirty="0"/>
-          </a:p>
-        </p:txBody>
-      </p:sp>
-      <p:sp>
-        <p:nvSpPr>
-          <p:cNvPr id="16" name="Shape 14"/>
-          <p:cNvSpPr/>
-          <p:nvPr/>
-        </p:nvSpPr>
-        <p:spPr>
-          <a:xfrm>
-            <a:off x="7726680" y="2615184"/>
-            <a:ext cx="3776472" cy="2980944"/>
-          </a:xfrm>
-          <a:prstGeom prst="rect">
-            <a:avLst/>
-          </a:prstGeom>
-          <a:solidFill>
-            <a:srgbClr val="183D43"/>
-          </a:solidFill>
-          <a:ln w="12700">
-            <a:solidFill>
-              <a:srgbClr val="183D43"/>
-            </a:solidFill>
-            <a:prstDash val="solid"/>
-          </a:ln>
-        </p:spPr>
-      </p:sp>
-      <p:sp>
-        <p:nvSpPr>
-          <p:cNvPr id="17" name="Text 15"/>
-          <p:cNvSpPr/>
-          <p:nvPr/>
-        </p:nvSpPr>
-        <p:spPr>
-          <a:xfrm>
-            <a:off x="8019288" y="2907792"/>
-            <a:ext cx="3191256" cy="667512"/>
-          </a:xfrm>
-          <a:prstGeom prst="rect">
-            <a:avLst/>
-          </a:prstGeom>
-          <a:noFill/>
-          <a:ln/>
-        </p:spPr>
-        <p:txBody>
-          <a:bodyPr wrap="square" lIns="0" tIns="0" rIns="0" bIns="0" rtlCol="0" anchor="ctr"/>
-          <a:lstStyle/>
-          <a:p>
-            <a:pPr indent="0" marL="0">
-              <a:buNone/>
-            </a:pPr>
-            <a:r>
-              <a:rPr lang="zh-CN" altLang="en-US" sz="2300" b="1" dirty="0">
-                <a:solidFill>
-                  <a:srgbClr val="FFFFFF"/>
-                </a:solidFill>
-                <a:latin typeface="Microsoft YaHei" pitchFamily="34" charset="0"/>
-                <a:ea typeface="Microsoft YaHei" pitchFamily="34" charset="-122"/>
-                <a:cs typeface="Microsoft YaHei" pitchFamily="34" charset="-120"/>
-              </a:rPr>
-              <a:t>这是微小区域的例子</a:t>
-            </a:r>
-            <a:endParaRPr lang="zh-CN" sz="2300" dirty="0"/>
-          </a:p>
-        </p:txBody>
-      </p:sp>
-      <p:sp>
-        <p:nvSpPr>
-          <p:cNvPr id="18" name="Text 16"/>
-          <p:cNvSpPr/>
-          <p:nvPr/>
-        </p:nvSpPr>
-        <p:spPr>
-          <a:xfrm>
-            <a:off x="8019288" y="3776472"/>
-            <a:ext cx="3191256" cy="1353312"/>
-          </a:xfrm>
-          <a:prstGeom prst="rect">
-            <a:avLst/>
-          </a:prstGeom>
-          <a:noFill/>
-          <a:ln/>
-        </p:spPr>
-        <p:txBody>
-          <a:bodyPr wrap="square" lIns="0" tIns="0" rIns="0" bIns="0" rtlCol="0" anchor="ctr"/>
-          <a:lstStyle/>
-          <a:p>
-            <a:pPr indent="0" marL="0">
-              <a:buNone/>
-            </a:pPr>
-            <a:r>
-              <a:rPr lang="zh-CN" altLang="en-US" sz="2100" dirty="0">
-                <a:solidFill>
-                  <a:srgbClr val="FFFFFF"/>
-                </a:solidFill>
-                <a:latin typeface="Microsoft YaHei" pitchFamily="34" charset="0"/>
-                <a:ea typeface="Microsoft YaHei" pitchFamily="34" charset="-122"/>
-                <a:cs typeface="Microsoft YaHei" pitchFamily="34" charset="-120"/>
-              </a:rPr>
-              <a:t>格陵兰跨越不同纬度，</a:t>
-            </a:r>
-            <a:endParaRPr lang="zh-CN" sz="2100" dirty="0"/>
-          </a:p>
-          <a:p>
-            <a:pPr indent="0" marL="0">
-              <a:buNone/>
-            </a:pPr>
-            <a:r>
-              <a:rPr lang="zh-CN" altLang="en-US" sz="2100" dirty="0">
-                <a:solidFill>
-                  <a:srgbClr val="FFFFFF"/>
-                </a:solidFill>
-                <a:latin typeface="Microsoft YaHei" pitchFamily="34" charset="0"/>
-                <a:ea typeface="Microsoft YaHei" pitchFamily="34" charset="-122"/>
-                <a:cs typeface="Microsoft YaHei" pitchFamily="34" charset="-120"/>
-              </a:rPr>
-              <a:t>不能给整个轮廓套用</a:t>
-            </a:r>
-            <a:endParaRPr lang="zh-CN" sz="2100" dirty="0"/>
-          </a:p>
-          <a:p>
-            <a:pPr indent="0" marL="0">
-              <a:buNone/>
-            </a:pPr>
-            <a:r>
-              <a:rPr lang="zh-CN" altLang="en-US" sz="2100" dirty="0">
-                <a:solidFill>
-                  <a:srgbClr val="FFFFFF"/>
-                </a:solidFill>
-                <a:latin typeface="Microsoft YaHei" pitchFamily="34" charset="0"/>
-                <a:ea typeface="Microsoft YaHei" pitchFamily="34" charset="-122"/>
-                <a:cs typeface="Microsoft YaHei" pitchFamily="34" charset="-120"/>
-              </a:rPr>
-              <a:t>一个统一倍率。</a:t>
-            </a:r>
-            <a:endParaRPr lang="zh-CN" sz="2100" dirty="0"/>
-          </a:p>
-        </p:txBody>
-      </p:sp>
-      <p:sp>
-        <p:nvSpPr>
-          <p:cNvPr id="19" name="Text 17"/>
-          <p:cNvSpPr/>
-          <p:nvPr/>
-        </p:nvSpPr>
-        <p:spPr>
-          <a:xfrm>
-            <a:off x="640080" y="5815584"/>
-            <a:ext cx="10789920" cy="365760"/>
-          </a:xfrm>
-          <a:prstGeom prst="rect">
-            <a:avLst/>
-          </a:prstGeom>
-          <a:noFill/>
-          <a:ln/>
-        </p:spPr>
-        <p:txBody>
-          <a:bodyPr wrap="square" lIns="0" tIns="0" rIns="0" bIns="0" rtlCol="0" anchor="ctr"/>
-          <a:lstStyle/>
-          <a:p>
-            <a:pPr indent="0" marL="0">
-              <a:buNone/>
-            </a:pPr>
-            <a:r>
-              <a:rPr lang="zh-CN" altLang="en-US" sz="1600" dirty="0">
-                <a:solidFill>
-                  <a:srgbClr val="52696B"/>
-                </a:solidFill>
-                <a:latin typeface="Microsoft YaHei" pitchFamily="34" charset="0"/>
-                <a:ea typeface="Microsoft YaHei" pitchFamily="34" charset="-122"/>
-                <a:cs typeface="Microsoft YaHei" pitchFamily="34" charset="-120"/>
-              </a:rPr>
-              <a:t>示意正方形表示局部尺度，不表示格陵兰或非洲的轮廓。</a:t>
-            </a:r>
-            <a:endParaRPr lang="zh-CN" sz="1600" dirty="0"/>
+              <a:t>球面墨卡托；局部倍率不是整国倍率。概化边界的计算面积不替代统计面积。</a:t>
+            </a:r>
+            <a:endParaRPr lang="en-US" sz="1700" dirty="0"/>
           </a:p>
         </p:txBody>
       </p:sp>
@@ -4165,7 +3570,7 @@
     <p:bg>
       <p:bgPr>
         <a:solidFill>
-          <a:srgbClr val="F6F4EE"/>
+          <a:srgbClr val="F7F4EF"/>
         </a:solidFill>
       </p:bgPr>
     </p:bg>
@@ -4191,8 +3596,8 @@
         </p:nvSpPr>
         <p:spPr>
           <a:xfrm>
-            <a:off x="594360" y="329184"/>
-            <a:ext cx="10881360" cy="310896"/>
+            <a:off x="594360" y="438912"/>
+            <a:ext cx="10972800" cy="822960"/>
           </a:xfrm>
           <a:prstGeom prst="rect">
             <a:avLst/>
@@ -4208,17 +3613,17 @@
               <a:buNone/>
             </a:pPr>
             <a:r>
-              <a:rPr lang="zh-CN" altLang="en-US" sz="1300" spc="110" kern="0" dirty="0">
-                <a:solidFill>
-                  <a:srgbClr val="52696B"/>
+              <a:rPr lang="en-US" sz="3000" b="1" dirty="0">
+                <a:solidFill>
+                  <a:srgbClr val="242424"/>
                 </a:solidFill>
                 <a:latin typeface="Microsoft YaHei" pitchFamily="34" charset="0"/>
                 <a:ea typeface="Microsoft YaHei" pitchFamily="34" charset="-122"/>
                 <a:cs typeface="Microsoft YaHei" pitchFamily="34" charset="-120"/>
               </a:rPr>
-              <a:t>用途与代价 · 墨卡托保留了什么？</a:t>
-            </a:r>
-            <a:endParaRPr lang="zh-CN" sz="1300" dirty="0"/>
+              <a:t>在球面上移动土地，而不是缩小图片</a:t>
+            </a:r>
+            <a:endParaRPr lang="en-US" sz="3000" dirty="0"/>
           </a:p>
         </p:txBody>
       </p:sp>
@@ -4230,8 +3635,8 @@
         </p:nvSpPr>
         <p:spPr>
           <a:xfrm>
-            <a:off x="594360" y="859536"/>
-            <a:ext cx="10972800" cy="868680"/>
+            <a:off x="594360" y="6291072"/>
+            <a:ext cx="10424160" cy="320040"/>
           </a:xfrm>
           <a:prstGeom prst="rect">
             <a:avLst/>
@@ -4240,24 +3645,24 @@
           <a:ln/>
         </p:spPr>
         <p:txBody>
-          <a:bodyPr wrap="square" lIns="0" tIns="0" rIns="0" bIns="0" rtlCol="0" anchor="t"/>
+          <a:bodyPr wrap="square" lIns="0" tIns="0" rIns="0" bIns="0" rtlCol="0" anchor="ctr"/>
           <a:lstStyle/>
           <a:p>
             <a:pPr indent="0" marL="0">
               <a:buNone/>
             </a:pPr>
             <a:r>
-              <a:rPr lang="zh-CN" altLang="en-US" sz="3200" b="1" dirty="0">
-                <a:solidFill>
-                  <a:srgbClr val="183D43"/>
+              <a:rPr lang="en-US" sz="1100" dirty="0">
+                <a:solidFill>
+                  <a:srgbClr val="5C5C5C"/>
                 </a:solidFill>
                 <a:latin typeface="Microsoft YaHei" pitchFamily="34" charset="0"/>
                 <a:ea typeface="Microsoft YaHei" pitchFamily="34" charset="-122"/>
                 <a:cs typeface="Microsoft YaHei" pitchFamily="34" charset="-120"/>
               </a:rPr>
-              <a:t>它擅长表达局部角度与恒定航向，不擅长比较面积</a:t>
-            </a:r>
-            <a:endParaRPr lang="zh-CN" sz="3200" dirty="0"/>
+              <a:t>PROJ / Britannica / IndexMundi / Esri / Natural Earth / Esri</a:t>
+            </a:r>
+            <a:endParaRPr lang="en-US" sz="1100" dirty="0"/>
           </a:p>
         </p:txBody>
       </p:sp>
@@ -4269,8 +3674,8 @@
         </p:nvSpPr>
         <p:spPr>
           <a:xfrm>
-            <a:off x="594360" y="6345936"/>
-            <a:ext cx="10515600" cy="228600"/>
+            <a:off x="11018520" y="6254496"/>
+            <a:ext cx="502920" cy="365760"/>
           </a:xfrm>
           <a:prstGeom prst="rect">
             <a:avLst/>
@@ -4282,21 +3687,21 @@
           <a:bodyPr wrap="square" lIns="0" tIns="0" rIns="0" bIns="0" rtlCol="0" anchor="ctr"/>
           <a:lstStyle/>
           <a:p>
-            <a:pPr indent="0" marL="0">
+            <a:pPr algn="r" indent="0" marL="0">
               <a:buNone/>
             </a:pPr>
             <a:r>
-              <a:rPr lang="zh-CN" altLang="en-US" sz="1050" dirty="0">
-                <a:solidFill>
-                  <a:srgbClr val="52696B"/>
+              <a:rPr lang="en-US" sz="1300" dirty="0">
+                <a:solidFill>
+                  <a:srgbClr val="5C5C5C"/>
                 </a:solidFill>
                 <a:latin typeface="Microsoft YaHei" pitchFamily="34" charset="0"/>
                 <a:ea typeface="Microsoft YaHei" pitchFamily="34" charset="-122"/>
                 <a:cs typeface="Microsoft YaHei" pitchFamily="34" charset="-120"/>
               </a:rPr>
-              <a:t>PROJ 9.9 墨卡托公式；Esri ArcGIS Pro 3.6《墨卡托》</a:t>
-            </a:r>
-            <a:endParaRPr lang="zh-CN" sz="1050" dirty="0"/>
+              <a:t>05</a:t>
+            </a:r>
+            <a:endParaRPr lang="en-US" sz="1300" dirty="0"/>
           </a:p>
         </p:txBody>
       </p:sp>
@@ -4308,8 +3713,8 @@
         </p:nvSpPr>
         <p:spPr>
           <a:xfrm>
-            <a:off x="10972800" y="6336792"/>
-            <a:ext cx="640080" cy="256032"/>
+            <a:off x="685800" y="1463040"/>
+            <a:ext cx="10789920" cy="1152144"/>
           </a:xfrm>
           <a:prstGeom prst="rect">
             <a:avLst/>
@@ -4321,21 +3726,21 @@
           <a:bodyPr wrap="square" lIns="0" tIns="0" rIns="0" bIns="0" rtlCol="0" anchor="ctr"/>
           <a:lstStyle/>
           <a:p>
-            <a:pPr algn="r" indent="0" marL="0">
+            <a:pPr indent="0" marL="0">
               <a:buNone/>
             </a:pPr>
             <a:r>
-              <a:rPr lang="zh-CN" altLang="en-US" sz="1100" dirty="0">
-                <a:solidFill>
-                  <a:srgbClr val="52696B"/>
+              <a:rPr lang="en-US" sz="2200" dirty="0">
+                <a:solidFill>
+                  <a:srgbClr val="242424"/>
                 </a:solidFill>
                 <a:latin typeface="Microsoft YaHei" pitchFamily="34" charset="0"/>
                 <a:ea typeface="Microsoft YaHei" pitchFamily="34" charset="-122"/>
                 <a:cs typeface="Microsoft YaHei" pitchFamily="34" charset="-120"/>
               </a:rPr>
-              <a:t>5 / 7</a:t>
-            </a:r>
-            <a:endParaRPr lang="zh-CN" sz="1100" dirty="0"/>
+              <a:t>对边界的所有顶点施加同一个三维旋转：球面面积保持不变，固定墨卡托图上的轮廓却会改变。Natural Earth 1:1.1 亿边界是公共领域概化数据，不是精密测量。</a:t>
+            </a:r>
+            <a:endParaRPr lang="en-US" sz="2200" dirty="0"/>
           </a:p>
         </p:txBody>
       </p:sp>
@@ -4347,18 +3752,18 @@
         </p:nvSpPr>
         <p:spPr>
           <a:xfrm>
-            <a:off x="640080" y="2029968"/>
-            <a:ext cx="5303520" cy="3584448"/>
+            <a:off x="822960" y="2971800"/>
+            <a:ext cx="4206240" cy="777240"/>
           </a:xfrm>
           <a:prstGeom prst="rect">
             <a:avLst/>
           </a:prstGeom>
           <a:solidFill>
-            <a:srgbClr val="DCECE6"/>
+            <a:srgbClr val="FFFFFF"/>
           </a:solidFill>
           <a:ln w="12700">
             <a:solidFill>
-              <a:srgbClr val="DCECE6"/>
+              <a:srgbClr val="919191"/>
             </a:solidFill>
             <a:prstDash val="solid"/>
           </a:ln>
@@ -4372,8 +3777,8 @@
         </p:nvSpPr>
         <p:spPr>
           <a:xfrm>
-            <a:off x="941832" y="2340864"/>
-            <a:ext cx="4663440" cy="484632"/>
+            <a:off x="969264" y="3044952"/>
+            <a:ext cx="3913632" cy="630936"/>
           </a:xfrm>
           <a:prstGeom prst="rect">
             <a:avLst/>
@@ -4385,34 +3790,83 @@
           <a:bodyPr wrap="square" lIns="0" tIns="0" rIns="0" bIns="0" rtlCol="0" anchor="ctr"/>
           <a:lstStyle/>
           <a:p>
-            <a:pPr indent="0" marL="0">
+            <a:pPr algn="ctr" indent="0" marL="0">
               <a:buNone/>
             </a:pPr>
             <a:r>
-              <a:rPr lang="zh-CN" altLang="en-US" sz="2500" b="1" dirty="0">
-                <a:solidFill>
-                  <a:srgbClr val="183D43"/>
+              <a:rPr lang="en-US" sz="2100" dirty="0">
+                <a:solidFill>
+                  <a:srgbClr val="242424"/>
                 </a:solidFill>
                 <a:latin typeface="Microsoft YaHei" pitchFamily="34" charset="0"/>
                 <a:ea typeface="Microsoft YaHei" pitchFamily="34" charset="-122"/>
                 <a:cs typeface="Microsoft YaHei" pitchFamily="34" charset="-120"/>
               </a:rPr>
-              <a:t>保留下来的便利</a:t>
-            </a:r>
-            <a:endParaRPr lang="zh-CN" sz="2500" dirty="0"/>
-          </a:p>
-        </p:txBody>
-      </p:sp>
-      <p:sp>
-        <p:nvSpPr>
-          <p:cNvPr id="8" name="Text 6"/>
-          <p:cNvSpPr/>
-          <p:nvPr/>
-        </p:nvSpPr>
-        <p:spPr>
-          <a:xfrm>
-            <a:off x="941832" y="3108960"/>
-            <a:ext cx="4617720" cy="2112264"/>
+              <a:t>同一个球面区域</a:t>
+            </a:r>
+            <a:endParaRPr lang="en-US" sz="2100" dirty="0"/>
+          </a:p>
+        </p:txBody>
+      </p:sp>
+      <p:sp>
+        <p:nvSpPr>
+          <p:cNvPr id="8" name="Shape 6"/>
+          <p:cNvSpPr/>
+          <p:nvPr/>
+        </p:nvSpPr>
+        <p:spPr>
+          <a:xfrm>
+            <a:off x="5212080" y="3355848"/>
+            <a:ext cx="914400" cy="0"/>
+          </a:xfrm>
+          <a:prstGeom prst="line">
+            <a:avLst/>
+          </a:prstGeom>
+          <a:noFill/>
+          <a:ln w="31750">
+            <a:solidFill>
+              <a:srgbClr val="B11F4B"/>
+            </a:solidFill>
+            <a:prstDash val="solid"/>
+            <a:tailEnd type="triangle"/>
+          </a:ln>
+        </p:spPr>
+      </p:sp>
+      <p:sp>
+        <p:nvSpPr>
+          <p:cNvPr id="9" name="Shape 7"/>
+          <p:cNvSpPr/>
+          <p:nvPr/>
+        </p:nvSpPr>
+        <p:spPr>
+          <a:xfrm>
+            <a:off x="6309360" y="2971800"/>
+            <a:ext cx="4846320" cy="777240"/>
+          </a:xfrm>
+          <a:prstGeom prst="rect">
+            <a:avLst/>
+          </a:prstGeom>
+          <a:solidFill>
+            <a:srgbClr val="F4E3E8"/>
+          </a:solidFill>
+          <a:ln w="12700">
+            <a:solidFill>
+              <a:srgbClr val="919191"/>
+            </a:solidFill>
+            <a:prstDash val="solid"/>
+          </a:ln>
+        </p:spPr>
+      </p:sp>
+      <p:sp>
+        <p:nvSpPr>
+          <p:cNvPr id="10" name="Text 8"/>
+          <p:cNvSpPr/>
+          <p:nvPr/>
+        </p:nvSpPr>
+        <p:spPr>
+          <a:xfrm>
+            <a:off x="6455664" y="3044952"/>
+            <a:ext cx="4553712" cy="630936"/>
           </a:xfrm>
           <a:prstGeom prst="rect">
             <a:avLst/>
@@ -4424,471 +3878,27 @@
           <a:bodyPr wrap="square" lIns="0" tIns="0" rIns="0" bIns="0" rtlCol="0" anchor="ctr"/>
           <a:lstStyle/>
           <a:p>
-            <a:pPr indent="0" marL="0">
+            <a:pPr algn="ctr" indent="0" marL="0">
               <a:buNone/>
             </a:pPr>
             <a:r>
-              <a:rPr lang="zh-CN" altLang="en-US" sz="2200" dirty="0">
-                <a:solidFill>
-                  <a:srgbClr val="183D43"/>
+              <a:rPr lang="en-US" sz="2100" b="1" dirty="0">
+                <a:solidFill>
+                  <a:srgbClr val="242424"/>
                 </a:solidFill>
                 <a:latin typeface="Microsoft YaHei" pitchFamily="34" charset="0"/>
                 <a:ea typeface="Microsoft YaHei" pitchFamily="34" charset="-122"/>
                 <a:cs typeface="Microsoft YaHei" pitchFamily="34" charset="-120"/>
               </a:rPr>
-              <a:t>局部保角：</a:t>
-            </a:r>
-            <a:endParaRPr lang="zh-CN" sz="2200" dirty="0"/>
-          </a:p>
-          <a:p>
-            <a:pPr indent="0" marL="0">
-              <a:buNone/>
-            </a:pPr>
-            <a:r>
-              <a:rPr lang="zh-CN" altLang="en-US" sz="2200" dirty="0">
-                <a:solidFill>
-                  <a:srgbClr val="183D43"/>
-                </a:solidFill>
-                <a:latin typeface="Microsoft YaHei" pitchFamily="34" charset="0"/>
-                <a:ea typeface="Microsoft YaHei" pitchFamily="34" charset="-122"/>
-                <a:cs typeface="Microsoft YaHei" pitchFamily="34" charset="-120"/>
-              </a:rPr>
-              <a:t>保留非常小范围内的角度关系。</a:t>
-            </a:r>
-            <a:endParaRPr lang="zh-CN" sz="2200" dirty="0"/>
-          </a:p>
-          <a:p>
-            <a:pPr indent="0" marL="0">
-              <a:buNone/>
-            </a:pPr>
-            <a:endParaRPr lang="zh-CN" sz="2200" dirty="0"/>
-          </a:p>
-          <a:p>
-            <a:pPr indent="0" marL="0">
-              <a:buNone/>
-            </a:pPr>
-            <a:r>
-              <a:rPr lang="zh-CN" altLang="en-US" sz="2200" dirty="0">
-                <a:solidFill>
-                  <a:srgbClr val="183D43"/>
-                </a:solidFill>
-                <a:latin typeface="Microsoft YaHei" pitchFamily="34" charset="0"/>
-                <a:ea typeface="Microsoft YaHei" pitchFamily="34" charset="-122"/>
-                <a:cs typeface="Microsoft YaHei" pitchFamily="34" charset="-120"/>
-              </a:rPr>
-              <a:t>恒向线为直线：</a:t>
-            </a:r>
-            <a:endParaRPr lang="zh-CN" sz="2200" dirty="0"/>
-          </a:p>
-          <a:p>
-            <a:pPr indent="0" marL="0">
-              <a:buNone/>
-            </a:pPr>
-            <a:r>
-              <a:rPr lang="zh-CN" altLang="en-US" sz="2200" dirty="0">
-                <a:solidFill>
-                  <a:srgbClr val="183D43"/>
-                </a:solidFill>
-                <a:latin typeface="Microsoft YaHei" pitchFamily="34" charset="0"/>
-                <a:ea typeface="Microsoft YaHei" pitchFamily="34" charset="-122"/>
-                <a:cs typeface="Microsoft YaHei" pitchFamily="34" charset="-120"/>
-              </a:rPr>
-              <a:t>恒定罗盘航向的路线更易表达。</a:t>
-            </a:r>
-            <a:endParaRPr lang="zh-CN" sz="2200" dirty="0"/>
-          </a:p>
-        </p:txBody>
-      </p:sp>
-      <p:sp>
-        <p:nvSpPr>
-          <p:cNvPr id="9" name="Shape 7"/>
-          <p:cNvSpPr/>
-          <p:nvPr/>
-        </p:nvSpPr>
-        <p:spPr>
-          <a:xfrm>
-            <a:off x="6263640" y="2029968"/>
-            <a:ext cx="5276088" cy="3584448"/>
-          </a:xfrm>
-          <a:prstGeom prst="rect">
-            <a:avLst/>
-          </a:prstGeom>
-          <a:solidFill>
-            <a:srgbClr val="F0E0D0"/>
-          </a:solidFill>
-          <a:ln w="12700">
-            <a:solidFill>
-              <a:srgbClr val="F0E0D0"/>
-            </a:solidFill>
-            <a:prstDash val="solid"/>
-          </a:ln>
-        </p:spPr>
-      </p:sp>
-      <p:sp>
-        <p:nvSpPr>
-          <p:cNvPr id="10" name="Text 8"/>
-          <p:cNvSpPr/>
-          <p:nvPr/>
-        </p:nvSpPr>
-        <p:spPr>
-          <a:xfrm>
-            <a:off x="6565392" y="2340864"/>
-            <a:ext cx="4645152" cy="484632"/>
-          </a:xfrm>
-          <a:prstGeom prst="rect">
-            <a:avLst/>
-          </a:prstGeom>
-          <a:noFill/>
-          <a:ln/>
-        </p:spPr>
-        <p:txBody>
-          <a:bodyPr wrap="square" lIns="0" tIns="0" rIns="0" bIns="0" rtlCol="0" anchor="ctr"/>
-          <a:lstStyle/>
-          <a:p>
-            <a:pPr indent="0" marL="0">
-              <a:buNone/>
-            </a:pPr>
-            <a:r>
-              <a:rPr lang="zh-CN" altLang="en-US" sz="2500" b="1" dirty="0">
-                <a:solidFill>
-                  <a:srgbClr val="A04C2B"/>
-                </a:solidFill>
-                <a:latin typeface="Microsoft YaHei" pitchFamily="34" charset="0"/>
-                <a:ea typeface="Microsoft YaHei" pitchFamily="34" charset="-122"/>
-                <a:cs typeface="Microsoft YaHei" pitchFamily="34" charset="-120"/>
-              </a:rPr>
-              <a:t>不能由此推断</a:t>
-            </a:r>
-            <a:endParaRPr lang="zh-CN" sz="2500" dirty="0"/>
-          </a:p>
-        </p:txBody>
-      </p:sp>
-      <p:sp>
-        <p:nvSpPr>
-          <p:cNvPr id="11" name="Text 9"/>
-          <p:cNvSpPr/>
-          <p:nvPr/>
-        </p:nvSpPr>
-        <p:spPr>
-          <a:xfrm>
-            <a:off x="6565392" y="3108960"/>
-            <a:ext cx="4617720" cy="2112264"/>
-          </a:xfrm>
-          <a:prstGeom prst="rect">
-            <a:avLst/>
-          </a:prstGeom>
-          <a:noFill/>
-          <a:ln/>
-        </p:spPr>
-        <p:txBody>
-          <a:bodyPr wrap="square" lIns="0" tIns="0" rIns="0" bIns="0" rtlCol="0" anchor="ctr"/>
-          <a:lstStyle/>
-          <a:p>
-            <a:pPr indent="0" marL="0">
-              <a:buNone/>
-            </a:pPr>
-            <a:r>
-              <a:rPr lang="zh-CN" altLang="en-US" sz="2100" dirty="0">
-                <a:solidFill>
-                  <a:srgbClr val="183D43"/>
-                </a:solidFill>
-                <a:latin typeface="Microsoft YaHei" pitchFamily="34" charset="0"/>
-                <a:ea typeface="Microsoft YaHei" pitchFamily="34" charset="-122"/>
-                <a:cs typeface="Microsoft YaHei" pitchFamily="34" charset="-120"/>
-              </a:rPr>
-              <a:t>局部保角 ≠ 大陆整体形状不变</a:t>
-            </a:r>
-            <a:endParaRPr lang="zh-CN" sz="2100" dirty="0"/>
-          </a:p>
-          <a:p>
-            <a:pPr indent="0" marL="0">
-              <a:buNone/>
-            </a:pPr>
-            <a:r>
-              <a:rPr lang="zh-CN" altLang="en-US" sz="2100" dirty="0">
-                <a:solidFill>
-                  <a:srgbClr val="183D43"/>
-                </a:solidFill>
-                <a:latin typeface="Microsoft YaHei" pitchFamily="34" charset="0"/>
-                <a:ea typeface="Microsoft YaHei" pitchFamily="34" charset="-122"/>
-                <a:cs typeface="Microsoft YaHei" pitchFamily="34" charset="-120"/>
-              </a:rPr>
-              <a:t>恒向线直线 ≠ 通常的最短路线</a:t>
-            </a:r>
-            <a:endParaRPr lang="zh-CN" sz="2100" dirty="0"/>
-          </a:p>
-          <a:p>
-            <a:pPr indent="0" marL="0">
-              <a:buNone/>
-            </a:pPr>
-            <a:endParaRPr lang="zh-CN" sz="2100" dirty="0"/>
-          </a:p>
-          <a:p>
-            <a:pPr indent="0" marL="0">
-              <a:buNone/>
-            </a:pPr>
-            <a:r>
-              <a:rPr lang="zh-CN" altLang="en-US" sz="2100" dirty="0">
-                <a:solidFill>
-                  <a:srgbClr val="183D43"/>
-                </a:solidFill>
-                <a:latin typeface="Microsoft YaHei" pitchFamily="34" charset="0"/>
-                <a:ea typeface="Microsoft YaHei" pitchFamily="34" charset="-122"/>
-                <a:cs typeface="Microsoft YaHei" pitchFamily="34" charset="-120"/>
-              </a:rPr>
-              <a:t>两极投影到无穷远，</a:t>
-            </a:r>
-            <a:endParaRPr lang="zh-CN" sz="2100" dirty="0"/>
-          </a:p>
-          <a:p>
-            <a:pPr indent="0" marL="0">
-              <a:buNone/>
-            </a:pPr>
-            <a:r>
-              <a:rPr lang="zh-CN" altLang="en-US" sz="2100" dirty="0">
-                <a:solidFill>
-                  <a:srgbClr val="183D43"/>
-                </a:solidFill>
-                <a:latin typeface="Microsoft YaHei" pitchFamily="34" charset="0"/>
-                <a:ea typeface="Microsoft YaHei" pitchFamily="34" charset="-122"/>
-                <a:cs typeface="Microsoft YaHei" pitchFamily="34" charset="-120"/>
-              </a:rPr>
-              <a:t>有限地图必须裁切纬度范围。</a:t>
-            </a:r>
-            <a:endParaRPr lang="zh-CN" sz="2100" dirty="0"/>
-          </a:p>
-        </p:txBody>
-      </p:sp>
-      <p:sp>
-        <p:nvSpPr>
-          <p:cNvPr id="12" name="Text 10"/>
-          <p:cNvSpPr/>
-          <p:nvPr/>
-        </p:nvSpPr>
-        <p:spPr>
-          <a:xfrm>
-            <a:off x="640080" y="5843016"/>
-            <a:ext cx="10881360" cy="374904"/>
-          </a:xfrm>
-          <a:prstGeom prst="rect">
-            <a:avLst/>
-          </a:prstGeom>
-          <a:noFill/>
-          <a:ln/>
-        </p:spPr>
-        <p:txBody>
-          <a:bodyPr wrap="square" lIns="0" tIns="0" rIns="0" bIns="0" rtlCol="0" anchor="ctr"/>
-          <a:lstStyle/>
-          <a:p>
-            <a:pPr indent="0" marL="0">
-              <a:buNone/>
-            </a:pPr>
-            <a:r>
-              <a:rPr lang="zh-CN" altLang="en-US" sz="1700" dirty="0">
-                <a:solidFill>
-                  <a:srgbClr val="52696B"/>
-                </a:solidFill>
-                <a:latin typeface="Microsoft YaHei" pitchFamily="34" charset="0"/>
-                <a:ea typeface="Microsoft YaHei" pitchFamily="34" charset="-122"/>
-                <a:cs typeface="Microsoft YaHei" pitchFamily="34" charset="-120"/>
-              </a:rPr>
-              <a:t>本篇机制例子采用球面墨卡托；Web Mercator 的严格性质另有条件。</a:t>
-            </a:r>
-            <a:endParaRPr lang="zh-CN" sz="1700" dirty="0"/>
-          </a:p>
-        </p:txBody>
-      </p:sp>
-    </p:spTree>
-  </p:cSld>
-  <p:clrMapOvr>
-    <a:masterClrMapping/>
-  </p:clrMapOvr>
-</p:sld>
-</file>
-
-<file path=ppt/slides/slide6.xml><?xml version="1.0" encoding="utf-8"?>
-<p:sld xmlns:a="http://schemas.openxmlformats.org/drawingml/2006/main" xmlns:r="http://schemas.openxmlformats.org/officeDocument/2006/relationships" xmlns:p="http://schemas.openxmlformats.org/presentationml/2006/main">
-  <p:cSld name="Slide 6">
-    <p:bg>
-      <p:bgPr>
-        <a:solidFill>
-          <a:srgbClr val="F6F4EE"/>
-        </a:solidFill>
-      </p:bgPr>
-    </p:bg>
-    <p:spTree>
-      <p:nvGrpSpPr>
-        <p:cNvPr id="1" name=""/>
-        <p:cNvGrpSpPr/>
-        <p:nvPr/>
-      </p:nvGrpSpPr>
-      <p:grpSpPr>
-        <a:xfrm>
-          <a:off x="0" y="0"/>
-          <a:ext cx="0" cy="0"/>
-          <a:chOff x="0" y="0"/>
-          <a:chExt cx="0" cy="0"/>
-        </a:xfrm>
-      </p:grpSpPr>
-      <p:sp>
-        <p:nvSpPr>
-          <p:cNvPr id="2" name="Text 0"/>
-          <p:cNvSpPr/>
-          <p:nvPr/>
-        </p:nvSpPr>
-        <p:spPr>
-          <a:xfrm>
-            <a:off x="594360" y="329184"/>
-            <a:ext cx="10881360" cy="310896"/>
-          </a:xfrm>
-          <a:prstGeom prst="rect">
-            <a:avLst/>
-          </a:prstGeom>
-          <a:noFill/>
-          <a:ln/>
-        </p:spPr>
-        <p:txBody>
-          <a:bodyPr wrap="square" lIns="0" tIns="0" rIns="0" bIns="0" rtlCol="0" anchor="ctr"/>
-          <a:lstStyle/>
-          <a:p>
-            <a:pPr indent="0" marL="0">
-              <a:buNone/>
-            </a:pPr>
-            <a:r>
-              <a:rPr lang="zh-CN" altLang="en-US" sz="1300" spc="110" kern="0" dirty="0">
-                <a:solidFill>
-                  <a:srgbClr val="52696B"/>
-                </a:solidFill>
-                <a:latin typeface="Microsoft YaHei" pitchFamily="34" charset="0"/>
-                <a:ea typeface="Microsoft YaHei" pitchFamily="34" charset="-122"/>
-                <a:cs typeface="Microsoft YaHei" pitchFamily="34" charset="-120"/>
-              </a:rPr>
-              <a:t>选图标准 · 原生可编辑比较表</a:t>
-            </a:r>
-            <a:endParaRPr lang="zh-CN" sz="1300" dirty="0"/>
-          </a:p>
-        </p:txBody>
-      </p:sp>
-      <p:sp>
-        <p:nvSpPr>
-          <p:cNvPr id="3" name="Text 1"/>
-          <p:cNvSpPr/>
-          <p:nvPr/>
-        </p:nvSpPr>
-        <p:spPr>
-          <a:xfrm>
-            <a:off x="594360" y="859536"/>
-            <a:ext cx="10972800" cy="868680"/>
-          </a:xfrm>
-          <a:prstGeom prst="rect">
-            <a:avLst/>
-          </a:prstGeom>
-          <a:noFill/>
-          <a:ln/>
-        </p:spPr>
-        <p:txBody>
-          <a:bodyPr wrap="square" lIns="0" tIns="0" rIns="0" bIns="0" rtlCol="0" anchor="t"/>
-          <a:lstStyle/>
-          <a:p>
-            <a:pPr indent="0" marL="0">
-              <a:buNone/>
-            </a:pPr>
-            <a:r>
-              <a:rPr lang="zh-CN" altLang="en-US" sz="3200" b="1" dirty="0">
-                <a:solidFill>
-                  <a:srgbClr val="183D43"/>
-                </a:solidFill>
-                <a:latin typeface="Microsoft YaHei" pitchFamily="34" charset="0"/>
-                <a:ea typeface="Microsoft YaHei" pitchFamily="34" charset="-122"/>
-                <a:cs typeface="Microsoft YaHei" pitchFamily="34" charset="-120"/>
-              </a:rPr>
-              <a:t>没有全能的平面地图：先问你要比较什么</a:t>
-            </a:r>
-            <a:endParaRPr lang="zh-CN" sz="3200" dirty="0"/>
-          </a:p>
-        </p:txBody>
-      </p:sp>
-      <p:sp>
-        <p:nvSpPr>
-          <p:cNvPr id="4" name="Text 2"/>
-          <p:cNvSpPr/>
-          <p:nvPr/>
-        </p:nvSpPr>
-        <p:spPr>
-          <a:xfrm>
-            <a:off x="594360" y="6345936"/>
-            <a:ext cx="10515600" cy="228600"/>
-          </a:xfrm>
-          <a:prstGeom prst="rect">
-            <a:avLst/>
-          </a:prstGeom>
-          <a:noFill/>
-          <a:ln/>
-        </p:spPr>
-        <p:txBody>
-          <a:bodyPr wrap="square" lIns="0" tIns="0" rIns="0" bIns="0" rtlCol="0" anchor="ctr"/>
-          <a:lstStyle/>
-          <a:p>
-            <a:pPr indent="0" marL="0">
-              <a:buNone/>
-            </a:pPr>
-            <a:r>
-              <a:rPr lang="zh-CN" altLang="en-US" sz="1050" dirty="0">
-                <a:solidFill>
-                  <a:srgbClr val="52696B"/>
-                </a:solidFill>
-                <a:latin typeface="Microsoft YaHei" pitchFamily="34" charset="0"/>
-                <a:ea typeface="Microsoft YaHei" pitchFamily="34" charset="-122"/>
-                <a:cs typeface="Microsoft YaHei" pitchFamily="34" charset="-120"/>
-              </a:rPr>
-              <a:t>Britannica《地图投影》；Esri《Equal Earth》及《墨卡托》</a:t>
-            </a:r>
-            <a:endParaRPr lang="zh-CN" sz="1050" dirty="0"/>
-          </a:p>
-        </p:txBody>
-      </p:sp>
-      <p:sp>
-        <p:nvSpPr>
-          <p:cNvPr id="5" name="Text 3"/>
-          <p:cNvSpPr/>
-          <p:nvPr/>
-        </p:nvSpPr>
-        <p:spPr>
-          <a:xfrm>
-            <a:off x="10972800" y="6336792"/>
-            <a:ext cx="640080" cy="256032"/>
-          </a:xfrm>
-          <a:prstGeom prst="rect">
-            <a:avLst/>
-          </a:prstGeom>
-          <a:noFill/>
-          <a:ln/>
-        </p:spPr>
-        <p:txBody>
-          <a:bodyPr wrap="square" lIns="0" tIns="0" rIns="0" bIns="0" rtlCol="0" anchor="ctr"/>
-          <a:lstStyle/>
-          <a:p>
-            <a:pPr algn="r" indent="0" marL="0">
-              <a:buNone/>
-            </a:pPr>
-            <a:r>
-              <a:rPr lang="zh-CN" altLang="en-US" sz="1100" dirty="0">
-                <a:solidFill>
-                  <a:srgbClr val="52696B"/>
-                </a:solidFill>
-                <a:latin typeface="Microsoft YaHei" pitchFamily="34" charset="0"/>
-                <a:ea typeface="Microsoft YaHei" pitchFamily="34" charset="-122"/>
-                <a:cs typeface="Microsoft YaHei" pitchFamily="34" charset="-120"/>
-              </a:rPr>
-              <a:t>6 / 7</a:t>
-            </a:r>
-            <a:endParaRPr lang="zh-CN" sz="1100" dirty="0"/>
+              <a:t>统一三维旋转</a:t>
+            </a:r>
+            <a:endParaRPr lang="en-US" sz="2100" dirty="0"/>
           </a:p>
         </p:txBody>
       </p:sp>
       <p:graphicFrame>
         <p:nvGraphicFramePr>
-          <p:cNvPr id="6" name="Table 0"/>
+          <p:cNvPr id="11" name="Table 0"/>
           <p:cNvGraphicFramePr>
             <a:graphicFrameLocks noGrp="1"/>
           </p:cNvGraphicFramePr>
@@ -4901,225 +3911,18 @@
           </p:nvPr>
         </p:nvGraphicFramePr>
         <p:xfrm>
-          <a:off x="640080" y="1828800"/>
-          <a:ext cx="10899648" cy="3529584"/>
+          <a:off x="822960" y="4069080"/>
+          <a:ext cx="10332720" cy="914400"/>
         </p:xfrm>
         <a:graphic>
           <a:graphicData uri="http://schemas.openxmlformats.org/drawingml/2006/table">
             <a:tbl>
               <a:tblPr/>
               <a:tblGrid>
-                <a:gridCol w="1847088"/>
-                <a:gridCol w="4251960"/>
-                <a:gridCol w="4800600"/>
+                <a:gridCol w="5166360"/>
+                <a:gridCol w="5166360"/>
               </a:tblGrid>
-              <a:tr h="704088">
-                <a:tc>
-                  <a:txBody>
-                    <a:bodyPr/>
-                    <a:lstStyle/>
-                    <a:p>
-                      <a:pPr indent="0" marL="0">
-                        <a:buNone/>
-                      </a:pPr>
-                      <a:r>
-                        <a:rPr lang="en-US" sz="1900" b="1" dirty="0">
-                          <a:solidFill>
-                            <a:srgbClr val="FFFFFF"/>
-                          </a:solidFill>
-                          <a:latin typeface="Microsoft YaHei" pitchFamily="34" charset="0"/>
-                          <a:ea typeface="Microsoft YaHei" pitchFamily="34" charset="-122"/>
-                          <a:cs typeface="Microsoft YaHei" pitchFamily="34" charset="-120"/>
-                        </a:rPr>
-                        <a:t>比较维度</a:t>
-                      </a:r>
-                      <a:endParaRPr lang="en-US" sz="1900" dirty="0">
-                        <a:latin typeface="Microsoft YaHei" charset="0"/>
-                        <a:ea typeface="Microsoft YaHei" charset="0"/>
-                        <a:cs typeface="Microsoft YaHei" charset="0"/>
-                      </a:endParaRPr>
-                    </a:p>
-                  </a:txBody>
-                  <a:tcPr marL="155448" marR="155448" marT="109728" marB="109728" anchor="ctr">
-                    <a:lnL w="12700" cap="flat" cmpd="sng" algn="ctr">
-                      <a:solidFill>
-                        <a:srgbClr val="92A7A2"/>
-                      </a:solidFill>
-                      <a:prstDash val="solid"/>
-                      <a:round/>
-                      <a:headEnd type="none" w="med" len="med"/>
-                      <a:tailEnd type="none" w="med" len="med"/>
-                    </a:lnL>
-                    <a:lnR w="12700" cap="flat" cmpd="sng" algn="ctr">
-                      <a:solidFill>
-                        <a:srgbClr val="92A7A2"/>
-                      </a:solidFill>
-                      <a:prstDash val="solid"/>
-                      <a:round/>
-                      <a:headEnd type="none" w="med" len="med"/>
-                      <a:tailEnd type="none" w="med" len="med"/>
-                    </a:lnR>
-                    <a:lnT w="12700" cap="flat" cmpd="sng" algn="ctr">
-                      <a:solidFill>
-                        <a:srgbClr val="92A7A2"/>
-                      </a:solidFill>
-                      <a:prstDash val="solid"/>
-                      <a:round/>
-                      <a:headEnd type="none" w="med" len="med"/>
-                      <a:tailEnd type="none" w="med" len="med"/>
-                    </a:lnT>
-                    <a:lnB w="12700" cap="flat" cmpd="sng" algn="ctr">
-                      <a:solidFill>
-                        <a:srgbClr val="92A7A2"/>
-                      </a:solidFill>
-                      <a:prstDash val="solid"/>
-                      <a:round/>
-                      <a:headEnd type="none" w="med" len="med"/>
-                      <a:tailEnd type="none" w="med" len="med"/>
-                    </a:lnB>
-                    <a:solidFill>
-                      <a:srgbClr val="183D43"/>
-                    </a:solidFill>
-                  </a:tcPr>
-                </a:tc>
-                <a:tc>
-                  <a:txBody>
-                    <a:bodyPr/>
-                    <a:lstStyle/>
-                    <a:p>
-                      <a:pPr indent="0" marL="0">
-                        <a:buNone/>
-                      </a:pPr>
-                      <a:r>
-                        <a:rPr lang="en-US" sz="1900" b="1" dirty="0">
-                          <a:solidFill>
-                            <a:srgbClr val="FFFFFF"/>
-                          </a:solidFill>
-                          <a:latin typeface="Microsoft YaHei" pitchFamily="34" charset="0"/>
-                          <a:ea typeface="Microsoft YaHei" pitchFamily="34" charset="-122"/>
-                          <a:cs typeface="Microsoft YaHei" pitchFamily="34" charset="-120"/>
-                        </a:rPr>
-                        <a:t>普通墨卡托</a:t>
-                      </a:r>
-                      <a:endParaRPr lang="en-US" sz="1900" dirty="0">
-                        <a:latin typeface="Microsoft YaHei" charset="0"/>
-                        <a:ea typeface="Microsoft YaHei" charset="0"/>
-                        <a:cs typeface="Microsoft YaHei" charset="0"/>
-                      </a:endParaRPr>
-                    </a:p>
-                  </a:txBody>
-                  <a:tcPr marL="155448" marR="155448" marT="109728" marB="109728" anchor="ctr">
-                    <a:lnL w="12700" cap="flat" cmpd="sng" algn="ctr">
-                      <a:solidFill>
-                        <a:srgbClr val="92A7A2"/>
-                      </a:solidFill>
-                      <a:prstDash val="solid"/>
-                      <a:round/>
-                      <a:headEnd type="none" w="med" len="med"/>
-                      <a:tailEnd type="none" w="med" len="med"/>
-                    </a:lnL>
-                    <a:lnR w="12700" cap="flat" cmpd="sng" algn="ctr">
-                      <a:solidFill>
-                        <a:srgbClr val="92A7A2"/>
-                      </a:solidFill>
-                      <a:prstDash val="solid"/>
-                      <a:round/>
-                      <a:headEnd type="none" w="med" len="med"/>
-                      <a:tailEnd type="none" w="med" len="med"/>
-                    </a:lnR>
-                    <a:lnT w="12700" cap="flat" cmpd="sng" algn="ctr">
-                      <a:solidFill>
-                        <a:srgbClr val="92A7A2"/>
-                      </a:solidFill>
-                      <a:prstDash val="solid"/>
-                      <a:round/>
-                      <a:headEnd type="none" w="med" len="med"/>
-                      <a:tailEnd type="none" w="med" len="med"/>
-                    </a:lnT>
-                    <a:lnB w="12700" cap="flat" cmpd="sng" algn="ctr">
-                      <a:solidFill>
-                        <a:srgbClr val="92A7A2"/>
-                      </a:solidFill>
-                      <a:prstDash val="solid"/>
-                      <a:round/>
-                      <a:headEnd type="none" w="med" len="med"/>
-                      <a:tailEnd type="none" w="med" len="med"/>
-                    </a:lnB>
-                    <a:solidFill>
-                      <a:srgbClr val="183D43"/>
-                    </a:solidFill>
-                  </a:tcPr>
-                </a:tc>
-                <a:tc>
-                  <a:txBody>
-                    <a:bodyPr/>
-                    <a:lstStyle/>
-                    <a:p>
-                      <a:pPr indent="0" marL="0">
-                        <a:buNone/>
-                      </a:pPr>
-                      <a:r>
-                        <a:rPr lang="en-US" sz="1900" b="1" dirty="0">
-                          <a:solidFill>
-                            <a:srgbClr val="FFFFFF"/>
-                          </a:solidFill>
-                          <a:latin typeface="Microsoft YaHei" pitchFamily="34" charset="0"/>
-                          <a:ea typeface="Microsoft YaHei" pitchFamily="34" charset="-122"/>
-                          <a:cs typeface="Microsoft YaHei" pitchFamily="34" charset="-120"/>
-                        </a:rPr>
-                        <a:t>Equal Earth（等面积）</a:t>
-                      </a:r>
-                      <a:endParaRPr lang="en-US" sz="1900" dirty="0">
-                        <a:latin typeface="Microsoft YaHei" charset="0"/>
-                        <a:ea typeface="Microsoft YaHei" charset="0"/>
-                        <a:cs typeface="Microsoft YaHei" charset="0"/>
-                      </a:endParaRPr>
-                    </a:p>
-                  </a:txBody>
-                  <a:tcPr marL="155448" marR="155448" marT="109728" marB="109728" anchor="ctr">
-                    <a:lnL w="12700" cap="flat" cmpd="sng" algn="ctr">
-                      <a:solidFill>
-                        <a:srgbClr val="92A7A2"/>
-                      </a:solidFill>
-                      <a:prstDash val="solid"/>
-                      <a:round/>
-                      <a:headEnd type="none" w="med" len="med"/>
-                      <a:tailEnd type="none" w="med" len="med"/>
-                    </a:lnL>
-                    <a:lnR w="12700" cap="flat" cmpd="sng" algn="ctr">
-                      <a:solidFill>
-                        <a:srgbClr val="92A7A2"/>
-                      </a:solidFill>
-                      <a:prstDash val="solid"/>
-                      <a:round/>
-                      <a:headEnd type="none" w="med" len="med"/>
-                      <a:tailEnd type="none" w="med" len="med"/>
-                    </a:lnR>
-                    <a:lnT w="12700" cap="flat" cmpd="sng" algn="ctr">
-                      <a:solidFill>
-                        <a:srgbClr val="92A7A2"/>
-                      </a:solidFill>
-                      <a:prstDash val="solid"/>
-                      <a:round/>
-                      <a:headEnd type="none" w="med" len="med"/>
-                      <a:tailEnd type="none" w="med" len="med"/>
-                    </a:lnT>
-                    <a:lnB w="12700" cap="flat" cmpd="sng" algn="ctr">
-                      <a:solidFill>
-                        <a:srgbClr val="92A7A2"/>
-                      </a:solidFill>
-                      <a:prstDash val="solid"/>
-                      <a:round/>
-                      <a:headEnd type="none" w="med" len="med"/>
-                      <a:tailEnd type="none" w="med" len="med"/>
-                    </a:lnB>
-                    <a:solidFill>
-                      <a:srgbClr val="183D43"/>
-                    </a:solidFill>
-                  </a:tcPr>
-                </a:tc>
-              </a:tr>
-              <a:tr h="704088">
+              <a:tr h="502920">
                 <a:tc>
                   <a:txBody>
                     <a:bodyPr/>
@@ -5131,13 +3934,13 @@
                       <a:r>
                         <a:rPr lang="en-US" sz="1900" dirty="0">
                           <a:solidFill>
-                            <a:srgbClr val="183D43"/>
+                            <a:srgbClr val="242424"/>
                           </a:solidFill>
                           <a:latin typeface="Microsoft YaHei" pitchFamily="34" charset="0"/>
                           <a:ea typeface="Microsoft YaHei" pitchFamily="34" charset="-122"/>
                           <a:cs typeface="Microsoft YaHei" pitchFamily="34" charset="-120"/>
                         </a:rPr>
-                        <a:t>面积比例</a:t>
+                        <a:t>保持不变</a:t>
                       </a:r>
                       <a:endParaRPr lang="en-US" sz="1900" dirty="0">
                         <a:latin typeface="Microsoft YaHei" charset="0"/>
@@ -5146,10 +3949,10 @@
                       </a:endParaRPr>
                     </a:p>
                   </a:txBody>
-                  <a:tcPr marL="155448" marR="155448" marT="109728" marB="109728" anchor="ctr">
+                  <a:tcPr marL="146304" marR="146304" marT="109728" marB="109728" anchor="ctr">
                     <a:lnL w="12700" cap="flat" cmpd="sng" algn="ctr">
                       <a:solidFill>
-                        <a:srgbClr val="92A7A2"/>
+                        <a:srgbClr val="919191"/>
                       </a:solidFill>
                       <a:prstDash val="solid"/>
                       <a:round/>
@@ -5158,7 +3961,7 @@
                     </a:lnL>
                     <a:lnR w="12700" cap="flat" cmpd="sng" algn="ctr">
                       <a:solidFill>
-                        <a:srgbClr val="92A7A2"/>
+                        <a:srgbClr val="919191"/>
                       </a:solidFill>
                       <a:prstDash val="solid"/>
                       <a:round/>
@@ -5167,7 +3970,7 @@
                     </a:lnR>
                     <a:lnT w="12700" cap="flat" cmpd="sng" algn="ctr">
                       <a:solidFill>
-                        <a:srgbClr val="92A7A2"/>
+                        <a:srgbClr val="919191"/>
                       </a:solidFill>
                       <a:prstDash val="solid"/>
                       <a:round/>
@@ -5176,7 +3979,7 @@
                     </a:lnT>
                     <a:lnB w="12700" cap="flat" cmpd="sng" algn="ctr">
                       <a:solidFill>
-                        <a:srgbClr val="92A7A2"/>
+                        <a:srgbClr val="919191"/>
                       </a:solidFill>
                       <a:prstDash val="solid"/>
                       <a:round/>
@@ -5199,13 +4002,13 @@
                       <a:r>
                         <a:rPr lang="en-US" sz="1900" dirty="0">
                           <a:solidFill>
-                            <a:srgbClr val="183D43"/>
+                            <a:srgbClr val="242424"/>
                           </a:solidFill>
                           <a:latin typeface="Microsoft YaHei" pitchFamily="34" charset="0"/>
                           <a:ea typeface="Microsoft YaHei" pitchFamily="34" charset="-122"/>
                           <a:cs typeface="Microsoft YaHei" pitchFamily="34" charset="-120"/>
                         </a:rPr>
-                        <a:t>不保留；高纬放大严重</a:t>
+                        <a:t>重新投影后改变</a:t>
                       </a:r>
                       <a:endParaRPr lang="en-US" sz="1900" dirty="0">
                         <a:latin typeface="Microsoft YaHei" charset="0"/>
@@ -5214,10 +4017,10 @@
                       </a:endParaRPr>
                     </a:p>
                   </a:txBody>
-                  <a:tcPr marL="155448" marR="155448" marT="109728" marB="109728" anchor="ctr">
+                  <a:tcPr marL="146304" marR="146304" marT="109728" marB="109728" anchor="ctr">
                     <a:lnL w="12700" cap="flat" cmpd="sng" algn="ctr">
                       <a:solidFill>
-                        <a:srgbClr val="92A7A2"/>
+                        <a:srgbClr val="919191"/>
                       </a:solidFill>
                       <a:prstDash val="solid"/>
                       <a:round/>
@@ -5226,7 +4029,7 @@
                     </a:lnL>
                     <a:lnR w="12700" cap="flat" cmpd="sng" algn="ctr">
                       <a:solidFill>
-                        <a:srgbClr val="92A7A2"/>
+                        <a:srgbClr val="919191"/>
                       </a:solidFill>
                       <a:prstDash val="solid"/>
                       <a:round/>
@@ -5235,7 +4038,7 @@
                     </a:lnR>
                     <a:lnT w="12700" cap="flat" cmpd="sng" algn="ctr">
                       <a:solidFill>
-                        <a:srgbClr val="92A7A2"/>
+                        <a:srgbClr val="919191"/>
                       </a:solidFill>
                       <a:prstDash val="solid"/>
                       <a:round/>
@@ -5244,7 +4047,77 @@
                     </a:lnT>
                     <a:lnB w="12700" cap="flat" cmpd="sng" algn="ctr">
                       <a:solidFill>
-                        <a:srgbClr val="92A7A2"/>
+                        <a:srgbClr val="919191"/>
+                      </a:solidFill>
+                      <a:prstDash val="solid"/>
+                      <a:round/>
+                      <a:headEnd type="none" w="med" len="med"/>
+                      <a:tailEnd type="none" w="med" len="med"/>
+                    </a:lnB>
+                    <a:solidFill>
+                      <a:srgbClr val="FFFFFF"/>
+                    </a:solidFill>
+                  </a:tcPr>
+                </a:tc>
+              </a:tr>
+              <a:tr h="502920">
+                <a:tc>
+                  <a:txBody>
+                    <a:bodyPr/>
+                    <a:lstStyle/>
+                    <a:p>
+                      <a:pPr indent="0" marL="0">
+                        <a:buNone/>
+                      </a:pPr>
+                      <a:r>
+                        <a:rPr lang="en-US" sz="1900" dirty="0">
+                          <a:solidFill>
+                            <a:srgbClr val="242424"/>
+                          </a:solidFill>
+                          <a:latin typeface="Microsoft YaHei" pitchFamily="34" charset="0"/>
+                          <a:ea typeface="Microsoft YaHei" pitchFamily="34" charset="-122"/>
+                          <a:cs typeface="Microsoft YaHei" pitchFamily="34" charset="-120"/>
+                        </a:rPr>
+                        <a:t>球面土地面积</a:t>
+                      </a:r>
+                      <a:endParaRPr lang="en-US" sz="1900" dirty="0">
+                        <a:latin typeface="Microsoft YaHei" charset="0"/>
+                        <a:ea typeface="Microsoft YaHei" charset="0"/>
+                        <a:cs typeface="Microsoft YaHei" charset="0"/>
+                      </a:endParaRPr>
+                    </a:p>
+                  </a:txBody>
+                  <a:tcPr marL="146304" marR="146304" marT="109728" marB="109728" anchor="ctr">
+                    <a:lnL w="12700" cap="flat" cmpd="sng" algn="ctr">
+                      <a:solidFill>
+                        <a:srgbClr val="919191"/>
+                      </a:solidFill>
+                      <a:prstDash val="solid"/>
+                      <a:round/>
+                      <a:headEnd type="none" w="med" len="med"/>
+                      <a:tailEnd type="none" w="med" len="med"/>
+                    </a:lnL>
+                    <a:lnR w="12700" cap="flat" cmpd="sng" algn="ctr">
+                      <a:solidFill>
+                        <a:srgbClr val="919191"/>
+                      </a:solidFill>
+                      <a:prstDash val="solid"/>
+                      <a:round/>
+                      <a:headEnd type="none" w="med" len="med"/>
+                      <a:tailEnd type="none" w="med" len="med"/>
+                    </a:lnR>
+                    <a:lnT w="12700" cap="flat" cmpd="sng" algn="ctr">
+                      <a:solidFill>
+                        <a:srgbClr val="919191"/>
+                      </a:solidFill>
+                      <a:prstDash val="solid"/>
+                      <a:round/>
+                      <a:headEnd type="none" w="med" len="med"/>
+                      <a:tailEnd type="none" w="med" len="med"/>
+                    </a:lnT>
+                    <a:lnB w="12700" cap="flat" cmpd="sng" algn="ctr">
+                      <a:solidFill>
+                        <a:srgbClr val="919191"/>
                       </a:solidFill>
                       <a:prstDash val="solid"/>
                       <a:round/>
@@ -5267,13 +4140,13 @@
                       <a:r>
                         <a:rPr lang="en-US" sz="1900" dirty="0">
                           <a:solidFill>
-                            <a:srgbClr val="183D43"/>
+                            <a:srgbClr val="242424"/>
                           </a:solidFill>
                           <a:latin typeface="Microsoft YaHei" pitchFamily="34" charset="0"/>
                           <a:ea typeface="Microsoft YaHei" pitchFamily="34" charset="-122"/>
                           <a:cs typeface="Microsoft YaHei" pitchFamily="34" charset="-120"/>
                         </a:rPr>
-                        <a:t>保留面积比例</a:t>
+                        <a:t>固定墨卡托图上的面积与轮廓</a:t>
                       </a:r>
                       <a:endParaRPr lang="en-US" sz="1900" dirty="0">
                         <a:latin typeface="Microsoft YaHei" charset="0"/>
@@ -5282,10 +4155,10 @@
                       </a:endParaRPr>
                     </a:p>
                   </a:txBody>
-                  <a:tcPr marL="155448" marR="155448" marT="109728" marB="109728" anchor="ctr">
+                  <a:tcPr marL="146304" marR="146304" marT="109728" marB="109728" anchor="ctr">
                     <a:lnL w="12700" cap="flat" cmpd="sng" algn="ctr">
                       <a:solidFill>
-                        <a:srgbClr val="92A7A2"/>
+                        <a:srgbClr val="919191"/>
                       </a:solidFill>
                       <a:prstDash val="solid"/>
                       <a:round/>
@@ -5294,7 +4167,7 @@
                     </a:lnL>
                     <a:lnR w="12700" cap="flat" cmpd="sng" algn="ctr">
                       <a:solidFill>
-                        <a:srgbClr val="92A7A2"/>
+                        <a:srgbClr val="919191"/>
                       </a:solidFill>
                       <a:prstDash val="solid"/>
                       <a:round/>
@@ -5303,7 +4176,7 @@
                     </a:lnR>
                     <a:lnT w="12700" cap="flat" cmpd="sng" algn="ctr">
                       <a:solidFill>
-                        <a:srgbClr val="92A7A2"/>
+                        <a:srgbClr val="919191"/>
                       </a:solidFill>
                       <a:prstDash val="solid"/>
                       <a:round/>
@@ -5312,7 +4185,7 @@
                     </a:lnT>
                     <a:lnB w="12700" cap="flat" cmpd="sng" algn="ctr">
                       <a:solidFill>
-                        <a:srgbClr val="92A7A2"/>
+                        <a:srgbClr val="919191"/>
                       </a:solidFill>
                       <a:prstDash val="solid"/>
                       <a:round/>
@@ -5325,7 +4198,265 @@
                   </a:tcPr>
                 </a:tc>
               </a:tr>
-              <a:tr h="704088">
+            </a:tbl>
+          </a:graphicData>
+        </a:graphic>
+      </p:graphicFrame>
+      <p:sp>
+        <p:nvSpPr>
+          <p:cNvPr id="12" name="Text 9"/>
+          <p:cNvSpPr/>
+          <p:nvPr/>
+        </p:nvSpPr>
+        <p:spPr>
+          <a:xfrm>
+            <a:off x="640080" y="5468112"/>
+            <a:ext cx="10881360" cy="566928"/>
+          </a:xfrm>
+          <a:prstGeom prst="rect">
+            <a:avLst/>
+          </a:prstGeom>
+          <a:noFill/>
+          <a:ln/>
+        </p:spPr>
+        <p:txBody>
+          <a:bodyPr wrap="square" lIns="0" tIns="0" rIns="0" bIns="0" rtlCol="0" anchor="ctr"/>
+          <a:lstStyle/>
+          <a:p>
+            <a:pPr indent="0" marL="0">
+              <a:buNone/>
+            </a:pPr>
+            <a:r>
+              <a:rPr lang="en-US" sz="1700" dirty="0">
+                <a:solidFill>
+                  <a:srgbClr val="5C5C5C"/>
+                </a:solidFill>
+                <a:latin typeface="Microsoft YaHei" pitchFamily="34" charset="0"/>
+                <a:ea typeface="Microsoft YaHei" pitchFamily="34" charset="-122"/>
+                <a:cs typeface="Microsoft YaHei" pitchFamily="34" charset="-120"/>
+              </a:rPr>
+              <a:t>球面墨卡托；局部倍率不是整国倍率。概化边界的计算面积不替代统计面积。</a:t>
+            </a:r>
+            <a:endParaRPr lang="en-US" sz="1700" dirty="0"/>
+          </a:p>
+        </p:txBody>
+      </p:sp>
+    </p:spTree>
+  </p:cSld>
+  <p:clrMapOvr>
+    <a:masterClrMapping/>
+  </p:clrMapOvr>
+</p:sld>
+</file>
+
+<file path=ppt/slides/slide6.xml><?xml version="1.0" encoding="utf-8"?>
+<p:sld xmlns:a="http://schemas.openxmlformats.org/drawingml/2006/main" xmlns:r="http://schemas.openxmlformats.org/officeDocument/2006/relationships" xmlns:p="http://schemas.openxmlformats.org/presentationml/2006/main">
+  <p:cSld name="Slide 6">
+    <p:bg>
+      <p:bgPr>
+        <a:solidFill>
+          <a:srgbClr val="F7F4EF"/>
+        </a:solidFill>
+      </p:bgPr>
+    </p:bg>
+    <p:spTree>
+      <p:nvGrpSpPr>
+        <p:cNvPr id="1" name=""/>
+        <p:cNvGrpSpPr/>
+        <p:nvPr/>
+      </p:nvGrpSpPr>
+      <p:grpSpPr>
+        <a:xfrm>
+          <a:off x="0" y="0"/>
+          <a:ext cx="0" cy="0"/>
+          <a:chOff x="0" y="0"/>
+          <a:chExt cx="0" cy="0"/>
+        </a:xfrm>
+      </p:grpSpPr>
+      <p:sp>
+        <p:nvSpPr>
+          <p:cNvPr id="2" name="Text 0"/>
+          <p:cNvSpPr/>
+          <p:nvPr/>
+        </p:nvSpPr>
+        <p:spPr>
+          <a:xfrm>
+            <a:off x="594360" y="438912"/>
+            <a:ext cx="10972800" cy="822960"/>
+          </a:xfrm>
+          <a:prstGeom prst="rect">
+            <a:avLst/>
+          </a:prstGeom>
+          <a:noFill/>
+          <a:ln/>
+        </p:spPr>
+        <p:txBody>
+          <a:bodyPr wrap="square" lIns="0" tIns="0" rIns="0" bIns="0" rtlCol="0" anchor="ctr"/>
+          <a:lstStyle/>
+          <a:p>
+            <a:pPr indent="0" marL="0">
+              <a:buNone/>
+            </a:pPr>
+            <a:r>
+              <a:rPr lang="en-US" sz="3000" b="1" dirty="0">
+                <a:solidFill>
+                  <a:srgbClr val="242424"/>
+                </a:solidFill>
+                <a:latin typeface="Microsoft YaHei" pitchFamily="34" charset="0"/>
+                <a:ea typeface="Microsoft YaHei" pitchFamily="34" charset="-122"/>
+                <a:cs typeface="Microsoft YaHei" pitchFamily="34" charset="-120"/>
+              </a:rPr>
+              <a:t>先问地图要保留什么</a:t>
+            </a:r>
+            <a:endParaRPr lang="en-US" sz="3000" dirty="0"/>
+          </a:p>
+        </p:txBody>
+      </p:sp>
+      <p:sp>
+        <p:nvSpPr>
+          <p:cNvPr id="3" name="Text 1"/>
+          <p:cNvSpPr/>
+          <p:nvPr/>
+        </p:nvSpPr>
+        <p:spPr>
+          <a:xfrm>
+            <a:off x="594360" y="6291072"/>
+            <a:ext cx="10424160" cy="320040"/>
+          </a:xfrm>
+          <a:prstGeom prst="rect">
+            <a:avLst/>
+          </a:prstGeom>
+          <a:noFill/>
+          <a:ln/>
+        </p:spPr>
+        <p:txBody>
+          <a:bodyPr wrap="square" lIns="0" tIns="0" rIns="0" bIns="0" rtlCol="0" anchor="ctr"/>
+          <a:lstStyle/>
+          <a:p>
+            <a:pPr indent="0" marL="0">
+              <a:buNone/>
+            </a:pPr>
+            <a:r>
+              <a:rPr lang="en-US" sz="1100" dirty="0">
+                <a:solidFill>
+                  <a:srgbClr val="5C5C5C"/>
+                </a:solidFill>
+                <a:latin typeface="Microsoft YaHei" pitchFamily="34" charset="0"/>
+                <a:ea typeface="Microsoft YaHei" pitchFamily="34" charset="-122"/>
+                <a:cs typeface="Microsoft YaHei" pitchFamily="34" charset="-120"/>
+              </a:rPr>
+              <a:t>PROJ / Britannica / IndexMundi / Esri / Natural Earth / Esri</a:t>
+            </a:r>
+            <a:endParaRPr lang="en-US" sz="1100" dirty="0"/>
+          </a:p>
+        </p:txBody>
+      </p:sp>
+      <p:sp>
+        <p:nvSpPr>
+          <p:cNvPr id="4" name="Text 2"/>
+          <p:cNvSpPr/>
+          <p:nvPr/>
+        </p:nvSpPr>
+        <p:spPr>
+          <a:xfrm>
+            <a:off x="11018520" y="6254496"/>
+            <a:ext cx="502920" cy="365760"/>
+          </a:xfrm>
+          <a:prstGeom prst="rect">
+            <a:avLst/>
+          </a:prstGeom>
+          <a:noFill/>
+          <a:ln/>
+        </p:spPr>
+        <p:txBody>
+          <a:bodyPr wrap="square" lIns="0" tIns="0" rIns="0" bIns="0" rtlCol="0" anchor="ctr"/>
+          <a:lstStyle/>
+          <a:p>
+            <a:pPr algn="r" indent="0" marL="0">
+              <a:buNone/>
+            </a:pPr>
+            <a:r>
+              <a:rPr lang="en-US" sz="1300" dirty="0">
+                <a:solidFill>
+                  <a:srgbClr val="5C5C5C"/>
+                </a:solidFill>
+                <a:latin typeface="Microsoft YaHei" pitchFamily="34" charset="0"/>
+                <a:ea typeface="Microsoft YaHei" pitchFamily="34" charset="-122"/>
+                <a:cs typeface="Microsoft YaHei" pitchFamily="34" charset="-120"/>
+              </a:rPr>
+              <a:t>06</a:t>
+            </a:r>
+            <a:endParaRPr lang="en-US" sz="1300" dirty="0"/>
+          </a:p>
+        </p:txBody>
+      </p:sp>
+      <p:sp>
+        <p:nvSpPr>
+          <p:cNvPr id="5" name="Text 3"/>
+          <p:cNvSpPr/>
+          <p:nvPr/>
+        </p:nvSpPr>
+        <p:spPr>
+          <a:xfrm>
+            <a:off x="685800" y="1463040"/>
+            <a:ext cx="10789920" cy="1152144"/>
+          </a:xfrm>
+          <a:prstGeom prst="rect">
+            <a:avLst/>
+          </a:prstGeom>
+          <a:noFill/>
+          <a:ln/>
+        </p:spPr>
+        <p:txBody>
+          <a:bodyPr wrap="square" lIns="0" tIns="0" rIns="0" bIns="0" rtlCol="0" anchor="ctr"/>
+          <a:lstStyle/>
+          <a:p>
+            <a:pPr indent="0" marL="0">
+              <a:buNone/>
+            </a:pPr>
+            <a:r>
+              <a:rPr lang="en-US" sz="2200" dirty="0">
+                <a:solidFill>
+                  <a:srgbClr val="242424"/>
+                </a:solidFill>
+                <a:latin typeface="Microsoft YaHei" pitchFamily="34" charset="0"/>
+                <a:ea typeface="Microsoft YaHei" pitchFamily="34" charset="-122"/>
+                <a:cs typeface="Microsoft YaHei" pitchFamily="34" charset="-120"/>
+              </a:rPr>
+              <a:t>墨卡托保留局部角度，把恒定罗盘航向的恒向线画成直线，但它通常不是最短路线；两极在无穷远，有限地图必须裁切。Equal Earth 保面积比例，却不保所有形状、角度和距离。</a:t>
+            </a:r>
+            <a:endParaRPr lang="en-US" sz="2200" dirty="0"/>
+          </a:p>
+        </p:txBody>
+      </p:sp>
+      <p:graphicFrame>
+        <p:nvGraphicFramePr>
+          <p:cNvPr id="6" name="Table 0"/>
+          <p:cNvGraphicFramePr>
+            <a:graphicFrameLocks noGrp="1"/>
+          </p:cNvGraphicFramePr>
+          <p:nvPr>
+            <p:extLst>
+              <p:ext uri="{D42A27DB-BD31-4B8C-83A1-F6EECF244321}">
+                <p14:modId xmlns:p14="http://schemas.microsoft.com/office/powerpoint/2010/main" val="1579011935"/>
+              </p:ext>
+            </p:extLst>
+          </p:nvPr>
+        </p:nvGraphicFramePr>
+        <p:xfrm>
+          <a:off x="777240" y="2971800"/>
+          <a:ext cx="10698480" cy="914400"/>
+        </p:xfrm>
+        <a:graphic>
+          <a:graphicData uri="http://schemas.openxmlformats.org/drawingml/2006/table">
+            <a:tbl>
+              <a:tblPr/>
+              <a:tblGrid>
+                <a:gridCol w="2377440"/>
+                <a:gridCol w="4206240"/>
+                <a:gridCol w="4114800"/>
+              </a:tblGrid>
+              <a:tr h="502920">
                 <a:tc>
                   <a:txBody>
                     <a:bodyPr/>
@@ -5337,13 +4468,13 @@
                       <a:r>
                         <a:rPr lang="en-US" sz="1900" dirty="0">
                           <a:solidFill>
-                            <a:srgbClr val="183D43"/>
+                            <a:srgbClr val="242424"/>
                           </a:solidFill>
                           <a:latin typeface="Microsoft YaHei" pitchFamily="34" charset="0"/>
                           <a:ea typeface="Microsoft YaHei" pitchFamily="34" charset="-122"/>
                           <a:cs typeface="Microsoft YaHei" pitchFamily="34" charset="-120"/>
                         </a:rPr>
-                        <a:t>角度与形状</a:t>
+                        <a:t>投影</a:t>
                       </a:r>
                       <a:endParaRPr lang="en-US" sz="1900" dirty="0">
                         <a:latin typeface="Microsoft YaHei" charset="0"/>
@@ -5352,10 +4483,10 @@
                       </a:endParaRPr>
                     </a:p>
                   </a:txBody>
-                  <a:tcPr marL="155448" marR="155448" marT="109728" marB="109728" anchor="ctr">
+                  <a:tcPr marL="146304" marR="146304" marT="109728" marB="109728" anchor="ctr">
                     <a:lnL w="12700" cap="flat" cmpd="sng" algn="ctr">
                       <a:solidFill>
-                        <a:srgbClr val="92A7A2"/>
+                        <a:srgbClr val="919191"/>
                       </a:solidFill>
                       <a:prstDash val="solid"/>
                       <a:round/>
@@ -5364,7 +4495,7 @@
                     </a:lnL>
                     <a:lnR w="12700" cap="flat" cmpd="sng" algn="ctr">
                       <a:solidFill>
-                        <a:srgbClr val="92A7A2"/>
+                        <a:srgbClr val="919191"/>
                       </a:solidFill>
                       <a:prstDash val="solid"/>
                       <a:round/>
@@ -5373,7 +4504,7 @@
                     </a:lnR>
                     <a:lnT w="12700" cap="flat" cmpd="sng" algn="ctr">
                       <a:solidFill>
-                        <a:srgbClr val="92A7A2"/>
+                        <a:srgbClr val="919191"/>
                       </a:solidFill>
                       <a:prstDash val="solid"/>
                       <a:round/>
@@ -5382,7 +4513,7 @@
                     </a:lnT>
                     <a:lnB w="12700" cap="flat" cmpd="sng" algn="ctr">
                       <a:solidFill>
-                        <a:srgbClr val="92A7A2"/>
+                        <a:srgbClr val="919191"/>
                       </a:solidFill>
                       <a:prstDash val="solid"/>
                       <a:round/>
@@ -5405,34 +4536,13 @@
                       <a:r>
                         <a:rPr lang="en-US" sz="1900" dirty="0">
                           <a:solidFill>
-                            <a:srgbClr val="183D43"/>
+                            <a:srgbClr val="242424"/>
                           </a:solidFill>
                           <a:latin typeface="Microsoft YaHei" pitchFamily="34" charset="0"/>
                           <a:ea typeface="Microsoft YaHei" pitchFamily="34" charset="-122"/>
                           <a:cs typeface="Microsoft YaHei" pitchFamily="34" charset="-120"/>
                         </a:rPr>
-                        <a:t>局部保角；不保留</a:t>
-                      </a:r>
-                      <a:endParaRPr lang="en-US" sz="1900" dirty="0">
-                        <a:latin typeface="Microsoft YaHei" charset="0"/>
-                        <a:ea typeface="Microsoft YaHei" charset="0"/>
-                        <a:cs typeface="Microsoft YaHei" charset="0"/>
-                      </a:endParaRPr>
-                    </a:p>
-                    <a:p>
-                      <a:pPr indent="0" marL="0">
-                        <a:buNone/>
-                      </a:pPr>
-                      <a:r>
-                        <a:rPr lang="en-US" sz="1900" dirty="0">
-                          <a:solidFill>
-                            <a:srgbClr val="183D43"/>
-                          </a:solidFill>
-                          <a:latin typeface="Microsoft YaHei" pitchFamily="34" charset="0"/>
-                          <a:ea typeface="Microsoft YaHei" pitchFamily="34" charset="-122"/>
-                          <a:cs typeface="Microsoft YaHei" pitchFamily="34" charset="-120"/>
-                        </a:rPr>
-                        <a:t>大陆整体形状</a:t>
+                        <a:t>保留的性质</a:t>
                       </a:r>
                       <a:endParaRPr lang="en-US" sz="1900" dirty="0">
                         <a:latin typeface="Microsoft YaHei" charset="0"/>
@@ -5441,10 +4551,10 @@
                       </a:endParaRPr>
                     </a:p>
                   </a:txBody>
-                  <a:tcPr marL="155448" marR="155448" marT="109728" marB="109728" anchor="ctr">
+                  <a:tcPr marL="146304" marR="146304" marT="109728" marB="109728" anchor="ctr">
                     <a:lnL w="12700" cap="flat" cmpd="sng" algn="ctr">
                       <a:solidFill>
-                        <a:srgbClr val="92A7A2"/>
+                        <a:srgbClr val="919191"/>
                       </a:solidFill>
                       <a:prstDash val="solid"/>
                       <a:round/>
@@ -5453,7 +4563,7 @@
                     </a:lnL>
                     <a:lnR w="12700" cap="flat" cmpd="sng" algn="ctr">
                       <a:solidFill>
-                        <a:srgbClr val="92A7A2"/>
+                        <a:srgbClr val="919191"/>
                       </a:solidFill>
                       <a:prstDash val="solid"/>
                       <a:round/>
@@ -5462,7 +4572,7 @@
                     </a:lnR>
                     <a:lnT w="12700" cap="flat" cmpd="sng" algn="ctr">
                       <a:solidFill>
-                        <a:srgbClr val="92A7A2"/>
+                        <a:srgbClr val="919191"/>
                       </a:solidFill>
                       <a:prstDash val="solid"/>
                       <a:round/>
@@ -5471,7 +4581,7 @@
                     </a:lnT>
                     <a:lnB w="12700" cap="flat" cmpd="sng" algn="ctr">
                       <a:solidFill>
-                        <a:srgbClr val="92A7A2"/>
+                        <a:srgbClr val="919191"/>
                       </a:solidFill>
                       <a:prstDash val="solid"/>
                       <a:round/>
@@ -5494,13 +4604,13 @@
                       <a:r>
                         <a:rPr lang="en-US" sz="1900" dirty="0">
                           <a:solidFill>
-                            <a:srgbClr val="183D43"/>
+                            <a:srgbClr val="242424"/>
                           </a:solidFill>
                           <a:latin typeface="Microsoft YaHei" pitchFamily="34" charset="0"/>
                           <a:ea typeface="Microsoft YaHei" pitchFamily="34" charset="-122"/>
                           <a:cs typeface="Microsoft YaHei" pitchFamily="34" charset="-120"/>
                         </a:rPr>
-                        <a:t>不保角；形状仍会变形</a:t>
+                        <a:t>不能据此保证</a:t>
                       </a:r>
                       <a:endParaRPr lang="en-US" sz="1900" dirty="0">
                         <a:latin typeface="Microsoft YaHei" charset="0"/>
@@ -5509,10 +4619,10 @@
                       </a:endParaRPr>
                     </a:p>
                   </a:txBody>
-                  <a:tcPr marL="155448" marR="155448" marT="109728" marB="109728" anchor="ctr">
+                  <a:tcPr marL="146304" marR="146304" marT="109728" marB="109728" anchor="ctr">
                     <a:lnL w="12700" cap="flat" cmpd="sng" algn="ctr">
                       <a:solidFill>
-                        <a:srgbClr val="92A7A2"/>
+                        <a:srgbClr val="919191"/>
                       </a:solidFill>
                       <a:prstDash val="solid"/>
                       <a:round/>
@@ -5521,7 +4631,7 @@
                     </a:lnL>
                     <a:lnR w="12700" cap="flat" cmpd="sng" algn="ctr">
                       <a:solidFill>
-                        <a:srgbClr val="92A7A2"/>
+                        <a:srgbClr val="919191"/>
                       </a:solidFill>
                       <a:prstDash val="solid"/>
                       <a:round/>
@@ -5530,7 +4640,7 @@
                     </a:lnR>
                     <a:lnT w="12700" cap="flat" cmpd="sng" algn="ctr">
                       <a:solidFill>
-                        <a:srgbClr val="92A7A2"/>
+                        <a:srgbClr val="919191"/>
                       </a:solidFill>
                       <a:prstDash val="solid"/>
                       <a:round/>
@@ -5539,7 +4649,7 @@
                     </a:lnT>
                     <a:lnB w="12700" cap="flat" cmpd="sng" algn="ctr">
                       <a:solidFill>
-                        <a:srgbClr val="92A7A2"/>
+                        <a:srgbClr val="919191"/>
                       </a:solidFill>
                       <a:prstDash val="solid"/>
                       <a:round/>
@@ -5552,7 +4662,7 @@
                   </a:tcPr>
                 </a:tc>
               </a:tr>
-              <a:tr h="704088">
+              <a:tr h="502920">
                 <a:tc>
                   <a:txBody>
                     <a:bodyPr/>
@@ -5564,13 +4674,13 @@
                       <a:r>
                         <a:rPr lang="en-US" sz="1900" dirty="0">
                           <a:solidFill>
-                            <a:srgbClr val="183D43"/>
+                            <a:srgbClr val="242424"/>
                           </a:solidFill>
                           <a:latin typeface="Microsoft YaHei" pitchFamily="34" charset="0"/>
                           <a:ea typeface="Microsoft YaHei" pitchFamily="34" charset="-122"/>
                           <a:cs typeface="Microsoft YaHei" pitchFamily="34" charset="-120"/>
                         </a:rPr>
-                        <a:t>用途取向</a:t>
+                        <a:t>普通墨卡托</a:t>
                       </a:r>
                       <a:endParaRPr lang="en-US" sz="1900" dirty="0">
                         <a:latin typeface="Microsoft YaHei" charset="0"/>
@@ -5579,10 +4689,10 @@
                       </a:endParaRPr>
                     </a:p>
                   </a:txBody>
-                  <a:tcPr marL="155448" marR="155448" marT="109728" marB="109728" anchor="ctr">
+                  <a:tcPr marL="146304" marR="146304" marT="109728" marB="109728" anchor="ctr">
                     <a:lnL w="12700" cap="flat" cmpd="sng" algn="ctr">
                       <a:solidFill>
-                        <a:srgbClr val="92A7A2"/>
+                        <a:srgbClr val="919191"/>
                       </a:solidFill>
                       <a:prstDash val="solid"/>
                       <a:round/>
@@ -5591,7 +4701,7 @@
                     </a:lnL>
                     <a:lnR w="12700" cap="flat" cmpd="sng" algn="ctr">
                       <a:solidFill>
-                        <a:srgbClr val="92A7A2"/>
+                        <a:srgbClr val="919191"/>
                       </a:solidFill>
                       <a:prstDash val="solid"/>
                       <a:round/>
@@ -5600,7 +4710,7 @@
                     </a:lnR>
                     <a:lnT w="12700" cap="flat" cmpd="sng" algn="ctr">
                       <a:solidFill>
-                        <a:srgbClr val="92A7A2"/>
+                        <a:srgbClr val="919191"/>
                       </a:solidFill>
                       <a:prstDash val="solid"/>
                       <a:round/>
@@ -5609,7 +4719,7 @@
                     </a:lnT>
                     <a:lnB w="12700" cap="flat" cmpd="sng" algn="ctr">
                       <a:solidFill>
-                        <a:srgbClr val="92A7A2"/>
+                        <a:srgbClr val="919191"/>
                       </a:solidFill>
                       <a:prstDash val="solid"/>
                       <a:round/>
@@ -5632,34 +4742,13 @@
                       <a:r>
                         <a:rPr lang="en-US" sz="1900" dirty="0">
                           <a:solidFill>
-                            <a:srgbClr val="183D43"/>
+                            <a:srgbClr val="242424"/>
                           </a:solidFill>
                           <a:latin typeface="Microsoft YaHei" pitchFamily="34" charset="0"/>
                           <a:ea typeface="Microsoft YaHei" pitchFamily="34" charset="-122"/>
                           <a:cs typeface="Microsoft YaHei" pitchFamily="34" charset="-120"/>
                         </a:rPr>
-                        <a:t>表达恒定航向；</a:t>
-                      </a:r>
-                      <a:endParaRPr lang="en-US" sz="1900" dirty="0">
-                        <a:latin typeface="Microsoft YaHei" charset="0"/>
-                        <a:ea typeface="Microsoft YaHei" charset="0"/>
-                        <a:cs typeface="Microsoft YaHei" charset="0"/>
-                      </a:endParaRPr>
-                    </a:p>
-                    <a:p>
-                      <a:pPr indent="0" marL="0">
-                        <a:buNone/>
-                      </a:pPr>
-                      <a:r>
-                        <a:rPr lang="en-US" sz="1900" dirty="0">
-                          <a:solidFill>
-                            <a:srgbClr val="183D43"/>
-                          </a:solidFill>
-                          <a:latin typeface="Microsoft YaHei" pitchFamily="34" charset="0"/>
-                          <a:ea typeface="Microsoft YaHei" pitchFamily="34" charset="-122"/>
-                          <a:cs typeface="Microsoft YaHei" pitchFamily="34" charset="-120"/>
-                        </a:rPr>
-                        <a:t>恒向线为直线</a:t>
+                        <a:t>局部角度；恒向线为直线</a:t>
                       </a:r>
                       <a:endParaRPr lang="en-US" sz="1900" dirty="0">
                         <a:latin typeface="Microsoft YaHei" charset="0"/>
@@ -5668,10 +4757,10 @@
                       </a:endParaRPr>
                     </a:p>
                   </a:txBody>
-                  <a:tcPr marL="155448" marR="155448" marT="109728" marB="109728" anchor="ctr">
+                  <a:tcPr marL="146304" marR="146304" marT="109728" marB="109728" anchor="ctr">
                     <a:lnL w="12700" cap="flat" cmpd="sng" algn="ctr">
                       <a:solidFill>
-                        <a:srgbClr val="92A7A2"/>
+                        <a:srgbClr val="919191"/>
                       </a:solidFill>
                       <a:prstDash val="solid"/>
                       <a:round/>
@@ -5680,7 +4769,7 @@
                     </a:lnL>
                     <a:lnR w="12700" cap="flat" cmpd="sng" algn="ctr">
                       <a:solidFill>
-                        <a:srgbClr val="92A7A2"/>
+                        <a:srgbClr val="919191"/>
                       </a:solidFill>
                       <a:prstDash val="solid"/>
                       <a:round/>
@@ -5689,7 +4778,7 @@
                     </a:lnR>
                     <a:lnT w="12700" cap="flat" cmpd="sng" algn="ctr">
                       <a:solidFill>
-                        <a:srgbClr val="92A7A2"/>
+                        <a:srgbClr val="919191"/>
                       </a:solidFill>
                       <a:prstDash val="solid"/>
                       <a:round/>
@@ -5698,7 +4787,7 @@
                     </a:lnT>
                     <a:lnB w="12700" cap="flat" cmpd="sng" algn="ctr">
                       <a:solidFill>
-                        <a:srgbClr val="92A7A2"/>
+                        <a:srgbClr val="919191"/>
                       </a:solidFill>
                       <a:prstDash val="solid"/>
                       <a:round/>
@@ -5721,13 +4810,13 @@
                       <a:r>
                         <a:rPr lang="en-US" sz="1900" dirty="0">
                           <a:solidFill>
-                            <a:srgbClr val="183D43"/>
+                            <a:srgbClr val="242424"/>
                           </a:solidFill>
                           <a:latin typeface="Microsoft YaHei" pitchFamily="34" charset="0"/>
                           <a:ea typeface="Microsoft YaHei" pitchFamily="34" charset="-122"/>
                           <a:cs typeface="Microsoft YaHei" pitchFamily="34" charset="-120"/>
                         </a:rPr>
-                        <a:t>比较地区的面积大小</a:t>
+                        <a:t>面积；最短路线</a:t>
                       </a:r>
                       <a:endParaRPr lang="en-US" sz="1900" dirty="0">
                         <a:latin typeface="Microsoft YaHei" charset="0"/>
@@ -5736,10 +4825,10 @@
                       </a:endParaRPr>
                     </a:p>
                   </a:txBody>
-                  <a:tcPr marL="155448" marR="155448" marT="109728" marB="109728" anchor="ctr">
+                  <a:tcPr marL="146304" marR="146304" marT="109728" marB="109728" anchor="ctr">
                     <a:lnL w="12700" cap="flat" cmpd="sng" algn="ctr">
                       <a:solidFill>
-                        <a:srgbClr val="92A7A2"/>
+                        <a:srgbClr val="919191"/>
                       </a:solidFill>
                       <a:prstDash val="solid"/>
                       <a:round/>
@@ -5748,7 +4837,7 @@
                     </a:lnL>
                     <a:lnR w="12700" cap="flat" cmpd="sng" algn="ctr">
                       <a:solidFill>
-                        <a:srgbClr val="92A7A2"/>
+                        <a:srgbClr val="919191"/>
                       </a:solidFill>
                       <a:prstDash val="solid"/>
                       <a:round/>
@@ -5757,7 +4846,7 @@
                     </a:lnR>
                     <a:lnT w="12700" cap="flat" cmpd="sng" algn="ctr">
                       <a:solidFill>
-                        <a:srgbClr val="92A7A2"/>
+                        <a:srgbClr val="919191"/>
                       </a:solidFill>
                       <a:prstDash val="solid"/>
                       <a:round/>
@@ -5766,7 +4855,7 @@
                     </a:lnT>
                     <a:lnB w="12700" cap="flat" cmpd="sng" algn="ctr">
                       <a:solidFill>
-                        <a:srgbClr val="92A7A2"/>
+                        <a:srgbClr val="919191"/>
                       </a:solidFill>
                       <a:prstDash val="solid"/>
                       <a:round/>
@@ -5779,7 +4868,7 @@
                   </a:tcPr>
                 </a:tc>
               </a:tr>
-              <a:tr h="704088">
+              <a:tr h="502920">
                 <a:tc>
                   <a:txBody>
                     <a:bodyPr/>
@@ -5791,13 +4880,13 @@
                       <a:r>
                         <a:rPr lang="en-US" sz="1900" dirty="0">
                           <a:solidFill>
-                            <a:srgbClr val="183D43"/>
+                            <a:srgbClr val="242424"/>
                           </a:solidFill>
                           <a:latin typeface="Microsoft YaHei" pitchFamily="34" charset="0"/>
                           <a:ea typeface="Microsoft YaHei" pitchFamily="34" charset="-122"/>
                           <a:cs typeface="Microsoft YaHei" pitchFamily="34" charset="-120"/>
                         </a:rPr>
-                        <a:t>不能承诺</a:t>
+                        <a:t>Equal Earth</a:t>
                       </a:r>
                       <a:endParaRPr lang="en-US" sz="1900" dirty="0">
                         <a:latin typeface="Microsoft YaHei" charset="0"/>
@@ -5806,10 +4895,10 @@
                       </a:endParaRPr>
                     </a:p>
                   </a:txBody>
-                  <a:tcPr marL="155448" marR="155448" marT="109728" marB="109728" anchor="ctr">
+                  <a:tcPr marL="146304" marR="146304" marT="109728" marB="109728" anchor="ctr">
                     <a:lnL w="12700" cap="flat" cmpd="sng" algn="ctr">
                       <a:solidFill>
-                        <a:srgbClr val="92A7A2"/>
+                        <a:srgbClr val="919191"/>
                       </a:solidFill>
                       <a:prstDash val="solid"/>
                       <a:round/>
@@ -5818,7 +4907,7 @@
                     </a:lnL>
                     <a:lnR w="12700" cap="flat" cmpd="sng" algn="ctr">
                       <a:solidFill>
-                        <a:srgbClr val="92A7A2"/>
+                        <a:srgbClr val="919191"/>
                       </a:solidFill>
                       <a:prstDash val="solid"/>
                       <a:round/>
@@ -5827,7 +4916,7 @@
                     </a:lnR>
                     <a:lnT w="12700" cap="flat" cmpd="sng" algn="ctr">
                       <a:solidFill>
-                        <a:srgbClr val="92A7A2"/>
+                        <a:srgbClr val="919191"/>
                       </a:solidFill>
                       <a:prstDash val="solid"/>
                       <a:round/>
@@ -5836,7 +4925,7 @@
                     </a:lnT>
                     <a:lnB w="12700" cap="flat" cmpd="sng" algn="ctr">
                       <a:solidFill>
-                        <a:srgbClr val="92A7A2"/>
+                        <a:srgbClr val="919191"/>
                       </a:solidFill>
                       <a:prstDash val="solid"/>
                       <a:round/>
@@ -5859,34 +4948,13 @@
                       <a:r>
                         <a:rPr lang="en-US" sz="1900" dirty="0">
                           <a:solidFill>
-                            <a:srgbClr val="183D43"/>
+                            <a:srgbClr val="242424"/>
                           </a:solidFill>
                           <a:latin typeface="Microsoft YaHei" pitchFamily="34" charset="0"/>
                           <a:ea typeface="Microsoft YaHei" pitchFamily="34" charset="-122"/>
                           <a:cs typeface="Microsoft YaHei" pitchFamily="34" charset="-120"/>
                         </a:rPr>
-                        <a:t>恒向线通常不是最短路；</a:t>
-                      </a:r>
-                      <a:endParaRPr lang="en-US" sz="1900" dirty="0">
-                        <a:latin typeface="Microsoft YaHei" charset="0"/>
-                        <a:ea typeface="Microsoft YaHei" charset="0"/>
-                        <a:cs typeface="Microsoft YaHei" charset="0"/>
-                      </a:endParaRPr>
-                    </a:p>
-                    <a:p>
-                      <a:pPr indent="0" marL="0">
-                        <a:buNone/>
-                      </a:pPr>
-                      <a:r>
-                        <a:rPr lang="en-US" sz="1900" dirty="0">
-                          <a:solidFill>
-                            <a:srgbClr val="183D43"/>
-                          </a:solidFill>
-                          <a:latin typeface="Microsoft YaHei" pitchFamily="34" charset="0"/>
-                          <a:ea typeface="Microsoft YaHei" pitchFamily="34" charset="-122"/>
-                          <a:cs typeface="Microsoft YaHei" pitchFamily="34" charset="-120"/>
-                        </a:rPr>
-                        <a:t>有限地图需裁切两极</a:t>
+                        <a:t>区域面积比例</a:t>
                       </a:r>
                       <a:endParaRPr lang="en-US" sz="1900" dirty="0">
                         <a:latin typeface="Microsoft YaHei" charset="0"/>
@@ -5895,10 +4963,10 @@
                       </a:endParaRPr>
                     </a:p>
                   </a:txBody>
-                  <a:tcPr marL="155448" marR="155448" marT="109728" marB="109728" anchor="ctr">
+                  <a:tcPr marL="146304" marR="146304" marT="109728" marB="109728" anchor="ctr">
                     <a:lnL w="12700" cap="flat" cmpd="sng" algn="ctr">
                       <a:solidFill>
-                        <a:srgbClr val="92A7A2"/>
+                        <a:srgbClr val="919191"/>
                       </a:solidFill>
                       <a:prstDash val="solid"/>
                       <a:round/>
@@ -5907,7 +4975,7 @@
                     </a:lnL>
                     <a:lnR w="12700" cap="flat" cmpd="sng" algn="ctr">
                       <a:solidFill>
-                        <a:srgbClr val="92A7A2"/>
+                        <a:srgbClr val="919191"/>
                       </a:solidFill>
                       <a:prstDash val="solid"/>
                       <a:round/>
@@ -5916,7 +4984,7 @@
                     </a:lnR>
                     <a:lnT w="12700" cap="flat" cmpd="sng" algn="ctr">
                       <a:solidFill>
-                        <a:srgbClr val="92A7A2"/>
+                        <a:srgbClr val="919191"/>
                       </a:solidFill>
                       <a:prstDash val="solid"/>
                       <a:round/>
@@ -5925,7 +4993,7 @@
                     </a:lnT>
                     <a:lnB w="12700" cap="flat" cmpd="sng" algn="ctr">
                       <a:solidFill>
-                        <a:srgbClr val="92A7A2"/>
+                        <a:srgbClr val="919191"/>
                       </a:solidFill>
                       <a:prstDash val="solid"/>
                       <a:round/>
@@ -5948,34 +5016,13 @@
                       <a:r>
                         <a:rPr lang="en-US" sz="1900" dirty="0">
                           <a:solidFill>
-                            <a:srgbClr val="183D43"/>
+                            <a:srgbClr val="242424"/>
                           </a:solidFill>
                           <a:latin typeface="Microsoft YaHei" pitchFamily="34" charset="0"/>
                           <a:ea typeface="Microsoft YaHei" pitchFamily="34" charset="-122"/>
                           <a:cs typeface="Microsoft YaHei" pitchFamily="34" charset="-120"/>
                         </a:rPr>
-                        <a:t>不能同时保全形状、</a:t>
-                      </a:r>
-                      <a:endParaRPr lang="en-US" sz="1900" dirty="0">
-                        <a:latin typeface="Microsoft YaHei" charset="0"/>
-                        <a:ea typeface="Microsoft YaHei" charset="0"/>
-                        <a:cs typeface="Microsoft YaHei" charset="0"/>
-                      </a:endParaRPr>
-                    </a:p>
-                    <a:p>
-                      <a:pPr indent="0" marL="0">
-                        <a:buNone/>
-                      </a:pPr>
-                      <a:r>
-                        <a:rPr lang="en-US" sz="1900" dirty="0">
-                          <a:solidFill>
-                            <a:srgbClr val="183D43"/>
-                          </a:solidFill>
-                          <a:latin typeface="Microsoft YaHei" pitchFamily="34" charset="0"/>
-                          <a:ea typeface="Microsoft YaHei" pitchFamily="34" charset="-122"/>
-                          <a:cs typeface="Microsoft YaHei" pitchFamily="34" charset="-120"/>
-                        </a:rPr>
-                        <a:t>角度、方向和距离</a:t>
+                        <a:t>所有形状、角度、距离</a:t>
                       </a:r>
                       <a:endParaRPr lang="en-US" sz="1900" dirty="0">
                         <a:latin typeface="Microsoft YaHei" charset="0"/>
@@ -5984,10 +5031,10 @@
                       </a:endParaRPr>
                     </a:p>
                   </a:txBody>
-                  <a:tcPr marL="155448" marR="155448" marT="109728" marB="109728" anchor="ctr">
+                  <a:tcPr marL="146304" marR="146304" marT="109728" marB="109728" anchor="ctr">
                     <a:lnL w="12700" cap="flat" cmpd="sng" algn="ctr">
                       <a:solidFill>
-                        <a:srgbClr val="92A7A2"/>
+                        <a:srgbClr val="919191"/>
                       </a:solidFill>
                       <a:prstDash val="solid"/>
                       <a:round/>
@@ -5996,7 +5043,7 @@
                     </a:lnL>
                     <a:lnR w="12700" cap="flat" cmpd="sng" algn="ctr">
                       <a:solidFill>
-                        <a:srgbClr val="92A7A2"/>
+                        <a:srgbClr val="919191"/>
                       </a:solidFill>
                       <a:prstDash val="solid"/>
                       <a:round/>
@@ -6005,7 +5052,7 @@
                     </a:lnR>
                     <a:lnT w="12700" cap="flat" cmpd="sng" algn="ctr">
                       <a:solidFill>
-                        <a:srgbClr val="92A7A2"/>
+                        <a:srgbClr val="919191"/>
                       </a:solidFill>
                       <a:prstDash val="solid"/>
                       <a:round/>
@@ -6014,7 +5061,7 @@
                     </a:lnT>
                     <a:lnB w="12700" cap="flat" cmpd="sng" algn="ctr">
                       <a:solidFill>
-                        <a:srgbClr val="92A7A2"/>
+                        <a:srgbClr val="919191"/>
                       </a:solidFill>
                       <a:prstDash val="solid"/>
                       <a:round/>
@@ -6039,8 +5086,8 @@
         </p:nvSpPr>
         <p:spPr>
           <a:xfrm>
-            <a:off x="640080" y="5925312"/>
-            <a:ext cx="10899648" cy="329184"/>
+            <a:off x="640080" y="5468112"/>
+            <a:ext cx="10881360" cy="566928"/>
           </a:xfrm>
           <a:prstGeom prst="rect">
             <a:avLst/>
@@ -6056,17 +5103,17 @@
               <a:buNone/>
             </a:pPr>
             <a:r>
-              <a:rPr lang="zh-CN" altLang="en-US" sz="2000" b="1" dirty="0">
-                <a:solidFill>
-                  <a:srgbClr val="183D43"/>
+              <a:rPr lang="en-US" sz="1700" dirty="0">
+                <a:solidFill>
+                  <a:srgbClr val="5C5C5C"/>
                 </a:solidFill>
                 <a:latin typeface="Microsoft YaHei" pitchFamily="34" charset="0"/>
                 <a:ea typeface="Microsoft YaHei" pitchFamily="34" charset="-122"/>
                 <a:cs typeface="Microsoft YaHei" pitchFamily="34" charset="-120"/>
               </a:rPr>
-              <a:t>比较“谁更大”时，等面积投影更合适；这不意味着它是唯一正确的地图。</a:t>
-            </a:r>
-            <a:endParaRPr lang="zh-CN" sz="2000" dirty="0"/>
+              <a:t>球面墨卡托；局部倍率不是整国倍率。概化边界的计算面积不替代统计面积。</a:t>
+            </a:r>
+            <a:endParaRPr lang="en-US" sz="1700" dirty="0"/>
           </a:p>
         </p:txBody>
       </p:sp>
@@ -6084,7 +5131,7 @@
     <p:bg>
       <p:bgPr>
         <a:solidFill>
-          <a:srgbClr val="F6F4EE"/>
+          <a:srgbClr val="F7F4EF"/>
         </a:solidFill>
       </p:bgPr>
     </p:bg>
@@ -6110,8 +5157,8 @@
         </p:nvSpPr>
         <p:spPr>
           <a:xfrm>
-            <a:off x="594360" y="329184"/>
-            <a:ext cx="10881360" cy="310896"/>
+            <a:off x="594360" y="438912"/>
+            <a:ext cx="10972800" cy="822960"/>
           </a:xfrm>
           <a:prstGeom prst="rect">
             <a:avLst/>
@@ -6127,17 +5174,17 @@
               <a:buNone/>
             </a:pPr>
             <a:r>
-              <a:rPr lang="zh-CN" altLang="en-US" sz="1300" spc="110" kern="0" dirty="0">
-                <a:solidFill>
-                  <a:srgbClr val="52696B"/>
+              <a:rPr lang="en-US" sz="3000" b="1" dirty="0">
+                <a:solidFill>
+                  <a:srgbClr val="242424"/>
                 </a:solidFill>
                 <a:latin typeface="Microsoft YaHei" pitchFamily="34" charset="0"/>
                 <a:ea typeface="Microsoft YaHei" pitchFamily="34" charset="-122"/>
                 <a:cs typeface="Microsoft YaHei" pitchFamily="34" charset="-120"/>
               </a:rPr>
-              <a:t>回到问题 · 下次看到“大格陵兰”时</a:t>
-            </a:r>
-            <a:endParaRPr lang="zh-CN" sz="1300" dirty="0"/>
+              <a:t>回到最初的问题</a:t>
+            </a:r>
+            <a:endParaRPr lang="en-US" sz="3000" dirty="0"/>
           </a:p>
         </p:txBody>
       </p:sp>
@@ -6149,8 +5196,8 @@
         </p:nvSpPr>
         <p:spPr>
           <a:xfrm>
-            <a:off x="594360" y="859536"/>
-            <a:ext cx="10972800" cy="868680"/>
+            <a:off x="594360" y="6291072"/>
+            <a:ext cx="10424160" cy="320040"/>
           </a:xfrm>
           <a:prstGeom prst="rect">
             <a:avLst/>
@@ -6159,24 +5206,24 @@
           <a:ln/>
         </p:spPr>
         <p:txBody>
-          <a:bodyPr wrap="square" lIns="0" tIns="0" rIns="0" bIns="0" rtlCol="0" anchor="t"/>
+          <a:bodyPr wrap="square" lIns="0" tIns="0" rIns="0" bIns="0" rtlCol="0" anchor="ctr"/>
           <a:lstStyle/>
           <a:p>
             <a:pPr indent="0" marL="0">
               <a:buNone/>
             </a:pPr>
             <a:r>
-              <a:rPr lang="zh-CN" altLang="en-US" sz="3200" b="1" dirty="0">
-                <a:solidFill>
-                  <a:srgbClr val="183D43"/>
+              <a:rPr lang="en-US" sz="1100" dirty="0">
+                <a:solidFill>
+                  <a:srgbClr val="5C5C5C"/>
                 </a:solidFill>
                 <a:latin typeface="Microsoft YaHei" pitchFamily="34" charset="0"/>
                 <a:ea typeface="Microsoft YaHei" pitchFamily="34" charset="-122"/>
                 <a:cs typeface="Microsoft YaHei" pitchFamily="34" charset="-120"/>
               </a:rPr>
-              <a:t>先辨认投影，再判断图上的“大”意味着什么</a:t>
-            </a:r>
-            <a:endParaRPr lang="zh-CN" sz="3200" dirty="0"/>
+              <a:t>完整依据与来源范围见同目录 research/report.md</a:t>
+            </a:r>
+            <a:endParaRPr lang="en-US" sz="1100" dirty="0"/>
           </a:p>
         </p:txBody>
       </p:sp>
@@ -6188,8 +5235,8 @@
         </p:nvSpPr>
         <p:spPr>
           <a:xfrm>
-            <a:off x="594360" y="6345936"/>
-            <a:ext cx="10515600" cy="228600"/>
+            <a:off x="11018520" y="6254496"/>
+            <a:ext cx="502920" cy="365760"/>
           </a:xfrm>
           <a:prstGeom prst="rect">
             <a:avLst/>
@@ -6201,21 +5248,21 @@
           <a:bodyPr wrap="square" lIns="0" tIns="0" rIns="0" bIns="0" rtlCol="0" anchor="ctr"/>
           <a:lstStyle/>
           <a:p>
-            <a:pPr indent="0" marL="0">
+            <a:pPr algn="r" indent="0" marL="0">
               <a:buNone/>
             </a:pPr>
             <a:r>
-              <a:rPr lang="zh-CN" altLang="en-US" sz="1050" dirty="0">
-                <a:solidFill>
-                  <a:srgbClr val="52696B"/>
+              <a:rPr lang="en-US" sz="1300" dirty="0">
+                <a:solidFill>
+                  <a:srgbClr val="5C5C5C"/>
                 </a:solidFill>
                 <a:latin typeface="Microsoft YaHei" pitchFamily="34" charset="0"/>
                 <a:ea typeface="Microsoft YaHei" pitchFamily="34" charset="-122"/>
                 <a:cs typeface="Microsoft YaHei" pitchFamily="34" charset="-120"/>
               </a:rPr>
-              <a:t>来源：IndexMundi、Britannica、PROJ、Esri；研究材料访问记录截至2026-09-16。</a:t>
-            </a:r>
-            <a:endParaRPr lang="zh-CN" sz="1050" dirty="0"/>
+              <a:t>07</a:t>
+            </a:r>
+            <a:endParaRPr lang="en-US" sz="1300" dirty="0"/>
           </a:p>
         </p:txBody>
       </p:sp>
@@ -6227,8 +5274,8 @@
         </p:nvSpPr>
         <p:spPr>
           <a:xfrm>
-            <a:off x="10972800" y="6336792"/>
-            <a:ext cx="640080" cy="256032"/>
+            <a:off x="777240" y="1554480"/>
+            <a:ext cx="10607040" cy="1143000"/>
           </a:xfrm>
           <a:prstGeom prst="rect">
             <a:avLst/>
@@ -6240,34 +5287,59 @@
           <a:bodyPr wrap="square" lIns="0" tIns="0" rIns="0" bIns="0" rtlCol="0" anchor="ctr"/>
           <a:lstStyle/>
           <a:p>
-            <a:pPr algn="r" indent="0" marL="0">
+            <a:pPr indent="0" marL="0">
               <a:buNone/>
             </a:pPr>
             <a:r>
-              <a:rPr lang="zh-CN" altLang="en-US" sz="1100" dirty="0">
-                <a:solidFill>
-                  <a:srgbClr val="52696B"/>
+              <a:rPr lang="en-US" sz="2600" b="1" dirty="0">
+                <a:solidFill>
+                  <a:srgbClr val="242424"/>
                 </a:solidFill>
                 <a:latin typeface="Microsoft YaHei" pitchFamily="34" charset="0"/>
                 <a:ea typeface="Microsoft YaHei" pitchFamily="34" charset="-122"/>
                 <a:cs typeface="Microsoft YaHei" pitchFamily="34" charset="-120"/>
               </a:rPr>
-              <a:t>7 / 7</a:t>
-            </a:r>
-            <a:endParaRPr lang="zh-CN" sz="1100" dirty="0"/>
-          </a:p>
-        </p:txBody>
-      </p:sp>
-      <p:sp>
-        <p:nvSpPr>
-          <p:cNvPr id="6" name="Text 4"/>
-          <p:cNvSpPr/>
-          <p:nvPr/>
-        </p:nvSpPr>
-        <p:spPr>
-          <a:xfrm>
-            <a:off x="640080" y="2057400"/>
-            <a:ext cx="685800" cy="603504"/>
+              <a:t>按引用的面积统计，非洲约为格陵兰的 14 倍。墨卡托地图越靠近两极放大越严重，因此看轮廓容易误判面积比例。</a:t>
+            </a:r>
+            <a:endParaRPr lang="en-US" sz="2600" dirty="0"/>
+          </a:p>
+        </p:txBody>
+      </p:sp>
+      <p:sp>
+        <p:nvSpPr>
+          <p:cNvPr id="6" name="Shape 4"/>
+          <p:cNvSpPr/>
+          <p:nvPr/>
+        </p:nvSpPr>
+        <p:spPr>
+          <a:xfrm>
+            <a:off x="777240" y="3017520"/>
+            <a:ext cx="10607040" cy="777240"/>
+          </a:xfrm>
+          <a:prstGeom prst="rect">
+            <a:avLst/>
+          </a:prstGeom>
+          <a:solidFill>
+            <a:srgbClr val="F4E3E8"/>
+          </a:solidFill>
+          <a:ln w="12700">
+            <a:solidFill>
+              <a:srgbClr val="919191"/>
+            </a:solidFill>
+            <a:prstDash val="solid"/>
+          </a:ln>
+        </p:spPr>
+      </p:sp>
+      <p:sp>
+        <p:nvSpPr>
+          <p:cNvPr id="7" name="Text 5"/>
+          <p:cNvSpPr/>
+          <p:nvPr/>
+        </p:nvSpPr>
+        <p:spPr>
+          <a:xfrm>
+            <a:off x="923544" y="3090672"/>
+            <a:ext cx="10314432" cy="630936"/>
           </a:xfrm>
           <a:prstGeom prst="rect">
             <a:avLst/>
@@ -6279,34 +5351,34 @@
           <a:bodyPr wrap="square" lIns="0" tIns="0" rIns="0" bIns="0" rtlCol="0" anchor="ctr"/>
           <a:lstStyle/>
           <a:p>
-            <a:pPr indent="0" marL="0">
+            <a:pPr algn="ctr" indent="0" marL="0">
               <a:buNone/>
             </a:pPr>
             <a:r>
-              <a:rPr lang="zh-CN" altLang="en-US" sz="2800" b="1" dirty="0">
-                <a:solidFill>
-                  <a:srgbClr val="176C70"/>
+              <a:rPr lang="en-US" sz="2100" b="1" dirty="0">
+                <a:solidFill>
+                  <a:srgbClr val="242424"/>
                 </a:solidFill>
                 <a:latin typeface="Microsoft YaHei" pitchFamily="34" charset="0"/>
                 <a:ea typeface="Microsoft YaHei" pitchFamily="34" charset="-122"/>
                 <a:cs typeface="Microsoft YaHei" pitchFamily="34" charset="-120"/>
               </a:rPr>
-              <a:t>01</a:t>
-            </a:r>
-            <a:endParaRPr lang="zh-CN" sz="2800" dirty="0"/>
-          </a:p>
-        </p:txBody>
-      </p:sp>
-      <p:sp>
-        <p:nvSpPr>
-          <p:cNvPr id="7" name="Text 5"/>
-          <p:cNvSpPr/>
-          <p:nvPr/>
-        </p:nvSpPr>
-        <p:spPr>
-          <a:xfrm>
-            <a:off x="1600200" y="2057400"/>
-            <a:ext cx="2907792" cy="630936"/>
+              <a:t>把土地面积与地图上的面积分开</a:t>
+            </a:r>
+            <a:endParaRPr lang="en-US" sz="2100" dirty="0"/>
+          </a:p>
+        </p:txBody>
+      </p:sp>
+      <p:sp>
+        <p:nvSpPr>
+          <p:cNvPr id="8" name="Text 6"/>
+          <p:cNvSpPr/>
+          <p:nvPr/>
+        </p:nvSpPr>
+        <p:spPr>
+          <a:xfrm>
+            <a:off x="868680" y="4160520"/>
+            <a:ext cx="10332720" cy="868680"/>
           </a:xfrm>
           <a:prstGeom prst="rect">
             <a:avLst/>
@@ -6322,30 +5394,30 @@
               <a:buNone/>
             </a:pPr>
             <a:r>
-              <a:rPr lang="zh-CN" altLang="en-US" sz="2300" b="1" dirty="0">
-                <a:solidFill>
-                  <a:srgbClr val="183D43"/>
+              <a:rPr lang="en-US" sz="2200" dirty="0">
+                <a:solidFill>
+                  <a:srgbClr val="242424"/>
                 </a:solidFill>
                 <a:latin typeface="Microsoft YaHei" pitchFamily="34" charset="0"/>
                 <a:ea typeface="Microsoft YaHei" pitchFamily="34" charset="-122"/>
                 <a:cs typeface="Microsoft YaHei" pitchFamily="34" charset="-120"/>
               </a:rPr>
-              <a:t>识别投影</a:t>
-            </a:r>
-            <a:endParaRPr lang="zh-CN" sz="2300" dirty="0"/>
-          </a:p>
-        </p:txBody>
-      </p:sp>
-      <p:sp>
-        <p:nvSpPr>
-          <p:cNvPr id="8" name="Text 6"/>
-          <p:cNvSpPr/>
-          <p:nvPr/>
-        </p:nvSpPr>
-        <p:spPr>
-          <a:xfrm>
-            <a:off x="4681728" y="2039112"/>
-            <a:ext cx="6766560" cy="749808"/>
+              <a:t>球面墨卡托；局部倍率不是整国倍率。概化边界的计算面积不替代统计面积。</a:t>
+            </a:r>
+            <a:endParaRPr lang="en-US" sz="2200" dirty="0"/>
+          </a:p>
+        </p:txBody>
+      </p:sp>
+      <p:sp>
+        <p:nvSpPr>
+          <p:cNvPr id="9" name="Text 7"/>
+          <p:cNvSpPr/>
+          <p:nvPr/>
+        </p:nvSpPr>
+        <p:spPr>
+          <a:xfrm>
+            <a:off x="868680" y="5303520"/>
+            <a:ext cx="10332720" cy="548640"/>
           </a:xfrm>
           <a:prstGeom prst="rect">
             <a:avLst/>
@@ -6361,422 +5433,17 @@
               <a:buNone/>
             </a:pPr>
             <a:r>
-              <a:rPr lang="zh-CN" altLang="en-US" sz="2000" dirty="0">
-                <a:solidFill>
-                  <a:srgbClr val="183D43"/>
+              <a:rPr lang="en-US" sz="1600" dirty="0">
+                <a:solidFill>
+                  <a:srgbClr val="5C5C5C"/>
                 </a:solidFill>
                 <a:latin typeface="Microsoft YaHei" pitchFamily="34" charset="0"/>
                 <a:ea typeface="Microsoft YaHei" pitchFamily="34" charset="-122"/>
                 <a:cs typeface="Microsoft YaHei" pitchFamily="34" charset="-120"/>
               </a:rPr>
-              <a:t>如果是墨卡托，</a:t>
-            </a:r>
-            <a:endParaRPr lang="zh-CN" sz="2000" dirty="0"/>
-          </a:p>
-          <a:p>
-            <a:pPr indent="0" marL="0">
-              <a:buNone/>
-            </a:pPr>
-            <a:r>
-              <a:rPr lang="zh-CN" altLang="en-US" sz="2000" dirty="0">
-                <a:solidFill>
-                  <a:srgbClr val="183D43"/>
-                </a:solidFill>
-                <a:latin typeface="Microsoft YaHei" pitchFamily="34" charset="0"/>
-                <a:ea typeface="Microsoft YaHei" pitchFamily="34" charset="-122"/>
-                <a:cs typeface="Microsoft YaHei" pitchFamily="34" charset="-120"/>
-              </a:rPr>
-              <a:t>先警惕高纬地区的面积放大。</a:t>
-            </a:r>
-            <a:endParaRPr lang="zh-CN" sz="2000" dirty="0"/>
-          </a:p>
-        </p:txBody>
-      </p:sp>
-      <p:sp>
-        <p:nvSpPr>
-          <p:cNvPr id="9" name="Text 7"/>
-          <p:cNvSpPr/>
-          <p:nvPr/>
-        </p:nvSpPr>
-        <p:spPr>
-          <a:xfrm>
-            <a:off x="640080" y="2999232"/>
-            <a:ext cx="685800" cy="603504"/>
-          </a:xfrm>
-          <a:prstGeom prst="rect">
-            <a:avLst/>
-          </a:prstGeom>
-          <a:noFill/>
-          <a:ln/>
-        </p:spPr>
-        <p:txBody>
-          <a:bodyPr wrap="square" lIns="0" tIns="0" rIns="0" bIns="0" rtlCol="0" anchor="ctr"/>
-          <a:lstStyle/>
-          <a:p>
-            <a:pPr indent="0" marL="0">
-              <a:buNone/>
-            </a:pPr>
-            <a:r>
-              <a:rPr lang="zh-CN" altLang="en-US" sz="2800" b="1" dirty="0">
-                <a:solidFill>
-                  <a:srgbClr val="176C70"/>
-                </a:solidFill>
-                <a:latin typeface="Microsoft YaHei" pitchFamily="34" charset="0"/>
-                <a:ea typeface="Microsoft YaHei" pitchFamily="34" charset="-122"/>
-                <a:cs typeface="Microsoft YaHei" pitchFamily="34" charset="-120"/>
-              </a:rPr>
-              <a:t>02</a:t>
-            </a:r>
-            <a:endParaRPr lang="zh-CN" sz="2800" dirty="0"/>
-          </a:p>
-        </p:txBody>
-      </p:sp>
-      <p:sp>
-        <p:nvSpPr>
-          <p:cNvPr id="10" name="Text 8"/>
-          <p:cNvSpPr/>
-          <p:nvPr/>
-        </p:nvSpPr>
-        <p:spPr>
-          <a:xfrm>
-            <a:off x="1600200" y="2999232"/>
-            <a:ext cx="2907792" cy="630936"/>
-          </a:xfrm>
-          <a:prstGeom prst="rect">
-            <a:avLst/>
-          </a:prstGeom>
-          <a:noFill/>
-          <a:ln/>
-        </p:spPr>
-        <p:txBody>
-          <a:bodyPr wrap="square" lIns="0" tIns="0" rIns="0" bIns="0" rtlCol="0" anchor="ctr"/>
-          <a:lstStyle/>
-          <a:p>
-            <a:pPr indent="0" marL="0">
-              <a:buNone/>
-            </a:pPr>
-            <a:r>
-              <a:rPr lang="zh-CN" altLang="en-US" sz="2300" b="1" dirty="0">
-                <a:solidFill>
-                  <a:srgbClr val="183D43"/>
-                </a:solidFill>
-                <a:latin typeface="Microsoft YaHei" pitchFamily="34" charset="0"/>
-                <a:ea typeface="Microsoft YaHei" pitchFamily="34" charset="-122"/>
-                <a:cs typeface="Microsoft YaHei" pitchFamily="34" charset="-120"/>
-              </a:rPr>
-              <a:t>换成同一面积尺度</a:t>
-            </a:r>
-            <a:endParaRPr lang="zh-CN" sz="2300" dirty="0"/>
-          </a:p>
-        </p:txBody>
-      </p:sp>
-      <p:sp>
-        <p:nvSpPr>
-          <p:cNvPr id="11" name="Text 9"/>
-          <p:cNvSpPr/>
-          <p:nvPr/>
-        </p:nvSpPr>
-        <p:spPr>
-          <a:xfrm>
-            <a:off x="4681728" y="2980944"/>
-            <a:ext cx="6766560" cy="749808"/>
-          </a:xfrm>
-          <a:prstGeom prst="rect">
-            <a:avLst/>
-          </a:prstGeom>
-          <a:noFill/>
-          <a:ln/>
-        </p:spPr>
-        <p:txBody>
-          <a:bodyPr wrap="square" lIns="0" tIns="0" rIns="0" bIns="0" rtlCol="0" anchor="ctr"/>
-          <a:lstStyle/>
-          <a:p>
-            <a:pPr indent="0" marL="0">
-              <a:buNone/>
-            </a:pPr>
-            <a:r>
-              <a:rPr lang="zh-CN" altLang="en-US" sz="2000" dirty="0">
-                <a:solidFill>
-                  <a:srgbClr val="183D43"/>
-                </a:solidFill>
-                <a:latin typeface="Microsoft YaHei" pitchFamily="34" charset="0"/>
-                <a:ea typeface="Microsoft YaHei" pitchFamily="34" charset="-122"/>
-                <a:cs typeface="Microsoft YaHei" pitchFamily="34" charset="-120"/>
-              </a:rPr>
-              <a:t>非洲约3040万平方公里；</a:t>
-            </a:r>
-            <a:endParaRPr lang="zh-CN" sz="2000" dirty="0"/>
-          </a:p>
-          <a:p>
-            <a:pPr indent="0" marL="0">
-              <a:buNone/>
-            </a:pPr>
-            <a:r>
-              <a:rPr lang="zh-CN" altLang="en-US" sz="2000" dirty="0">
-                <a:solidFill>
-                  <a:srgbClr val="183D43"/>
-                </a:solidFill>
-                <a:latin typeface="Microsoft YaHei" pitchFamily="34" charset="0"/>
-                <a:ea typeface="Microsoft YaHei" pitchFamily="34" charset="-122"/>
-                <a:cs typeface="Microsoft YaHei" pitchFamily="34" charset="-120"/>
-              </a:rPr>
-              <a:t>格陵兰约217万，非洲约为其14倍。</a:t>
-            </a:r>
-            <a:endParaRPr lang="zh-CN" sz="2000" dirty="0"/>
-          </a:p>
-        </p:txBody>
-      </p:sp>
-      <p:sp>
-        <p:nvSpPr>
-          <p:cNvPr id="12" name="Text 10"/>
-          <p:cNvSpPr/>
-          <p:nvPr/>
-        </p:nvSpPr>
-        <p:spPr>
-          <a:xfrm>
-            <a:off x="640080" y="3941064"/>
-            <a:ext cx="685800" cy="603504"/>
-          </a:xfrm>
-          <a:prstGeom prst="rect">
-            <a:avLst/>
-          </a:prstGeom>
-          <a:noFill/>
-          <a:ln/>
-        </p:spPr>
-        <p:txBody>
-          <a:bodyPr wrap="square" lIns="0" tIns="0" rIns="0" bIns="0" rtlCol="0" anchor="ctr"/>
-          <a:lstStyle/>
-          <a:p>
-            <a:pPr indent="0" marL="0">
-              <a:buNone/>
-            </a:pPr>
-            <a:r>
-              <a:rPr lang="zh-CN" altLang="en-US" sz="2800" b="1" dirty="0">
-                <a:solidFill>
-                  <a:srgbClr val="176C70"/>
-                </a:solidFill>
-                <a:latin typeface="Microsoft YaHei" pitchFamily="34" charset="0"/>
-                <a:ea typeface="Microsoft YaHei" pitchFamily="34" charset="-122"/>
-                <a:cs typeface="Microsoft YaHei" pitchFamily="34" charset="-120"/>
-              </a:rPr>
-              <a:t>03</a:t>
-            </a:r>
-            <a:endParaRPr lang="zh-CN" sz="2800" dirty="0"/>
-          </a:p>
-        </p:txBody>
-      </p:sp>
-      <p:sp>
-        <p:nvSpPr>
-          <p:cNvPr id="13" name="Text 11"/>
-          <p:cNvSpPr/>
-          <p:nvPr/>
-        </p:nvSpPr>
-        <p:spPr>
-          <a:xfrm>
-            <a:off x="1600200" y="3941064"/>
-            <a:ext cx="2907792" cy="630936"/>
-          </a:xfrm>
-          <a:prstGeom prst="rect">
-            <a:avLst/>
-          </a:prstGeom>
-          <a:noFill/>
-          <a:ln/>
-        </p:spPr>
-        <p:txBody>
-          <a:bodyPr wrap="square" lIns="0" tIns="0" rIns="0" bIns="0" rtlCol="0" anchor="ctr"/>
-          <a:lstStyle/>
-          <a:p>
-            <a:pPr indent="0" marL="0">
-              <a:buNone/>
-            </a:pPr>
-            <a:r>
-              <a:rPr lang="zh-CN" altLang="en-US" sz="2300" b="1" dirty="0">
-                <a:solidFill>
-                  <a:srgbClr val="183D43"/>
-                </a:solidFill>
-                <a:latin typeface="Microsoft YaHei" pitchFamily="34" charset="0"/>
-                <a:ea typeface="Microsoft YaHei" pitchFamily="34" charset="-122"/>
-                <a:cs typeface="Microsoft YaHei" pitchFamily="34" charset="-120"/>
-              </a:rPr>
-              <a:t>按目的选择地图</a:t>
-            </a:r>
-            <a:endParaRPr lang="zh-CN" sz="2300" dirty="0"/>
-          </a:p>
-        </p:txBody>
-      </p:sp>
-      <p:sp>
-        <p:nvSpPr>
-          <p:cNvPr id="14" name="Text 12"/>
-          <p:cNvSpPr/>
-          <p:nvPr/>
-        </p:nvSpPr>
-        <p:spPr>
-          <a:xfrm>
-            <a:off x="4681728" y="3922776"/>
-            <a:ext cx="6766560" cy="749808"/>
-          </a:xfrm>
-          <a:prstGeom prst="rect">
-            <a:avLst/>
-          </a:prstGeom>
-          <a:noFill/>
-          <a:ln/>
-        </p:spPr>
-        <p:txBody>
-          <a:bodyPr wrap="square" lIns="0" tIns="0" rIns="0" bIns="0" rtlCol="0" anchor="ctr"/>
-          <a:lstStyle/>
-          <a:p>
-            <a:pPr indent="0" marL="0">
-              <a:buNone/>
-            </a:pPr>
-            <a:r>
-              <a:rPr lang="zh-CN" altLang="en-US" sz="2000" dirty="0">
-                <a:solidFill>
-                  <a:srgbClr val="183D43"/>
-                </a:solidFill>
-                <a:latin typeface="Microsoft YaHei" pitchFamily="34" charset="0"/>
-                <a:ea typeface="Microsoft YaHei" pitchFamily="34" charset="-122"/>
-                <a:cs typeface="Microsoft YaHei" pitchFamily="34" charset="-120"/>
-              </a:rPr>
-              <a:t>比较面积可用等面积投影；</a:t>
-            </a:r>
-            <a:endParaRPr lang="zh-CN" sz="2000" dirty="0"/>
-          </a:p>
-          <a:p>
-            <a:pPr indent="0" marL="0">
-              <a:buNone/>
-            </a:pPr>
-            <a:r>
-              <a:rPr lang="zh-CN" altLang="en-US" sz="2000" dirty="0">
-                <a:solidFill>
-                  <a:srgbClr val="183D43"/>
-                </a:solidFill>
-                <a:latin typeface="Microsoft YaHei" pitchFamily="34" charset="0"/>
-                <a:ea typeface="Microsoft YaHei" pitchFamily="34" charset="-122"/>
-                <a:cs typeface="Microsoft YaHei" pitchFamily="34" charset="-120"/>
-              </a:rPr>
-              <a:t>不要期待一张平面图保留一切。</a:t>
-            </a:r>
-            <a:endParaRPr lang="zh-CN" sz="2000" dirty="0"/>
-          </a:p>
-        </p:txBody>
-      </p:sp>
-      <p:sp>
-        <p:nvSpPr>
-          <p:cNvPr id="15" name="Shape 13"/>
-          <p:cNvSpPr/>
-          <p:nvPr/>
-        </p:nvSpPr>
-        <p:spPr>
-          <a:xfrm>
-            <a:off x="640080" y="5084064"/>
-            <a:ext cx="10899648" cy="960120"/>
-          </a:xfrm>
-          <a:prstGeom prst="rect">
-            <a:avLst/>
-          </a:prstGeom>
-          <a:solidFill>
-            <a:srgbClr val="F0E0D0"/>
-          </a:solidFill>
-          <a:ln w="12700">
-            <a:solidFill>
-              <a:srgbClr val="F0E0D0"/>
-            </a:solidFill>
-            <a:prstDash val="solid"/>
-          </a:ln>
-        </p:spPr>
-      </p:sp>
-      <p:sp>
-        <p:nvSpPr>
-          <p:cNvPr id="16" name="Text 14"/>
-          <p:cNvSpPr/>
-          <p:nvPr/>
-        </p:nvSpPr>
-        <p:spPr>
-          <a:xfrm>
-            <a:off x="877824" y="5303520"/>
-            <a:ext cx="1536192" cy="457200"/>
-          </a:xfrm>
-          <a:prstGeom prst="rect">
-            <a:avLst/>
-          </a:prstGeom>
-          <a:noFill/>
-          <a:ln/>
-        </p:spPr>
-        <p:txBody>
-          <a:bodyPr wrap="square" lIns="0" tIns="0" rIns="0" bIns="0" rtlCol="0" anchor="ctr"/>
-          <a:lstStyle/>
-          <a:p>
-            <a:pPr indent="0" marL="0">
-              <a:buNone/>
-            </a:pPr>
-            <a:r>
-              <a:rPr lang="zh-CN" altLang="en-US" sz="1900" b="1" dirty="0">
-                <a:solidFill>
-                  <a:srgbClr val="A04C2B"/>
-                </a:solidFill>
-                <a:latin typeface="Microsoft YaHei" pitchFamily="34" charset="0"/>
-                <a:ea typeface="Microsoft YaHei" pitchFamily="34" charset="-122"/>
-                <a:cs typeface="Microsoft YaHei" pitchFamily="34" charset="-120"/>
-              </a:rPr>
-              <a:t>材料限制</a:t>
-            </a:r>
-            <a:endParaRPr lang="zh-CN" sz="1900" dirty="0"/>
-          </a:p>
-        </p:txBody>
-      </p:sp>
-      <p:sp>
-        <p:nvSpPr>
-          <p:cNvPr id="17" name="Text 15"/>
-          <p:cNvSpPr/>
-          <p:nvPr/>
-        </p:nvSpPr>
-        <p:spPr>
-          <a:xfrm>
-            <a:off x="2523744" y="5266944"/>
-            <a:ext cx="8668512" cy="603504"/>
-          </a:xfrm>
-          <a:prstGeom prst="rect">
-            <a:avLst/>
-          </a:prstGeom>
-          <a:noFill/>
-          <a:ln/>
-        </p:spPr>
-        <p:txBody>
-          <a:bodyPr wrap="square" lIns="0" tIns="0" rIns="0" bIns="0" rtlCol="0" anchor="ctr"/>
-          <a:lstStyle/>
-          <a:p>
-            <a:pPr indent="0" marL="0">
-              <a:buNone/>
-            </a:pPr>
-            <a:r>
-              <a:rPr lang="zh-CN" altLang="en-US" sz="1600" dirty="0">
-                <a:solidFill>
-                  <a:srgbClr val="183D43"/>
-                </a:solidFill>
-                <a:latin typeface="Microsoft YaHei" pitchFamily="34" charset="0"/>
-                <a:ea typeface="Microsoft YaHei" pitchFamily="34" charset="-122"/>
-                <a:cs typeface="Microsoft YaHei" pitchFamily="34" charset="-120"/>
-              </a:rPr>
-              <a:t>格陵兰官方2026年PDF正文未能提取；面积比较采用公开二手数字。</a:t>
-            </a:r>
-            <a:endParaRPr lang="zh-CN" sz="1600" dirty="0"/>
-          </a:p>
-          <a:p>
-            <a:pPr indent="0" marL="0">
-              <a:buNone/>
-            </a:pPr>
-            <a:r>
-              <a:rPr lang="zh-CN" altLang="en-US" sz="1600" dirty="0">
-                <a:solidFill>
-                  <a:srgbClr val="183D43"/>
-                </a:solidFill>
-                <a:latin typeface="Microsoft YaHei" pitchFamily="34" charset="0"/>
-                <a:ea typeface="Microsoft YaHei" pitchFamily="34" charset="-122"/>
-                <a:cs typeface="Microsoft YaHei" pitchFamily="34" charset="-120"/>
-              </a:rPr>
-              <a:t>约数用于数量级比较，不代表统一口径下的精确测量。</a:t>
-            </a:r>
-            <a:endParaRPr lang="zh-CN" sz="1600" dirty="0"/>
+              <a:t>来源：PROJ；Britannica；IndexMundi；Esri；Natural Earth；Esri</a:t>
+            </a:r>
+            <a:endParaRPr lang="en-US" sz="1600" dirty="0"/>
           </a:p>
         </p:txBody>
       </p:sp>
